--- a/output/wordlabs-expect-3day.pptx
+++ b/output/wordlabs-expect-3day.pptx
@@ -5622,7 +5622,7 @@
                 <a:ea typeface="Trebuchet MS" pitchFamily="34" charset="-122"/>
                 <a:cs typeface="Trebuchet MS" pitchFamily="34" charset="-120"/>
               </a:rPr>
-              <a:t>0</a:t>
+              <a:t>1</a:t>
             </a:r>
             <a:pPr algn="ctr" indent="0" marL="0">
               <a:buNone/>
@@ -6071,7 +6071,7 @@
                 <a:ea typeface="Calibri" pitchFamily="34" charset="-122"/>
                 <a:cs typeface="Calibri" pitchFamily="34" charset="-120"/>
               </a:rPr>
-              <a:t> result left the team full of </a:t>
+              <a:t> result left everyone speechless, and our </a:t>
             </a:r>
             <a:pPr algn="l" indent="0" marL="0">
               <a:buNone/>
@@ -6088,7 +6088,7 @@
                 <a:ea typeface="Calibri" pitchFamily="34" charset="-122"/>
                 <a:cs typeface="Calibri" pitchFamily="34" charset="-120"/>
               </a:rPr>
-              <a:t>expectation</a:t>
+              <a:t>expectations</a:t>
             </a:r>
             <a:pPr algn="l" indent="0" marL="0">
               <a:buNone/>
@@ -6102,7 +6102,7 @@
                 <a:ea typeface="Calibri" pitchFamily="34" charset="-122"/>
                 <a:cs typeface="Calibri" pitchFamily="34" charset="-120"/>
               </a:rPr>
-              <a:t> for the next match.</a:t>
+              <a:t> for the rest of the season changed completely.</a:t>
             </a:r>
             <a:endParaRPr lang="en-US" sz="1800" dirty="0"/>
           </a:p>
@@ -6385,7 +6385,7 @@
                 <a:ea typeface="Trebuchet MS" pitchFamily="34" charset="-122"/>
                 <a:cs typeface="Trebuchet MS" pitchFamily="34" charset="-120"/>
               </a:rPr>
-              <a:t>expectation</a:t>
+              <a:t>expectations</a:t>
             </a:r>
             <a:endParaRPr lang="en-US" sz="1400" dirty="0"/>
           </a:p>
@@ -8084,7 +8084,7 @@
                 <a:ea typeface="Calibri" pitchFamily="34" charset="-122"/>
                 <a:cs typeface="Calibri" pitchFamily="34" charset="-120"/>
               </a:rPr>
-              <a:t>past tense or done</a:t>
+              <a:t>past tense, having been</a:t>
             </a:r>
             <a:endParaRPr lang="en-US" sz="850" dirty="0"/>
           </a:p>
@@ -9181,7 +9181,7 @@
                 <a:ea typeface="Calibri" pitchFamily="34" charset="-122"/>
                 <a:cs typeface="Calibri" pitchFamily="34" charset="-120"/>
               </a:rPr>
-              <a:t>past tense or done</a:t>
+              <a:t>past tense, having been</a:t>
             </a:r>
             <a:endParaRPr lang="en-US" sz="850" dirty="0"/>
           </a:p>
@@ -9550,7 +9550,7 @@
                 <a:ea typeface="Trebuchet MS" pitchFamily="34" charset="-122"/>
                 <a:cs typeface="Trebuchet MS" pitchFamily="34" charset="-120"/>
               </a:rPr>
-              <a:t>pect</a:t>
+              <a:t>pec</a:t>
             </a:r>
             <a:endParaRPr lang="en-US" sz="1400" dirty="0"/>
           </a:p>
@@ -9655,7 +9655,7 @@
                 <a:ea typeface="Trebuchet MS" pitchFamily="34" charset="-122"/>
                 <a:cs typeface="Trebuchet MS" pitchFamily="34" charset="-120"/>
               </a:rPr>
-              <a:t>ed</a:t>
+              <a:t>ted</a:t>
             </a:r>
             <a:endParaRPr lang="en-US" sz="1400" dirty="0"/>
           </a:p>
@@ -10620,7 +10620,7 @@
                 <a:ea typeface="Calibri" pitchFamily="34" charset="-122"/>
                 <a:cs typeface="Calibri" pitchFamily="34" charset="-120"/>
               </a:rPr>
-              <a:t>past tense or done</a:t>
+              <a:t>past tense, having been</a:t>
             </a:r>
             <a:endParaRPr lang="en-US" sz="850" dirty="0"/>
           </a:p>
@@ -10989,7 +10989,7 @@
                 <a:ea typeface="Trebuchet MS" pitchFamily="34" charset="-122"/>
                 <a:cs typeface="Trebuchet MS" pitchFamily="34" charset="-120"/>
               </a:rPr>
-              <a:t>pect</a:t>
+              <a:t>pec</a:t>
             </a:r>
             <a:endParaRPr lang="en-US" sz="1400" dirty="0"/>
           </a:p>
@@ -11094,7 +11094,7 @@
                 <a:ea typeface="Trebuchet MS" pitchFamily="34" charset="-122"/>
                 <a:cs typeface="Trebuchet MS" pitchFamily="34" charset="-120"/>
               </a:rPr>
-              <a:t>ed</a:t>
+              <a:t>ted</a:t>
             </a:r>
             <a:endParaRPr lang="en-US" sz="1400" dirty="0"/>
           </a:p>
@@ -11696,46 +11696,7 @@
       </p:sp>
       <p:sp>
         <p:nvSpPr>
-          <p:cNvPr id="57" name="Text 55"/>
-          <p:cNvSpPr/>
-          <p:nvPr/>
-        </p:nvSpPr>
-        <p:spPr>
-          <a:xfrm>
-            <a:off x="5872111" y="4572000"/>
-            <a:ext cx="603504" cy="219456"/>
-          </a:xfrm>
-          <a:prstGeom prst="rect">
-            <a:avLst/>
-          </a:prstGeom>
-          <a:noFill/>
-          <a:ln/>
-        </p:spPr>
-        <p:txBody>
-          <a:bodyPr wrap="square" lIns="0" tIns="0" rIns="0" bIns="0" rtlCol="0" anchor="t"/>
-          <a:lstStyle/>
-          <a:p>
-            <a:pPr algn="ctr" indent="0" marL="0">
-              <a:buNone/>
-            </a:pPr>
-            <a:r>
-              <a:rPr lang="en-US" sz="750" i="1" dirty="0">
-                <a:solidFill>
-                  <a:srgbClr val="94A3B8"/>
-                </a:solidFill>
-                <a:latin typeface="Calibri" pitchFamily="34" charset="0"/>
-                <a:ea typeface="Calibri" pitchFamily="34" charset="-122"/>
-                <a:cs typeface="Calibri" pitchFamily="34" charset="-120"/>
-              </a:rPr>
-              <a:t>/k/</a:t>
-            </a:r>
-            <a:endParaRPr lang="en-US" sz="750" dirty="0"/>
-          </a:p>
-        </p:txBody>
-      </p:sp>
-      <p:sp>
-        <p:nvSpPr>
-          <p:cNvPr id="58" name="Shape 56"/>
+          <p:cNvPr id="57" name="Shape 55"/>
           <p:cNvSpPr/>
           <p:nvPr/>
         </p:nvSpPr>
@@ -11762,7 +11723,7 @@
       </p:sp>
       <p:sp>
         <p:nvSpPr>
-          <p:cNvPr id="59" name="Text 57"/>
+          <p:cNvPr id="58" name="Text 56"/>
           <p:cNvSpPr/>
           <p:nvPr/>
         </p:nvSpPr>
@@ -11801,7 +11762,7 @@
       </p:sp>
       <p:sp>
         <p:nvSpPr>
-          <p:cNvPr id="60" name="Shape 58"/>
+          <p:cNvPr id="59" name="Shape 57"/>
           <p:cNvSpPr/>
           <p:nvPr/>
         </p:nvSpPr>
@@ -11828,7 +11789,7 @@
       </p:sp>
       <p:sp>
         <p:nvSpPr>
-          <p:cNvPr id="61" name="Text 59"/>
+          <p:cNvPr id="60" name="Text 58"/>
           <p:cNvSpPr/>
           <p:nvPr/>
         </p:nvSpPr>
@@ -11867,7 +11828,7 @@
       </p:sp>
       <p:sp>
         <p:nvSpPr>
-          <p:cNvPr id="62" name="Shape 60"/>
+          <p:cNvPr id="61" name="Shape 59"/>
           <p:cNvSpPr/>
           <p:nvPr/>
         </p:nvSpPr>
@@ -11894,7 +11855,7 @@
       </p:sp>
       <p:sp>
         <p:nvSpPr>
-          <p:cNvPr id="63" name="Text 61"/>
+          <p:cNvPr id="62" name="Text 60"/>
           <p:cNvSpPr/>
           <p:nvPr/>
         </p:nvSpPr>
@@ -12356,7 +12317,7 @@
                 <a:ea typeface="Trebuchet MS" pitchFamily="34" charset="-122"/>
                 <a:cs typeface="Trebuchet MS" pitchFamily="34" charset="-120"/>
               </a:rPr>
-              <a:t>expectation</a:t>
+              <a:t>expectations</a:t>
             </a:r>
             <a:endParaRPr lang="en-US" sz="2800" dirty="0"/>
           </a:p>
@@ -13183,7 +13144,7 @@
                 <a:ea typeface="Trebuchet MS" pitchFamily="34" charset="-122"/>
                 <a:cs typeface="Trebuchet MS" pitchFamily="34" charset="-120"/>
               </a:rPr>
-              <a:t>expectation</a:t>
+              <a:t>expectations</a:t>
             </a:r>
             <a:endParaRPr lang="en-US" sz="2800" dirty="0"/>
           </a:p>
@@ -13263,7 +13224,7 @@
         </p:nvSpPr>
         <p:spPr>
           <a:xfrm>
-            <a:off x="2938272" y="2258568"/>
+            <a:off x="2221992" y="2258568"/>
             <a:ext cx="1828800" cy="292608"/>
           </a:xfrm>
           <a:prstGeom prst="rect">
@@ -13297,7 +13258,7 @@
         </p:nvSpPr>
         <p:spPr>
           <a:xfrm>
-            <a:off x="2938272" y="2258568"/>
+            <a:off x="2221992" y="2258568"/>
             <a:ext cx="1828800" cy="292608"/>
           </a:xfrm>
           <a:prstGeom prst="rect">
@@ -13336,7 +13297,7 @@
         </p:nvSpPr>
         <p:spPr>
           <a:xfrm>
-            <a:off x="2938272" y="2569464"/>
+            <a:off x="2221992" y="2569464"/>
             <a:ext cx="1828800" cy="201168"/>
           </a:xfrm>
           <a:prstGeom prst="rect">
@@ -13375,7 +13336,7 @@
         </p:nvSpPr>
         <p:spPr>
           <a:xfrm>
-            <a:off x="5803392" y="2258568"/>
+            <a:off x="4370832" y="2258568"/>
             <a:ext cx="1828800" cy="292608"/>
           </a:xfrm>
           <a:prstGeom prst="rect">
@@ -13409,7 +13370,7 @@
         </p:nvSpPr>
         <p:spPr>
           <a:xfrm>
-            <a:off x="5803392" y="2258568"/>
+            <a:off x="4370832" y="2258568"/>
             <a:ext cx="1828800" cy="292608"/>
           </a:xfrm>
           <a:prstGeom prst="rect">
@@ -13448,7 +13409,7 @@
         </p:nvSpPr>
         <p:spPr>
           <a:xfrm>
-            <a:off x="5803392" y="2569464"/>
+            <a:off x="4370832" y="2569464"/>
             <a:ext cx="1828800" cy="201168"/>
           </a:xfrm>
           <a:prstGeom prst="rect">
@@ -13473,7 +13434,7 @@
                 <a:ea typeface="Calibri" pitchFamily="34" charset="-122"/>
                 <a:cs typeface="Calibri" pitchFamily="34" charset="-120"/>
               </a:rPr>
-              <a:t>the act or state of</a:t>
+              <a:t>state or process of</a:t>
             </a:r>
             <a:endParaRPr lang="en-US" sz="850" dirty="0"/>
           </a:p>
@@ -13482,6 +13443,118 @@
       <p:sp>
         <p:nvSpPr>
           <p:cNvPr id="22" name="Shape 20"/>
+          <p:cNvSpPr/>
+          <p:nvPr/>
+        </p:nvSpPr>
+        <p:spPr>
+          <a:xfrm>
+            <a:off x="6519672" y="2258568"/>
+            <a:ext cx="1828800" cy="292608"/>
+          </a:xfrm>
+          <a:prstGeom prst="rect">
+            <a:avLst>
+              <a:gd name="adj" fmla="val 25000"/>
+            </a:avLst>
+          </a:prstGeom>
+          <a:solidFill>
+            <a:srgbClr val="FCE7F3"/>
+          </a:solidFill>
+          <a:ln w="19050">
+            <a:solidFill>
+              <a:srgbClr val="DB2777"/>
+            </a:solidFill>
+            <a:prstDash val="solid"/>
+          </a:ln>
+          <a:effectLst>
+            <a:outerShdw sx="100000" sy="100000" kx="0" ky="0" algn="bl" rotWithShape="0" blurRad="101600" dist="38100" dir="8100000">
+              <a:srgbClr val="000000">
+                <a:alpha val="12000"/>
+              </a:srgbClr>
+            </a:outerShdw>
+          </a:effectLst>
+        </p:spPr>
+      </p:sp>
+      <p:sp>
+        <p:nvSpPr>
+          <p:cNvPr id="23" name="Text 21"/>
+          <p:cNvSpPr/>
+          <p:nvPr/>
+        </p:nvSpPr>
+        <p:spPr>
+          <a:xfrm>
+            <a:off x="6519672" y="2258568"/>
+            <a:ext cx="1828800" cy="292608"/>
+          </a:xfrm>
+          <a:prstGeom prst="rect">
+            <a:avLst/>
+          </a:prstGeom>
+          <a:noFill/>
+          <a:ln/>
+        </p:spPr>
+        <p:txBody>
+          <a:bodyPr wrap="square" lIns="0" tIns="0" rIns="0" bIns="0" rtlCol="0" anchor="ctr"/>
+          <a:lstStyle/>
+          <a:p>
+            <a:pPr algn="ctr" indent="0" marL="0">
+              <a:buNone/>
+            </a:pPr>
+            <a:r>
+              <a:rPr lang="en-US" sz="1300" b="1" dirty="0">
+                <a:solidFill>
+                  <a:srgbClr val="9D174D"/>
+                </a:solidFill>
+                <a:latin typeface="Trebuchet MS" pitchFamily="34" charset="0"/>
+                <a:ea typeface="Trebuchet MS" pitchFamily="34" charset="-122"/>
+                <a:cs typeface="Trebuchet MS" pitchFamily="34" charset="-120"/>
+              </a:rPr>
+              <a:t>s</a:t>
+            </a:r>
+            <a:endParaRPr lang="en-US" sz="1300" dirty="0"/>
+          </a:p>
+        </p:txBody>
+      </p:sp>
+      <p:sp>
+        <p:nvSpPr>
+          <p:cNvPr id="24" name="Text 22"/>
+          <p:cNvSpPr/>
+          <p:nvPr/>
+        </p:nvSpPr>
+        <p:spPr>
+          <a:xfrm>
+            <a:off x="6519672" y="2569464"/>
+            <a:ext cx="1828800" cy="201168"/>
+          </a:xfrm>
+          <a:prstGeom prst="rect">
+            <a:avLst/>
+          </a:prstGeom>
+          <a:noFill/>
+          <a:ln/>
+        </p:spPr>
+        <p:txBody>
+          <a:bodyPr wrap="square" lIns="0" tIns="0" rIns="0" bIns="0" rtlCol="0" anchor="t"/>
+          <a:lstStyle/>
+          <a:p>
+            <a:pPr algn="ctr" indent="0" marL="0">
+              <a:buNone/>
+            </a:pPr>
+            <a:r>
+              <a:rPr lang="en-US" sz="850" dirty="0">
+                <a:solidFill>
+                  <a:srgbClr val="475569"/>
+                </a:solidFill>
+                <a:latin typeface="Calibri" pitchFamily="34" charset="0"/>
+                <a:ea typeface="Calibri" pitchFamily="34" charset="-122"/>
+                <a:cs typeface="Calibri" pitchFamily="34" charset="-120"/>
+              </a:rPr>
+              <a:t>more than one</a:t>
+            </a:r>
+            <a:endParaRPr lang="en-US" sz="850" dirty="0"/>
+          </a:p>
+        </p:txBody>
+      </p:sp>
+      <p:sp>
+        <p:nvSpPr>
+          <p:cNvPr id="25" name="Shape 23"/>
           <p:cNvSpPr/>
           <p:nvPr/>
         </p:nvSpPr>
@@ -13508,7 +13581,7 @@
       </p:sp>
       <p:sp>
         <p:nvSpPr>
-          <p:cNvPr id="23" name="Text 21"/>
+          <p:cNvPr id="26" name="Text 24"/>
           <p:cNvSpPr/>
           <p:nvPr/>
         </p:nvSpPr>
@@ -13547,7 +13620,7 @@
       </p:sp>
       <p:sp>
         <p:nvSpPr>
-          <p:cNvPr id="24" name="Shape 22"/>
+          <p:cNvPr id="27" name="Shape 25"/>
           <p:cNvSpPr/>
           <p:nvPr/>
         </p:nvSpPr>
@@ -13574,7 +13647,7 @@
       </p:sp>
       <p:sp>
         <p:nvSpPr>
-          <p:cNvPr id="25" name="Text 23"/>
+          <p:cNvPr id="28" name="Text 26"/>
           <p:cNvSpPr/>
           <p:nvPr/>
         </p:nvSpPr>
@@ -13613,7 +13686,7 @@
       </p:sp>
       <p:sp>
         <p:nvSpPr>
-          <p:cNvPr id="26" name="Shape 24"/>
+          <p:cNvPr id="29" name="Shape 27"/>
           <p:cNvSpPr/>
           <p:nvPr/>
         </p:nvSpPr>
@@ -13640,7 +13713,7 @@
       </p:sp>
       <p:sp>
         <p:nvSpPr>
-          <p:cNvPr id="27" name="Text 25"/>
+          <p:cNvPr id="30" name="Text 28"/>
           <p:cNvSpPr/>
           <p:nvPr/>
         </p:nvSpPr>
@@ -13679,7 +13752,7 @@
       </p:sp>
       <p:sp>
         <p:nvSpPr>
-          <p:cNvPr id="28" name="Shape 26"/>
+          <p:cNvPr id="31" name="Shape 29"/>
           <p:cNvSpPr/>
           <p:nvPr/>
         </p:nvSpPr>
@@ -13706,7 +13779,7 @@
       </p:sp>
       <p:sp>
         <p:nvSpPr>
-          <p:cNvPr id="29" name="Text 27"/>
+          <p:cNvPr id="32" name="Text 30"/>
           <p:cNvSpPr/>
           <p:nvPr/>
         </p:nvSpPr>
@@ -14168,7 +14241,7 @@
                 <a:ea typeface="Trebuchet MS" pitchFamily="34" charset="-122"/>
                 <a:cs typeface="Trebuchet MS" pitchFamily="34" charset="-120"/>
               </a:rPr>
-              <a:t>expectation</a:t>
+              <a:t>expectations</a:t>
             </a:r>
             <a:endParaRPr lang="en-US" sz="2800" dirty="0"/>
           </a:p>
@@ -14248,7 +14321,7 @@
         </p:nvSpPr>
         <p:spPr>
           <a:xfrm>
-            <a:off x="2938272" y="2258568"/>
+            <a:off x="2221992" y="2258568"/>
             <a:ext cx="1828800" cy="292608"/>
           </a:xfrm>
           <a:prstGeom prst="rect">
@@ -14282,7 +14355,7 @@
         </p:nvSpPr>
         <p:spPr>
           <a:xfrm>
-            <a:off x="2938272" y="2258568"/>
+            <a:off x="2221992" y="2258568"/>
             <a:ext cx="1828800" cy="292608"/>
           </a:xfrm>
           <a:prstGeom prst="rect">
@@ -14321,7 +14394,7 @@
         </p:nvSpPr>
         <p:spPr>
           <a:xfrm>
-            <a:off x="2938272" y="2569464"/>
+            <a:off x="2221992" y="2569464"/>
             <a:ext cx="1828800" cy="201168"/>
           </a:xfrm>
           <a:prstGeom prst="rect">
@@ -14360,7 +14433,7 @@
         </p:nvSpPr>
         <p:spPr>
           <a:xfrm>
-            <a:off x="5803392" y="2258568"/>
+            <a:off x="4370832" y="2258568"/>
             <a:ext cx="1828800" cy="292608"/>
           </a:xfrm>
           <a:prstGeom prst="rect">
@@ -14394,7 +14467,7 @@
         </p:nvSpPr>
         <p:spPr>
           <a:xfrm>
-            <a:off x="5803392" y="2258568"/>
+            <a:off x="4370832" y="2258568"/>
             <a:ext cx="1828800" cy="292608"/>
           </a:xfrm>
           <a:prstGeom prst="rect">
@@ -14433,7 +14506,7 @@
         </p:nvSpPr>
         <p:spPr>
           <a:xfrm>
-            <a:off x="5803392" y="2569464"/>
+            <a:off x="4370832" y="2569464"/>
             <a:ext cx="1828800" cy="201168"/>
           </a:xfrm>
           <a:prstGeom prst="rect">
@@ -14458,7 +14531,7 @@
                 <a:ea typeface="Calibri" pitchFamily="34" charset="-122"/>
                 <a:cs typeface="Calibri" pitchFamily="34" charset="-120"/>
               </a:rPr>
-              <a:t>the act or state of</a:t>
+              <a:t>state or process of</a:t>
             </a:r>
             <a:endParaRPr lang="en-US" sz="850" dirty="0"/>
           </a:p>
@@ -14467,6 +14540,118 @@
       <p:sp>
         <p:nvSpPr>
           <p:cNvPr id="22" name="Shape 20"/>
+          <p:cNvSpPr/>
+          <p:nvPr/>
+        </p:nvSpPr>
+        <p:spPr>
+          <a:xfrm>
+            <a:off x="6519672" y="2258568"/>
+            <a:ext cx="1828800" cy="292608"/>
+          </a:xfrm>
+          <a:prstGeom prst="rect">
+            <a:avLst>
+              <a:gd name="adj" fmla="val 25000"/>
+            </a:avLst>
+          </a:prstGeom>
+          <a:solidFill>
+            <a:srgbClr val="FCE7F3"/>
+          </a:solidFill>
+          <a:ln w="19050">
+            <a:solidFill>
+              <a:srgbClr val="DB2777"/>
+            </a:solidFill>
+            <a:prstDash val="solid"/>
+          </a:ln>
+          <a:effectLst>
+            <a:outerShdw sx="100000" sy="100000" kx="0" ky="0" algn="bl" rotWithShape="0" blurRad="101600" dist="38100" dir="8100000">
+              <a:srgbClr val="000000">
+                <a:alpha val="12000"/>
+              </a:srgbClr>
+            </a:outerShdw>
+          </a:effectLst>
+        </p:spPr>
+      </p:sp>
+      <p:sp>
+        <p:nvSpPr>
+          <p:cNvPr id="23" name="Text 21"/>
+          <p:cNvSpPr/>
+          <p:nvPr/>
+        </p:nvSpPr>
+        <p:spPr>
+          <a:xfrm>
+            <a:off x="6519672" y="2258568"/>
+            <a:ext cx="1828800" cy="292608"/>
+          </a:xfrm>
+          <a:prstGeom prst="rect">
+            <a:avLst/>
+          </a:prstGeom>
+          <a:noFill/>
+          <a:ln/>
+        </p:spPr>
+        <p:txBody>
+          <a:bodyPr wrap="square" lIns="0" tIns="0" rIns="0" bIns="0" rtlCol="0" anchor="ctr"/>
+          <a:lstStyle/>
+          <a:p>
+            <a:pPr algn="ctr" indent="0" marL="0">
+              <a:buNone/>
+            </a:pPr>
+            <a:r>
+              <a:rPr lang="en-US" sz="1300" b="1" dirty="0">
+                <a:solidFill>
+                  <a:srgbClr val="9D174D"/>
+                </a:solidFill>
+                <a:latin typeface="Trebuchet MS" pitchFamily="34" charset="0"/>
+                <a:ea typeface="Trebuchet MS" pitchFamily="34" charset="-122"/>
+                <a:cs typeface="Trebuchet MS" pitchFamily="34" charset="-120"/>
+              </a:rPr>
+              <a:t>s</a:t>
+            </a:r>
+            <a:endParaRPr lang="en-US" sz="1300" dirty="0"/>
+          </a:p>
+        </p:txBody>
+      </p:sp>
+      <p:sp>
+        <p:nvSpPr>
+          <p:cNvPr id="24" name="Text 22"/>
+          <p:cNvSpPr/>
+          <p:nvPr/>
+        </p:nvSpPr>
+        <p:spPr>
+          <a:xfrm>
+            <a:off x="6519672" y="2569464"/>
+            <a:ext cx="1828800" cy="201168"/>
+          </a:xfrm>
+          <a:prstGeom prst="rect">
+            <a:avLst/>
+          </a:prstGeom>
+          <a:noFill/>
+          <a:ln/>
+        </p:spPr>
+        <p:txBody>
+          <a:bodyPr wrap="square" lIns="0" tIns="0" rIns="0" bIns="0" rtlCol="0" anchor="t"/>
+          <a:lstStyle/>
+          <a:p>
+            <a:pPr algn="ctr" indent="0" marL="0">
+              <a:buNone/>
+            </a:pPr>
+            <a:r>
+              <a:rPr lang="en-US" sz="850" dirty="0">
+                <a:solidFill>
+                  <a:srgbClr val="475569"/>
+                </a:solidFill>
+                <a:latin typeface="Calibri" pitchFamily="34" charset="0"/>
+                <a:ea typeface="Calibri" pitchFamily="34" charset="-122"/>
+                <a:cs typeface="Calibri" pitchFamily="34" charset="-120"/>
+              </a:rPr>
+              <a:t>more than one</a:t>
+            </a:r>
+            <a:endParaRPr lang="en-US" sz="850" dirty="0"/>
+          </a:p>
+        </p:txBody>
+      </p:sp>
+      <p:sp>
+        <p:nvSpPr>
+          <p:cNvPr id="25" name="Shape 23"/>
           <p:cNvSpPr/>
           <p:nvPr/>
         </p:nvSpPr>
@@ -14493,7 +14678,7 @@
       </p:sp>
       <p:sp>
         <p:nvSpPr>
-          <p:cNvPr id="23" name="Text 21"/>
+          <p:cNvPr id="26" name="Text 24"/>
           <p:cNvSpPr/>
           <p:nvPr/>
         </p:nvSpPr>
@@ -14532,7 +14717,7 @@
       </p:sp>
       <p:sp>
         <p:nvSpPr>
-          <p:cNvPr id="24" name="Shape 22"/>
+          <p:cNvPr id="27" name="Shape 25"/>
           <p:cNvSpPr/>
           <p:nvPr/>
         </p:nvSpPr>
@@ -14559,7 +14744,7 @@
       </p:sp>
       <p:sp>
         <p:nvSpPr>
-          <p:cNvPr id="25" name="Shape 23"/>
+          <p:cNvPr id="28" name="Shape 26"/>
           <p:cNvSpPr/>
           <p:nvPr/>
         </p:nvSpPr>
@@ -14586,7 +14771,7 @@
       </p:sp>
       <p:sp>
         <p:nvSpPr>
-          <p:cNvPr id="26" name="Text 24"/>
+          <p:cNvPr id="29" name="Text 27"/>
           <p:cNvSpPr/>
           <p:nvPr/>
         </p:nvSpPr>
@@ -14625,7 +14810,7 @@
       </p:sp>
       <p:sp>
         <p:nvSpPr>
-          <p:cNvPr id="27" name="Text 25"/>
+          <p:cNvPr id="30" name="Text 28"/>
           <p:cNvSpPr/>
           <p:nvPr/>
         </p:nvSpPr>
@@ -14664,7 +14849,7 @@
       </p:sp>
       <p:sp>
         <p:nvSpPr>
-          <p:cNvPr id="28" name="Shape 26"/>
+          <p:cNvPr id="31" name="Shape 29"/>
           <p:cNvSpPr/>
           <p:nvPr/>
         </p:nvSpPr>
@@ -14691,7 +14876,7 @@
       </p:sp>
       <p:sp>
         <p:nvSpPr>
-          <p:cNvPr id="29" name="Text 27"/>
+          <p:cNvPr id="32" name="Text 30"/>
           <p:cNvSpPr/>
           <p:nvPr/>
         </p:nvSpPr>
@@ -14730,7 +14915,7 @@
       </p:sp>
       <p:sp>
         <p:nvSpPr>
-          <p:cNvPr id="30" name="Text 28"/>
+          <p:cNvPr id="33" name="Text 31"/>
           <p:cNvSpPr/>
           <p:nvPr/>
         </p:nvSpPr>
@@ -14769,7 +14954,7 @@
       </p:sp>
       <p:sp>
         <p:nvSpPr>
-          <p:cNvPr id="31" name="Shape 29"/>
+          <p:cNvPr id="34" name="Shape 32"/>
           <p:cNvSpPr/>
           <p:nvPr/>
         </p:nvSpPr>
@@ -14796,7 +14981,7 @@
       </p:sp>
       <p:sp>
         <p:nvSpPr>
-          <p:cNvPr id="32" name="Text 30"/>
+          <p:cNvPr id="35" name="Text 33"/>
           <p:cNvSpPr/>
           <p:nvPr/>
         </p:nvSpPr>
@@ -14835,7 +15020,7 @@
       </p:sp>
       <p:sp>
         <p:nvSpPr>
-          <p:cNvPr id="33" name="Text 31"/>
+          <p:cNvPr id="36" name="Text 34"/>
           <p:cNvSpPr/>
           <p:nvPr/>
         </p:nvSpPr>
@@ -14874,7 +15059,7 @@
       </p:sp>
       <p:sp>
         <p:nvSpPr>
-          <p:cNvPr id="34" name="Shape 32"/>
+          <p:cNvPr id="37" name="Shape 35"/>
           <p:cNvSpPr/>
           <p:nvPr/>
         </p:nvSpPr>
@@ -14901,7 +15086,7 @@
       </p:sp>
       <p:sp>
         <p:nvSpPr>
-          <p:cNvPr id="35" name="Text 33"/>
+          <p:cNvPr id="38" name="Text 36"/>
           <p:cNvSpPr/>
           <p:nvPr/>
         </p:nvSpPr>
@@ -14932,7 +15117,7 @@
                 <a:ea typeface="Trebuchet MS" pitchFamily="34" charset="-122"/>
                 <a:cs typeface="Trebuchet MS" pitchFamily="34" charset="-120"/>
               </a:rPr>
-              <a:t>tion</a:t>
+              <a:t>tions</a:t>
             </a:r>
             <a:endParaRPr lang="en-US" sz="1400" dirty="0"/>
           </a:p>
@@ -14940,7 +15125,7 @@
       </p:sp>
       <p:sp>
         <p:nvSpPr>
-          <p:cNvPr id="36" name="Shape 34"/>
+          <p:cNvPr id="39" name="Shape 37"/>
           <p:cNvSpPr/>
           <p:nvPr/>
         </p:nvSpPr>
@@ -14967,7 +15152,7 @@
       </p:sp>
       <p:sp>
         <p:nvSpPr>
-          <p:cNvPr id="37" name="Text 35"/>
+          <p:cNvPr id="40" name="Text 38"/>
           <p:cNvSpPr/>
           <p:nvPr/>
         </p:nvSpPr>
@@ -15006,7 +15191,7 @@
       </p:sp>
       <p:sp>
         <p:nvSpPr>
-          <p:cNvPr id="38" name="Shape 36"/>
+          <p:cNvPr id="41" name="Shape 39"/>
           <p:cNvSpPr/>
           <p:nvPr/>
         </p:nvSpPr>
@@ -15033,7 +15218,7 @@
       </p:sp>
       <p:sp>
         <p:nvSpPr>
-          <p:cNvPr id="39" name="Text 37"/>
+          <p:cNvPr id="42" name="Text 40"/>
           <p:cNvSpPr/>
           <p:nvPr/>
         </p:nvSpPr>
@@ -15760,7 +15945,7 @@
                 <a:ea typeface="Trebuchet MS" pitchFamily="34" charset="-122"/>
                 <a:cs typeface="Trebuchet MS" pitchFamily="34" charset="-120"/>
               </a:rPr>
-              <a:t>expectation</a:t>
+              <a:t>expectations</a:t>
             </a:r>
             <a:endParaRPr lang="en-US" sz="2800" dirty="0"/>
           </a:p>
@@ -15840,7 +16025,7 @@
         </p:nvSpPr>
         <p:spPr>
           <a:xfrm>
-            <a:off x="2938272" y="2258568"/>
+            <a:off x="2221992" y="2258568"/>
             <a:ext cx="1828800" cy="292608"/>
           </a:xfrm>
           <a:prstGeom prst="rect">
@@ -15874,7 +16059,7 @@
         </p:nvSpPr>
         <p:spPr>
           <a:xfrm>
-            <a:off x="2938272" y="2258568"/>
+            <a:off x="2221992" y="2258568"/>
             <a:ext cx="1828800" cy="292608"/>
           </a:xfrm>
           <a:prstGeom prst="rect">
@@ -15913,7 +16098,7 @@
         </p:nvSpPr>
         <p:spPr>
           <a:xfrm>
-            <a:off x="2938272" y="2569464"/>
+            <a:off x="2221992" y="2569464"/>
             <a:ext cx="1828800" cy="201168"/>
           </a:xfrm>
           <a:prstGeom prst="rect">
@@ -15952,7 +16137,7 @@
         </p:nvSpPr>
         <p:spPr>
           <a:xfrm>
-            <a:off x="5803392" y="2258568"/>
+            <a:off x="4370832" y="2258568"/>
             <a:ext cx="1828800" cy="292608"/>
           </a:xfrm>
           <a:prstGeom prst="rect">
@@ -15986,7 +16171,7 @@
         </p:nvSpPr>
         <p:spPr>
           <a:xfrm>
-            <a:off x="5803392" y="2258568"/>
+            <a:off x="4370832" y="2258568"/>
             <a:ext cx="1828800" cy="292608"/>
           </a:xfrm>
           <a:prstGeom prst="rect">
@@ -16025,7 +16210,7 @@
         </p:nvSpPr>
         <p:spPr>
           <a:xfrm>
-            <a:off x="5803392" y="2569464"/>
+            <a:off x="4370832" y="2569464"/>
             <a:ext cx="1828800" cy="201168"/>
           </a:xfrm>
           <a:prstGeom prst="rect">
@@ -16050,7 +16235,7 @@
                 <a:ea typeface="Calibri" pitchFamily="34" charset="-122"/>
                 <a:cs typeface="Calibri" pitchFamily="34" charset="-120"/>
               </a:rPr>
-              <a:t>the act or state of</a:t>
+              <a:t>state or process of</a:t>
             </a:r>
             <a:endParaRPr lang="en-US" sz="850" dirty="0"/>
           </a:p>
@@ -16059,6 +16244,118 @@
       <p:sp>
         <p:nvSpPr>
           <p:cNvPr id="22" name="Shape 20"/>
+          <p:cNvSpPr/>
+          <p:nvPr/>
+        </p:nvSpPr>
+        <p:spPr>
+          <a:xfrm>
+            <a:off x="6519672" y="2258568"/>
+            <a:ext cx="1828800" cy="292608"/>
+          </a:xfrm>
+          <a:prstGeom prst="rect">
+            <a:avLst>
+              <a:gd name="adj" fmla="val 25000"/>
+            </a:avLst>
+          </a:prstGeom>
+          <a:solidFill>
+            <a:srgbClr val="FCE7F3"/>
+          </a:solidFill>
+          <a:ln w="19050">
+            <a:solidFill>
+              <a:srgbClr val="DB2777"/>
+            </a:solidFill>
+            <a:prstDash val="solid"/>
+          </a:ln>
+          <a:effectLst>
+            <a:outerShdw sx="100000" sy="100000" kx="0" ky="0" algn="bl" rotWithShape="0" blurRad="101600" dist="38100" dir="8100000">
+              <a:srgbClr val="000000">
+                <a:alpha val="12000"/>
+              </a:srgbClr>
+            </a:outerShdw>
+          </a:effectLst>
+        </p:spPr>
+      </p:sp>
+      <p:sp>
+        <p:nvSpPr>
+          <p:cNvPr id="23" name="Text 21"/>
+          <p:cNvSpPr/>
+          <p:nvPr/>
+        </p:nvSpPr>
+        <p:spPr>
+          <a:xfrm>
+            <a:off x="6519672" y="2258568"/>
+            <a:ext cx="1828800" cy="292608"/>
+          </a:xfrm>
+          <a:prstGeom prst="rect">
+            <a:avLst/>
+          </a:prstGeom>
+          <a:noFill/>
+          <a:ln/>
+        </p:spPr>
+        <p:txBody>
+          <a:bodyPr wrap="square" lIns="0" tIns="0" rIns="0" bIns="0" rtlCol="0" anchor="ctr"/>
+          <a:lstStyle/>
+          <a:p>
+            <a:pPr algn="ctr" indent="0" marL="0">
+              <a:buNone/>
+            </a:pPr>
+            <a:r>
+              <a:rPr lang="en-US" sz="1300" b="1" dirty="0">
+                <a:solidFill>
+                  <a:srgbClr val="9D174D"/>
+                </a:solidFill>
+                <a:latin typeface="Trebuchet MS" pitchFamily="34" charset="0"/>
+                <a:ea typeface="Trebuchet MS" pitchFamily="34" charset="-122"/>
+                <a:cs typeface="Trebuchet MS" pitchFamily="34" charset="-120"/>
+              </a:rPr>
+              <a:t>s</a:t>
+            </a:r>
+            <a:endParaRPr lang="en-US" sz="1300" dirty="0"/>
+          </a:p>
+        </p:txBody>
+      </p:sp>
+      <p:sp>
+        <p:nvSpPr>
+          <p:cNvPr id="24" name="Text 22"/>
+          <p:cNvSpPr/>
+          <p:nvPr/>
+        </p:nvSpPr>
+        <p:spPr>
+          <a:xfrm>
+            <a:off x="6519672" y="2569464"/>
+            <a:ext cx="1828800" cy="201168"/>
+          </a:xfrm>
+          <a:prstGeom prst="rect">
+            <a:avLst/>
+          </a:prstGeom>
+          <a:noFill/>
+          <a:ln/>
+        </p:spPr>
+        <p:txBody>
+          <a:bodyPr wrap="square" lIns="0" tIns="0" rIns="0" bIns="0" rtlCol="0" anchor="t"/>
+          <a:lstStyle/>
+          <a:p>
+            <a:pPr algn="ctr" indent="0" marL="0">
+              <a:buNone/>
+            </a:pPr>
+            <a:r>
+              <a:rPr lang="en-US" sz="850" dirty="0">
+                <a:solidFill>
+                  <a:srgbClr val="475569"/>
+                </a:solidFill>
+                <a:latin typeface="Calibri" pitchFamily="34" charset="0"/>
+                <a:ea typeface="Calibri" pitchFamily="34" charset="-122"/>
+                <a:cs typeface="Calibri" pitchFamily="34" charset="-120"/>
+              </a:rPr>
+              <a:t>more than one</a:t>
+            </a:r>
+            <a:endParaRPr lang="en-US" sz="850" dirty="0"/>
+          </a:p>
+        </p:txBody>
+      </p:sp>
+      <p:sp>
+        <p:nvSpPr>
+          <p:cNvPr id="25" name="Shape 23"/>
           <p:cNvSpPr/>
           <p:nvPr/>
         </p:nvSpPr>
@@ -16085,7 +16382,7 @@
       </p:sp>
       <p:sp>
         <p:nvSpPr>
-          <p:cNvPr id="23" name="Text 21"/>
+          <p:cNvPr id="26" name="Text 24"/>
           <p:cNvSpPr/>
           <p:nvPr/>
         </p:nvSpPr>
@@ -16124,7 +16421,7 @@
       </p:sp>
       <p:sp>
         <p:nvSpPr>
-          <p:cNvPr id="24" name="Shape 22"/>
+          <p:cNvPr id="27" name="Shape 25"/>
           <p:cNvSpPr/>
           <p:nvPr/>
         </p:nvSpPr>
@@ -16151,7 +16448,7 @@
       </p:sp>
       <p:sp>
         <p:nvSpPr>
-          <p:cNvPr id="25" name="Shape 23"/>
+          <p:cNvPr id="28" name="Shape 26"/>
           <p:cNvSpPr/>
           <p:nvPr/>
         </p:nvSpPr>
@@ -16178,7 +16475,7 @@
       </p:sp>
       <p:sp>
         <p:nvSpPr>
-          <p:cNvPr id="26" name="Text 24"/>
+          <p:cNvPr id="29" name="Text 27"/>
           <p:cNvSpPr/>
           <p:nvPr/>
         </p:nvSpPr>
@@ -16217,7 +16514,7 @@
       </p:sp>
       <p:sp>
         <p:nvSpPr>
-          <p:cNvPr id="27" name="Text 25"/>
+          <p:cNvPr id="30" name="Text 28"/>
           <p:cNvSpPr/>
           <p:nvPr/>
         </p:nvSpPr>
@@ -16256,7 +16553,7 @@
       </p:sp>
       <p:sp>
         <p:nvSpPr>
-          <p:cNvPr id="28" name="Shape 26"/>
+          <p:cNvPr id="31" name="Shape 29"/>
           <p:cNvSpPr/>
           <p:nvPr/>
         </p:nvSpPr>
@@ -16283,7 +16580,7 @@
       </p:sp>
       <p:sp>
         <p:nvSpPr>
-          <p:cNvPr id="29" name="Text 27"/>
+          <p:cNvPr id="32" name="Text 30"/>
           <p:cNvSpPr/>
           <p:nvPr/>
         </p:nvSpPr>
@@ -16322,7 +16619,7 @@
       </p:sp>
       <p:sp>
         <p:nvSpPr>
-          <p:cNvPr id="30" name="Text 28"/>
+          <p:cNvPr id="33" name="Text 31"/>
           <p:cNvSpPr/>
           <p:nvPr/>
         </p:nvSpPr>
@@ -16361,7 +16658,7 @@
       </p:sp>
       <p:sp>
         <p:nvSpPr>
-          <p:cNvPr id="31" name="Shape 29"/>
+          <p:cNvPr id="34" name="Shape 32"/>
           <p:cNvSpPr/>
           <p:nvPr/>
         </p:nvSpPr>
@@ -16388,7 +16685,7 @@
       </p:sp>
       <p:sp>
         <p:nvSpPr>
-          <p:cNvPr id="32" name="Text 30"/>
+          <p:cNvPr id="35" name="Text 33"/>
           <p:cNvSpPr/>
           <p:nvPr/>
         </p:nvSpPr>
@@ -16427,7 +16724,7 @@
       </p:sp>
       <p:sp>
         <p:nvSpPr>
-          <p:cNvPr id="33" name="Text 31"/>
+          <p:cNvPr id="36" name="Text 34"/>
           <p:cNvSpPr/>
           <p:nvPr/>
         </p:nvSpPr>
@@ -16466,7 +16763,7 @@
       </p:sp>
       <p:sp>
         <p:nvSpPr>
-          <p:cNvPr id="34" name="Shape 32"/>
+          <p:cNvPr id="37" name="Shape 35"/>
           <p:cNvSpPr/>
           <p:nvPr/>
         </p:nvSpPr>
@@ -16493,7 +16790,7 @@
       </p:sp>
       <p:sp>
         <p:nvSpPr>
-          <p:cNvPr id="35" name="Text 33"/>
+          <p:cNvPr id="38" name="Text 36"/>
           <p:cNvSpPr/>
           <p:nvPr/>
         </p:nvSpPr>
@@ -16524,7 +16821,7 @@
                 <a:ea typeface="Trebuchet MS" pitchFamily="34" charset="-122"/>
                 <a:cs typeface="Trebuchet MS" pitchFamily="34" charset="-120"/>
               </a:rPr>
-              <a:t>tion</a:t>
+              <a:t>tions</a:t>
             </a:r>
             <a:endParaRPr lang="en-US" sz="1400" dirty="0"/>
           </a:p>
@@ -16532,7 +16829,7 @@
       </p:sp>
       <p:sp>
         <p:nvSpPr>
-          <p:cNvPr id="36" name="Shape 34"/>
+          <p:cNvPr id="39" name="Shape 37"/>
           <p:cNvSpPr/>
           <p:nvPr/>
         </p:nvSpPr>
@@ -16559,7 +16856,7 @@
       </p:sp>
       <p:sp>
         <p:nvSpPr>
-          <p:cNvPr id="37" name="Text 35"/>
+          <p:cNvPr id="40" name="Text 38"/>
           <p:cNvSpPr/>
           <p:nvPr/>
         </p:nvSpPr>
@@ -16598,7 +16895,7 @@
       </p:sp>
       <p:sp>
         <p:nvSpPr>
-          <p:cNvPr id="38" name="Shape 36"/>
+          <p:cNvPr id="41" name="Shape 39"/>
           <p:cNvSpPr/>
           <p:nvPr/>
         </p:nvSpPr>
@@ -16625,14 +16922,14 @@
       </p:sp>
       <p:sp>
         <p:nvSpPr>
-          <p:cNvPr id="39" name="Shape 37"/>
-          <p:cNvSpPr/>
-          <p:nvPr/>
-        </p:nvSpPr>
-        <p:spPr>
-          <a:xfrm>
-            <a:off x="1951828" y="4169664"/>
-            <a:ext cx="603504" cy="384048"/>
+          <p:cNvPr id="42" name="Shape 40"/>
+          <p:cNvSpPr/>
+          <p:nvPr/>
+        </p:nvSpPr>
+        <p:spPr>
+          <a:xfrm>
+            <a:off x="1952244" y="4169664"/>
+            <a:ext cx="543652" cy="384048"/>
           </a:xfrm>
           <a:prstGeom prst="rect">
             <a:avLst>
@@ -16652,14 +16949,14 @@
       </p:sp>
       <p:sp>
         <p:nvSpPr>
-          <p:cNvPr id="40" name="Text 38"/>
-          <p:cNvSpPr/>
-          <p:nvPr/>
-        </p:nvSpPr>
-        <p:spPr>
-          <a:xfrm>
-            <a:off x="1951828" y="4169664"/>
-            <a:ext cx="603504" cy="384048"/>
+          <p:cNvPr id="43" name="Text 41"/>
+          <p:cNvSpPr/>
+          <p:nvPr/>
+        </p:nvSpPr>
+        <p:spPr>
+          <a:xfrm>
+            <a:off x="1952244" y="4169664"/>
+            <a:ext cx="543652" cy="384048"/>
           </a:xfrm>
           <a:prstGeom prst="rect">
             <a:avLst/>
@@ -16691,14 +16988,14 @@
       </p:sp>
       <p:sp>
         <p:nvSpPr>
-          <p:cNvPr id="41" name="Shape 39"/>
-          <p:cNvSpPr/>
-          <p:nvPr/>
-        </p:nvSpPr>
-        <p:spPr>
-          <a:xfrm>
-            <a:off x="2605209" y="4169664"/>
-            <a:ext cx="603504" cy="384048"/>
+          <p:cNvPr id="44" name="Shape 42"/>
+          <p:cNvSpPr/>
+          <p:nvPr/>
+        </p:nvSpPr>
+        <p:spPr>
+          <a:xfrm>
+            <a:off x="2546188" y="4169664"/>
+            <a:ext cx="543652" cy="384048"/>
           </a:xfrm>
           <a:prstGeom prst="rect">
             <a:avLst>
@@ -16718,14 +17015,14 @@
       </p:sp>
       <p:sp>
         <p:nvSpPr>
-          <p:cNvPr id="42" name="Text 40"/>
-          <p:cNvSpPr/>
-          <p:nvPr/>
-        </p:nvSpPr>
-        <p:spPr>
-          <a:xfrm>
-            <a:off x="2605209" y="4169664"/>
-            <a:ext cx="603504" cy="384048"/>
+          <p:cNvPr id="45" name="Text 43"/>
+          <p:cNvSpPr/>
+          <p:nvPr/>
+        </p:nvSpPr>
+        <p:spPr>
+          <a:xfrm>
+            <a:off x="2546188" y="4169664"/>
+            <a:ext cx="543652" cy="384048"/>
           </a:xfrm>
           <a:prstGeom prst="rect">
             <a:avLst/>
@@ -16757,14 +17054,14 @@
       </p:sp>
       <p:sp>
         <p:nvSpPr>
-          <p:cNvPr id="43" name="Text 41"/>
-          <p:cNvSpPr/>
-          <p:nvPr/>
-        </p:nvSpPr>
-        <p:spPr>
-          <a:xfrm>
-            <a:off x="2605209" y="4572000"/>
-            <a:ext cx="603504" cy="219456"/>
+          <p:cNvPr id="46" name="Text 44"/>
+          <p:cNvSpPr/>
+          <p:nvPr/>
+        </p:nvSpPr>
+        <p:spPr>
+          <a:xfrm>
+            <a:off x="2546188" y="4572000"/>
+            <a:ext cx="543652" cy="219456"/>
           </a:xfrm>
           <a:prstGeom prst="rect">
             <a:avLst/>
@@ -16796,14 +17093,14 @@
       </p:sp>
       <p:sp>
         <p:nvSpPr>
-          <p:cNvPr id="44" name="Shape 42"/>
-          <p:cNvSpPr/>
-          <p:nvPr/>
-        </p:nvSpPr>
-        <p:spPr>
-          <a:xfrm>
-            <a:off x="3258589" y="4169664"/>
-            <a:ext cx="603504" cy="384048"/>
+          <p:cNvPr id="47" name="Shape 45"/>
+          <p:cNvSpPr/>
+          <p:nvPr/>
+        </p:nvSpPr>
+        <p:spPr>
+          <a:xfrm>
+            <a:off x="3140133" y="4169664"/>
+            <a:ext cx="543652" cy="384048"/>
           </a:xfrm>
           <a:prstGeom prst="rect">
             <a:avLst>
@@ -16823,14 +17120,14 @@
       </p:sp>
       <p:sp>
         <p:nvSpPr>
-          <p:cNvPr id="45" name="Text 43"/>
-          <p:cNvSpPr/>
-          <p:nvPr/>
-        </p:nvSpPr>
-        <p:spPr>
-          <a:xfrm>
-            <a:off x="3258589" y="4169664"/>
-            <a:ext cx="603504" cy="384048"/>
+          <p:cNvPr id="48" name="Text 46"/>
+          <p:cNvSpPr/>
+          <p:nvPr/>
+        </p:nvSpPr>
+        <p:spPr>
+          <a:xfrm>
+            <a:off x="3140133" y="4169664"/>
+            <a:ext cx="543652" cy="384048"/>
           </a:xfrm>
           <a:prstGeom prst="rect">
             <a:avLst/>
@@ -16862,14 +17159,14 @@
       </p:sp>
       <p:sp>
         <p:nvSpPr>
-          <p:cNvPr id="46" name="Shape 44"/>
-          <p:cNvSpPr/>
-          <p:nvPr/>
-        </p:nvSpPr>
-        <p:spPr>
-          <a:xfrm>
-            <a:off x="3911969" y="4169664"/>
-            <a:ext cx="603504" cy="384048"/>
+          <p:cNvPr id="49" name="Shape 47"/>
+          <p:cNvSpPr/>
+          <p:nvPr/>
+        </p:nvSpPr>
+        <p:spPr>
+          <a:xfrm>
+            <a:off x="3734077" y="4169664"/>
+            <a:ext cx="543652" cy="384048"/>
           </a:xfrm>
           <a:prstGeom prst="rect">
             <a:avLst>
@@ -16889,14 +17186,14 @@
       </p:sp>
       <p:sp>
         <p:nvSpPr>
-          <p:cNvPr id="47" name="Text 45"/>
-          <p:cNvSpPr/>
-          <p:nvPr/>
-        </p:nvSpPr>
-        <p:spPr>
-          <a:xfrm>
-            <a:off x="3911969" y="4169664"/>
-            <a:ext cx="603504" cy="384048"/>
+          <p:cNvPr id="50" name="Text 48"/>
+          <p:cNvSpPr/>
+          <p:nvPr/>
+        </p:nvSpPr>
+        <p:spPr>
+          <a:xfrm>
+            <a:off x="3734077" y="4169664"/>
+            <a:ext cx="543652" cy="384048"/>
           </a:xfrm>
           <a:prstGeom prst="rect">
             <a:avLst/>
@@ -16928,14 +17225,14 @@
       </p:sp>
       <p:sp>
         <p:nvSpPr>
-          <p:cNvPr id="48" name="Shape 46"/>
-          <p:cNvSpPr/>
-          <p:nvPr/>
-        </p:nvSpPr>
-        <p:spPr>
-          <a:xfrm>
-            <a:off x="4565350" y="4169664"/>
-            <a:ext cx="603504" cy="384048"/>
+          <p:cNvPr id="51" name="Shape 49"/>
+          <p:cNvSpPr/>
+          <p:nvPr/>
+        </p:nvSpPr>
+        <p:spPr>
+          <a:xfrm>
+            <a:off x="4328021" y="4169664"/>
+            <a:ext cx="543652" cy="384048"/>
           </a:xfrm>
           <a:prstGeom prst="rect">
             <a:avLst>
@@ -16955,14 +17252,14 @@
       </p:sp>
       <p:sp>
         <p:nvSpPr>
-          <p:cNvPr id="49" name="Text 47"/>
-          <p:cNvSpPr/>
-          <p:nvPr/>
-        </p:nvSpPr>
-        <p:spPr>
-          <a:xfrm>
-            <a:off x="4565350" y="4169664"/>
-            <a:ext cx="603504" cy="384048"/>
+          <p:cNvPr id="52" name="Text 50"/>
+          <p:cNvSpPr/>
+          <p:nvPr/>
+        </p:nvSpPr>
+        <p:spPr>
+          <a:xfrm>
+            <a:off x="4328021" y="4169664"/>
+            <a:ext cx="543652" cy="384048"/>
           </a:xfrm>
           <a:prstGeom prst="rect">
             <a:avLst/>
@@ -16994,14 +17291,212 @@
       </p:sp>
       <p:sp>
         <p:nvSpPr>
-          <p:cNvPr id="50" name="Text 48"/>
-          <p:cNvSpPr/>
-          <p:nvPr/>
-        </p:nvSpPr>
-        <p:spPr>
-          <a:xfrm>
-            <a:off x="4565350" y="4572000"/>
-            <a:ext cx="603504" cy="219456"/>
+          <p:cNvPr id="53" name="Shape 51"/>
+          <p:cNvSpPr/>
+          <p:nvPr/>
+        </p:nvSpPr>
+        <p:spPr>
+          <a:xfrm>
+            <a:off x="4921966" y="4169664"/>
+            <a:ext cx="543652" cy="384048"/>
+          </a:xfrm>
+          <a:prstGeom prst="rect">
+            <a:avLst>
+              <a:gd name="adj" fmla="val 9524"/>
+            </a:avLst>
+          </a:prstGeom>
+          <a:solidFill>
+            <a:srgbClr val="FFFFFF"/>
+          </a:solidFill>
+          <a:ln w="12700">
+            <a:solidFill>
+              <a:srgbClr val="DB2777"/>
+            </a:solidFill>
+            <a:prstDash val="solid"/>
+          </a:ln>
+        </p:spPr>
+      </p:sp>
+      <p:sp>
+        <p:nvSpPr>
+          <p:cNvPr id="54" name="Text 52"/>
+          <p:cNvSpPr/>
+          <p:nvPr/>
+        </p:nvSpPr>
+        <p:spPr>
+          <a:xfrm>
+            <a:off x="4921966" y="4169664"/>
+            <a:ext cx="543652" cy="384048"/>
+          </a:xfrm>
+          <a:prstGeom prst="rect">
+            <a:avLst/>
+          </a:prstGeom>
+          <a:noFill/>
+          <a:ln/>
+        </p:spPr>
+        <p:txBody>
+          <a:bodyPr wrap="square" lIns="0" tIns="0" rIns="0" bIns="0" rtlCol="0" anchor="ctr"/>
+          <a:lstStyle/>
+          <a:p>
+            <a:pPr algn="ctr" indent="0" marL="0">
+              <a:buNone/>
+            </a:pPr>
+            <a:r>
+              <a:rPr lang="en-US" sz="900" b="1" dirty="0">
+                <a:solidFill>
+                  <a:srgbClr val="9D174D"/>
+                </a:solidFill>
+                <a:latin typeface="Trebuchet MS" pitchFamily="34" charset="0"/>
+                <a:ea typeface="Trebuchet MS" pitchFamily="34" charset="-122"/>
+                <a:cs typeface="Trebuchet MS" pitchFamily="34" charset="-120"/>
+              </a:rPr>
+              <a:t>t</a:t>
+            </a:r>
+            <a:endParaRPr lang="en-US" sz="900" dirty="0"/>
+          </a:p>
+        </p:txBody>
+      </p:sp>
+      <p:sp>
+        <p:nvSpPr>
+          <p:cNvPr id="55" name="Shape 53"/>
+          <p:cNvSpPr/>
+          <p:nvPr/>
+        </p:nvSpPr>
+        <p:spPr>
+          <a:xfrm>
+            <a:off x="5515910" y="4169664"/>
+            <a:ext cx="543652" cy="384048"/>
+          </a:xfrm>
+          <a:prstGeom prst="rect">
+            <a:avLst>
+              <a:gd name="adj" fmla="val 9524"/>
+            </a:avLst>
+          </a:prstGeom>
+          <a:solidFill>
+            <a:srgbClr val="FFFFFF"/>
+          </a:solidFill>
+          <a:ln w="12700">
+            <a:solidFill>
+              <a:srgbClr val="DB2777"/>
+            </a:solidFill>
+            <a:prstDash val="solid"/>
+          </a:ln>
+        </p:spPr>
+      </p:sp>
+      <p:sp>
+        <p:nvSpPr>
+          <p:cNvPr id="56" name="Text 54"/>
+          <p:cNvSpPr/>
+          <p:nvPr/>
+        </p:nvSpPr>
+        <p:spPr>
+          <a:xfrm>
+            <a:off x="5515910" y="4169664"/>
+            <a:ext cx="543652" cy="384048"/>
+          </a:xfrm>
+          <a:prstGeom prst="rect">
+            <a:avLst/>
+          </a:prstGeom>
+          <a:noFill/>
+          <a:ln/>
+        </p:spPr>
+        <p:txBody>
+          <a:bodyPr wrap="square" lIns="0" tIns="0" rIns="0" bIns="0" rtlCol="0" anchor="ctr"/>
+          <a:lstStyle/>
+          <a:p>
+            <a:pPr algn="ctr" indent="0" marL="0">
+              <a:buNone/>
+            </a:pPr>
+            <a:r>
+              <a:rPr lang="en-US" sz="900" b="1" dirty="0">
+                <a:solidFill>
+                  <a:srgbClr val="9D174D"/>
+                </a:solidFill>
+                <a:latin typeface="Trebuchet MS" pitchFamily="34" charset="0"/>
+                <a:ea typeface="Trebuchet MS" pitchFamily="34" charset="-122"/>
+                <a:cs typeface="Trebuchet MS" pitchFamily="34" charset="-120"/>
+              </a:rPr>
+              <a:t>a</a:t>
+            </a:r>
+            <a:endParaRPr lang="en-US" sz="900" dirty="0"/>
+          </a:p>
+        </p:txBody>
+      </p:sp>
+      <p:sp>
+        <p:nvSpPr>
+          <p:cNvPr id="57" name="Shape 55"/>
+          <p:cNvSpPr/>
+          <p:nvPr/>
+        </p:nvSpPr>
+        <p:spPr>
+          <a:xfrm>
+            <a:off x="6109855" y="4169664"/>
+            <a:ext cx="543652" cy="384048"/>
+          </a:xfrm>
+          <a:prstGeom prst="rect">
+            <a:avLst>
+              <a:gd name="adj" fmla="val 9524"/>
+            </a:avLst>
+          </a:prstGeom>
+          <a:solidFill>
+            <a:srgbClr val="FFFFFF"/>
+          </a:solidFill>
+          <a:ln w="12700">
+            <a:solidFill>
+              <a:srgbClr val="DB2777"/>
+            </a:solidFill>
+            <a:prstDash val="solid"/>
+          </a:ln>
+        </p:spPr>
+      </p:sp>
+      <p:sp>
+        <p:nvSpPr>
+          <p:cNvPr id="58" name="Text 56"/>
+          <p:cNvSpPr/>
+          <p:nvPr/>
+        </p:nvSpPr>
+        <p:spPr>
+          <a:xfrm>
+            <a:off x="6109855" y="4169664"/>
+            <a:ext cx="543652" cy="384048"/>
+          </a:xfrm>
+          <a:prstGeom prst="rect">
+            <a:avLst/>
+          </a:prstGeom>
+          <a:noFill/>
+          <a:ln/>
+        </p:spPr>
+        <p:txBody>
+          <a:bodyPr wrap="square" lIns="0" tIns="0" rIns="0" bIns="0" rtlCol="0" anchor="ctr"/>
+          <a:lstStyle/>
+          <a:p>
+            <a:pPr algn="ctr" indent="0" marL="0">
+              <a:buNone/>
+            </a:pPr>
+            <a:r>
+              <a:rPr lang="en-US" sz="900" b="1" dirty="0">
+                <a:solidFill>
+                  <a:srgbClr val="9D174D"/>
+                </a:solidFill>
+                <a:latin typeface="Trebuchet MS" pitchFamily="34" charset="0"/>
+                <a:ea typeface="Trebuchet MS" pitchFamily="34" charset="-122"/>
+                <a:cs typeface="Trebuchet MS" pitchFamily="34" charset="-120"/>
+              </a:rPr>
+              <a:t>t</a:t>
+            </a:r>
+            <a:endParaRPr lang="en-US" sz="900" dirty="0"/>
+          </a:p>
+        </p:txBody>
+      </p:sp>
+      <p:sp>
+        <p:nvSpPr>
+          <p:cNvPr id="59" name="Text 57"/>
+          <p:cNvSpPr/>
+          <p:nvPr/>
+        </p:nvSpPr>
+        <p:spPr>
+          <a:xfrm>
+            <a:off x="6109855" y="4572000"/>
+            <a:ext cx="543652" cy="219456"/>
           </a:xfrm>
           <a:prstGeom prst="rect">
             <a:avLst/>
@@ -17025,7 +17520,7 @@
                 <a:ea typeface="Calibri" pitchFamily="34" charset="-122"/>
                 <a:cs typeface="Calibri" pitchFamily="34" charset="-120"/>
               </a:rPr>
-              <a:t>/k/</a:t>
+              <a:t>/sh/</a:t>
             </a:r>
             <a:endParaRPr lang="en-US" sz="750" dirty="0"/>
           </a:p>
@@ -17033,14 +17528,14 @@
       </p:sp>
       <p:sp>
         <p:nvSpPr>
-          <p:cNvPr id="51" name="Shape 49"/>
-          <p:cNvSpPr/>
-          <p:nvPr/>
-        </p:nvSpPr>
-        <p:spPr>
-          <a:xfrm>
-            <a:off x="5218730" y="4169664"/>
-            <a:ext cx="603504" cy="384048"/>
+          <p:cNvPr id="60" name="Shape 58"/>
+          <p:cNvSpPr/>
+          <p:nvPr/>
+        </p:nvSpPr>
+        <p:spPr>
+          <a:xfrm>
+            <a:off x="6703799" y="4169664"/>
+            <a:ext cx="543652" cy="384048"/>
           </a:xfrm>
           <a:prstGeom prst="rect">
             <a:avLst>
@@ -17060,14 +17555,14 @@
       </p:sp>
       <p:sp>
         <p:nvSpPr>
-          <p:cNvPr id="52" name="Text 50"/>
-          <p:cNvSpPr/>
-          <p:nvPr/>
-        </p:nvSpPr>
-        <p:spPr>
-          <a:xfrm>
-            <a:off x="5218730" y="4169664"/>
-            <a:ext cx="603504" cy="384048"/>
+          <p:cNvPr id="61" name="Text 59"/>
+          <p:cNvSpPr/>
+          <p:nvPr/>
+        </p:nvSpPr>
+        <p:spPr>
+          <a:xfrm>
+            <a:off x="6703799" y="4169664"/>
+            <a:ext cx="543652" cy="384048"/>
           </a:xfrm>
           <a:prstGeom prst="rect">
             <a:avLst/>
@@ -17091,7 +17586,7 @@
                 <a:ea typeface="Trebuchet MS" pitchFamily="34" charset="-122"/>
                 <a:cs typeface="Trebuchet MS" pitchFamily="34" charset="-120"/>
               </a:rPr>
-              <a:t>t</a:t>
+              <a:t>io</a:t>
             </a:r>
             <a:endParaRPr lang="en-US" sz="900" dirty="0"/>
           </a:p>
@@ -17099,14 +17594,14 @@
       </p:sp>
       <p:sp>
         <p:nvSpPr>
-          <p:cNvPr id="53" name="Shape 51"/>
-          <p:cNvSpPr/>
-          <p:nvPr/>
-        </p:nvSpPr>
-        <p:spPr>
-          <a:xfrm>
-            <a:off x="5872111" y="4169664"/>
-            <a:ext cx="603504" cy="384048"/>
+          <p:cNvPr id="62" name="Shape 60"/>
+          <p:cNvSpPr/>
+          <p:nvPr/>
+        </p:nvSpPr>
+        <p:spPr>
+          <a:xfrm>
+            <a:off x="7297743" y="4169664"/>
+            <a:ext cx="543652" cy="384048"/>
           </a:xfrm>
           <a:prstGeom prst="rect">
             <a:avLst>
@@ -17126,14 +17621,14 @@
       </p:sp>
       <p:sp>
         <p:nvSpPr>
-          <p:cNvPr id="54" name="Text 52"/>
-          <p:cNvSpPr/>
-          <p:nvPr/>
-        </p:nvSpPr>
-        <p:spPr>
-          <a:xfrm>
-            <a:off x="5872111" y="4169664"/>
-            <a:ext cx="603504" cy="384048"/>
+          <p:cNvPr id="63" name="Text 61"/>
+          <p:cNvSpPr/>
+          <p:nvPr/>
+        </p:nvSpPr>
+        <p:spPr>
+          <a:xfrm>
+            <a:off x="7297743" y="4169664"/>
+            <a:ext cx="543652" cy="384048"/>
           </a:xfrm>
           <a:prstGeom prst="rect">
             <a:avLst/>
@@ -17157,7 +17652,7 @@
                 <a:ea typeface="Trebuchet MS" pitchFamily="34" charset="-122"/>
                 <a:cs typeface="Trebuchet MS" pitchFamily="34" charset="-120"/>
               </a:rPr>
-              <a:t>a</a:t>
+              <a:t>n</a:t>
             </a:r>
             <a:endParaRPr lang="en-US" sz="900" dirty="0"/>
           </a:p>
@@ -17165,14 +17660,14 @@
       </p:sp>
       <p:sp>
         <p:nvSpPr>
-          <p:cNvPr id="55" name="Shape 53"/>
-          <p:cNvSpPr/>
-          <p:nvPr/>
-        </p:nvSpPr>
-        <p:spPr>
-          <a:xfrm>
-            <a:off x="6525491" y="4169664"/>
-            <a:ext cx="603504" cy="384048"/>
+          <p:cNvPr id="64" name="Shape 62"/>
+          <p:cNvSpPr/>
+          <p:nvPr/>
+        </p:nvSpPr>
+        <p:spPr>
+          <a:xfrm>
+            <a:off x="7891688" y="4169664"/>
+            <a:ext cx="543652" cy="384048"/>
           </a:xfrm>
           <a:prstGeom prst="rect">
             <a:avLst>
@@ -17192,14 +17687,14 @@
       </p:sp>
       <p:sp>
         <p:nvSpPr>
-          <p:cNvPr id="56" name="Text 54"/>
-          <p:cNvSpPr/>
-          <p:nvPr/>
-        </p:nvSpPr>
-        <p:spPr>
-          <a:xfrm>
-            <a:off x="6525491" y="4169664"/>
-            <a:ext cx="603504" cy="384048"/>
+          <p:cNvPr id="65" name="Text 63"/>
+          <p:cNvSpPr/>
+          <p:nvPr/>
+        </p:nvSpPr>
+        <p:spPr>
+          <a:xfrm>
+            <a:off x="7891688" y="4169664"/>
+            <a:ext cx="543652" cy="384048"/>
           </a:xfrm>
           <a:prstGeom prst="rect">
             <a:avLst/>
@@ -17223,178 +17718,7 @@
                 <a:ea typeface="Trebuchet MS" pitchFamily="34" charset="-122"/>
                 <a:cs typeface="Trebuchet MS" pitchFamily="34" charset="-120"/>
               </a:rPr>
-              <a:t>ti</a:t>
-            </a:r>
-            <a:endParaRPr lang="en-US" sz="900" dirty="0"/>
-          </a:p>
-        </p:txBody>
-      </p:sp>
-      <p:sp>
-        <p:nvSpPr>
-          <p:cNvPr id="57" name="Text 55"/>
-          <p:cNvSpPr/>
-          <p:nvPr/>
-        </p:nvSpPr>
-        <p:spPr>
-          <a:xfrm>
-            <a:off x="6525491" y="4572000"/>
-            <a:ext cx="603504" cy="219456"/>
-          </a:xfrm>
-          <a:prstGeom prst="rect">
-            <a:avLst/>
-          </a:prstGeom>
-          <a:noFill/>
-          <a:ln/>
-        </p:spPr>
-        <p:txBody>
-          <a:bodyPr wrap="square" lIns="0" tIns="0" rIns="0" bIns="0" rtlCol="0" anchor="t"/>
-          <a:lstStyle/>
-          <a:p>
-            <a:pPr algn="ctr" indent="0" marL="0">
-              <a:buNone/>
-            </a:pPr>
-            <a:r>
-              <a:rPr lang="en-US" sz="750" i="1" dirty="0">
-                <a:solidFill>
-                  <a:srgbClr val="94A3B8"/>
-                </a:solidFill>
-                <a:latin typeface="Calibri" pitchFamily="34" charset="0"/>
-                <a:ea typeface="Calibri" pitchFamily="34" charset="-122"/>
-                <a:cs typeface="Calibri" pitchFamily="34" charset="-120"/>
-              </a:rPr>
-              <a:t>/sh/</a:t>
-            </a:r>
-            <a:endParaRPr lang="en-US" sz="750" dirty="0"/>
-          </a:p>
-        </p:txBody>
-      </p:sp>
-      <p:sp>
-        <p:nvSpPr>
-          <p:cNvPr id="58" name="Shape 56"/>
-          <p:cNvSpPr/>
-          <p:nvPr/>
-        </p:nvSpPr>
-        <p:spPr>
-          <a:xfrm>
-            <a:off x="7178871" y="4169664"/>
-            <a:ext cx="603504" cy="384048"/>
-          </a:xfrm>
-          <a:prstGeom prst="rect">
-            <a:avLst>
-              <a:gd name="adj" fmla="val 9524"/>
-            </a:avLst>
-          </a:prstGeom>
-          <a:solidFill>
-            <a:srgbClr val="FFFFFF"/>
-          </a:solidFill>
-          <a:ln w="12700">
-            <a:solidFill>
-              <a:srgbClr val="DB2777"/>
-            </a:solidFill>
-            <a:prstDash val="solid"/>
-          </a:ln>
-        </p:spPr>
-      </p:sp>
-      <p:sp>
-        <p:nvSpPr>
-          <p:cNvPr id="59" name="Text 57"/>
-          <p:cNvSpPr/>
-          <p:nvPr/>
-        </p:nvSpPr>
-        <p:spPr>
-          <a:xfrm>
-            <a:off x="7178871" y="4169664"/>
-            <a:ext cx="603504" cy="384048"/>
-          </a:xfrm>
-          <a:prstGeom prst="rect">
-            <a:avLst/>
-          </a:prstGeom>
-          <a:noFill/>
-          <a:ln/>
-        </p:spPr>
-        <p:txBody>
-          <a:bodyPr wrap="square" lIns="0" tIns="0" rIns="0" bIns="0" rtlCol="0" anchor="ctr"/>
-          <a:lstStyle/>
-          <a:p>
-            <a:pPr algn="ctr" indent="0" marL="0">
-              <a:buNone/>
-            </a:pPr>
-            <a:r>
-              <a:rPr lang="en-US" sz="900" b="1" dirty="0">
-                <a:solidFill>
-                  <a:srgbClr val="9D174D"/>
-                </a:solidFill>
-                <a:latin typeface="Trebuchet MS" pitchFamily="34" charset="0"/>
-                <a:ea typeface="Trebuchet MS" pitchFamily="34" charset="-122"/>
-                <a:cs typeface="Trebuchet MS" pitchFamily="34" charset="-120"/>
-              </a:rPr>
-              <a:t>o</a:t>
-            </a:r>
-            <a:endParaRPr lang="en-US" sz="900" dirty="0"/>
-          </a:p>
-        </p:txBody>
-      </p:sp>
-      <p:sp>
-        <p:nvSpPr>
-          <p:cNvPr id="60" name="Shape 58"/>
-          <p:cNvSpPr/>
-          <p:nvPr/>
-        </p:nvSpPr>
-        <p:spPr>
-          <a:xfrm>
-            <a:off x="7832252" y="4169664"/>
-            <a:ext cx="603504" cy="384048"/>
-          </a:xfrm>
-          <a:prstGeom prst="rect">
-            <a:avLst>
-              <a:gd name="adj" fmla="val 9524"/>
-            </a:avLst>
-          </a:prstGeom>
-          <a:solidFill>
-            <a:srgbClr val="FFFFFF"/>
-          </a:solidFill>
-          <a:ln w="12700">
-            <a:solidFill>
-              <a:srgbClr val="DB2777"/>
-            </a:solidFill>
-            <a:prstDash val="solid"/>
-          </a:ln>
-        </p:spPr>
-      </p:sp>
-      <p:sp>
-        <p:nvSpPr>
-          <p:cNvPr id="61" name="Text 59"/>
-          <p:cNvSpPr/>
-          <p:nvPr/>
-        </p:nvSpPr>
-        <p:spPr>
-          <a:xfrm>
-            <a:off x="7832252" y="4169664"/>
-            <a:ext cx="603504" cy="384048"/>
-          </a:xfrm>
-          <a:prstGeom prst="rect">
-            <a:avLst/>
-          </a:prstGeom>
-          <a:noFill/>
-          <a:ln/>
-        </p:spPr>
-        <p:txBody>
-          <a:bodyPr wrap="square" lIns="0" tIns="0" rIns="0" bIns="0" rtlCol="0" anchor="ctr"/>
-          <a:lstStyle/>
-          <a:p>
-            <a:pPr algn="ctr" indent="0" marL="0">
-              <a:buNone/>
-            </a:pPr>
-            <a:r>
-              <a:rPr lang="en-US" sz="900" b="1" dirty="0">
-                <a:solidFill>
-                  <a:srgbClr val="9D174D"/>
-                </a:solidFill>
-                <a:latin typeface="Trebuchet MS" pitchFamily="34" charset="0"/>
-                <a:ea typeface="Trebuchet MS" pitchFamily="34" charset="-122"/>
-                <a:cs typeface="Trebuchet MS" pitchFamily="34" charset="-120"/>
-              </a:rPr>
-              <a:t>n</a:t>
+              <a:t>s</a:t>
             </a:r>
             <a:endParaRPr lang="en-US" sz="900" dirty="0"/>
           </a:p>
@@ -18302,7 +18626,7 @@
                 <a:ea typeface="Trebuchet MS" pitchFamily="34" charset="-122"/>
                 <a:cs typeface="Trebuchet MS" pitchFamily="34" charset="-120"/>
               </a:rPr>
-              <a:t>1</a:t>
+              <a:t>2</a:t>
             </a:r>
             <a:pPr algn="ctr" indent="0" marL="0">
               <a:buNone/>
@@ -18316,7 +18640,7 @@
                 <a:ea typeface="Trebuchet MS" pitchFamily="34" charset="-122"/>
                 <a:cs typeface="Trebuchet MS" pitchFamily="34" charset="-120"/>
               </a:rPr>
-              <a:t>  punctuation mark</a:t>
+              <a:t>  punctuation marks</a:t>
             </a:r>
             <a:endParaRPr lang="en-US" sz="2800" dirty="0"/>
           </a:p>
@@ -18720,7 +19044,7 @@
                 <a:ea typeface="Calibri" pitchFamily="34" charset="-122"/>
                 <a:cs typeface="Calibri" pitchFamily="34" charset="-120"/>
               </a:rPr>
-              <a:t>Although the outcome was </a:t>
+              <a:t>She waited </a:t>
             </a:r>
             <a:pPr algn="l" indent="0" marL="0">
               <a:buNone/>
@@ -18737,7 +19061,7 @@
                 <a:ea typeface="Calibri" pitchFamily="34" charset="-122"/>
                 <a:cs typeface="Calibri" pitchFamily="34" charset="-120"/>
               </a:rPr>
-              <a:t>unexpected</a:t>
+              <a:t>expectantly</a:t>
             </a:r>
             <a:pPr algn="l" indent="0" marL="0">
               <a:buNone/>
@@ -18751,7 +19075,7 @@
                 <a:ea typeface="Calibri" pitchFamily="34" charset="-122"/>
                 <a:cs typeface="Calibri" pitchFamily="34" charset="-120"/>
               </a:rPr>
-              <a:t>, the </a:t>
+              <a:t> at the door, full of </a:t>
             </a:r>
             <a:pPr algn="l" indent="0" marL="0">
               <a:buNone/>
@@ -18768,7 +19092,7 @@
                 <a:ea typeface="Calibri" pitchFamily="34" charset="-122"/>
                 <a:cs typeface="Calibri" pitchFamily="34" charset="-120"/>
               </a:rPr>
-              <a:t>expectant</a:t>
+              <a:t>expectancy</a:t>
             </a:r>
             <a:pPr algn="l" indent="0" marL="0">
               <a:buNone/>
@@ -18782,7 +19106,7 @@
                 <a:ea typeface="Calibri" pitchFamily="34" charset="-122"/>
                 <a:cs typeface="Calibri" pitchFamily="34" charset="-120"/>
               </a:rPr>
-              <a:t> fans held onto their </a:t>
+              <a:t>, yet the visitor arrived at an </a:t>
             </a:r>
             <a:pPr algn="l" indent="0" marL="0">
               <a:buNone/>
@@ -18799,7 +19123,7 @@
                 <a:ea typeface="Calibri" pitchFamily="34" charset="-122"/>
                 <a:cs typeface="Calibri" pitchFamily="34" charset="-120"/>
               </a:rPr>
-              <a:t>expectations</a:t>
+              <a:t>unexpectedly</a:t>
             </a:r>
             <a:pPr algn="l" indent="0" marL="0">
               <a:buNone/>
@@ -18813,7 +19137,7 @@
                 <a:ea typeface="Calibri" pitchFamily="34" charset="-122"/>
                 <a:cs typeface="Calibri" pitchFamily="34" charset="-120"/>
               </a:rPr>
-              <a:t> that the team would win.</a:t>
+              <a:t> late hour.</a:t>
             </a:r>
             <a:endParaRPr lang="en-US" sz="1800" dirty="0"/>
           </a:p>
@@ -18968,7 +19292,7 @@
                 <a:ea typeface="Trebuchet MS" pitchFamily="34" charset="-122"/>
                 <a:cs typeface="Trebuchet MS" pitchFamily="34" charset="-120"/>
               </a:rPr>
-              <a:t>unexpected</a:t>
+              <a:t>expectantly</a:t>
             </a:r>
             <a:endParaRPr lang="en-US" sz="1400" dirty="0"/>
           </a:p>
@@ -19096,7 +19420,7 @@
                 <a:ea typeface="Trebuchet MS" pitchFamily="34" charset="-122"/>
                 <a:cs typeface="Trebuchet MS" pitchFamily="34" charset="-120"/>
               </a:rPr>
-              <a:t>expectant</a:t>
+              <a:t>expectancy</a:t>
             </a:r>
             <a:endParaRPr lang="en-US" sz="1400" dirty="0"/>
           </a:p>
@@ -19224,7 +19548,7 @@
                 <a:ea typeface="Trebuchet MS" pitchFamily="34" charset="-122"/>
                 <a:cs typeface="Trebuchet MS" pitchFamily="34" charset="-120"/>
               </a:rPr>
-              <a:t>expectations</a:t>
+              <a:t>unexpectedly</a:t>
             </a:r>
             <a:endParaRPr lang="en-US" sz="1400" dirty="0"/>
           </a:p>
@@ -19694,7 +20018,7 @@
                 <a:ea typeface="Trebuchet MS" pitchFamily="34" charset="-122"/>
                 <a:cs typeface="Trebuchet MS" pitchFamily="34" charset="-120"/>
               </a:rPr>
-              <a:t>unexpected</a:t>
+              <a:t>expectantly</a:t>
             </a:r>
             <a:endParaRPr lang="en-US" sz="2800" dirty="0"/>
           </a:p>
@@ -20521,7 +20845,7 @@
                 <a:ea typeface="Trebuchet MS" pitchFamily="34" charset="-122"/>
                 <a:cs typeface="Trebuchet MS" pitchFamily="34" charset="-120"/>
               </a:rPr>
-              <a:t>unexpected</a:t>
+              <a:t>expectantly</a:t>
             </a:r>
             <a:endParaRPr lang="en-US" sz="2800" dirty="0"/>
           </a:p>
@@ -20610,11 +20934,11 @@
             </a:avLst>
           </a:prstGeom>
           <a:solidFill>
-            <a:srgbClr val="DDD6FE"/>
+            <a:srgbClr val="CCFBF1"/>
           </a:solidFill>
           <a:ln w="19050">
             <a:solidFill>
-              <a:srgbClr val="7C3AED"/>
+              <a:srgbClr val="0D9488"/>
             </a:solidFill>
             <a:prstDash val="solid"/>
           </a:ln>
@@ -20654,13 +20978,13 @@
             <a:r>
               <a:rPr lang="en-US" sz="1300" b="1" dirty="0">
                 <a:solidFill>
-                  <a:srgbClr val="4C1D95"/>
+                  <a:srgbClr val="0F766E"/>
                 </a:solidFill>
                 <a:latin typeface="Trebuchet MS" pitchFamily="34" charset="0"/>
                 <a:ea typeface="Trebuchet MS" pitchFamily="34" charset="-122"/>
                 <a:cs typeface="Trebuchet MS" pitchFamily="34" charset="-120"/>
               </a:rPr>
-              <a:t>un</a:t>
+              <a:t>expect</a:t>
             </a:r>
             <a:endParaRPr lang="en-US" sz="1300" dirty="0"/>
           </a:p>
@@ -20699,7 +21023,7 @@
                 <a:ea typeface="Calibri" pitchFamily="34" charset="-122"/>
                 <a:cs typeface="Calibri" pitchFamily="34" charset="-120"/>
               </a:rPr>
-              <a:t>not</a:t>
+              <a:t>to look forward, await</a:t>
             </a:r>
             <a:endParaRPr lang="en-US" sz="850" dirty="0"/>
           </a:p>
@@ -20722,11 +21046,11 @@
             </a:avLst>
           </a:prstGeom>
           <a:solidFill>
-            <a:srgbClr val="CCFBF1"/>
+            <a:srgbClr val="FCE7F3"/>
           </a:solidFill>
           <a:ln w="19050">
             <a:solidFill>
-              <a:srgbClr val="0D9488"/>
+              <a:srgbClr val="DB2777"/>
             </a:solidFill>
             <a:prstDash val="solid"/>
           </a:ln>
@@ -20766,13 +21090,13 @@
             <a:r>
               <a:rPr lang="en-US" sz="1300" b="1" dirty="0">
                 <a:solidFill>
-                  <a:srgbClr val="0F766E"/>
+                  <a:srgbClr val="9D174D"/>
                 </a:solidFill>
                 <a:latin typeface="Trebuchet MS" pitchFamily="34" charset="0"/>
                 <a:ea typeface="Trebuchet MS" pitchFamily="34" charset="-122"/>
                 <a:cs typeface="Trebuchet MS" pitchFamily="34" charset="-120"/>
               </a:rPr>
-              <a:t>expect</a:t>
+              <a:t>ant</a:t>
             </a:r>
             <a:endParaRPr lang="en-US" sz="1300" dirty="0"/>
           </a:p>
@@ -20811,7 +21135,7 @@
                 <a:ea typeface="Calibri" pitchFamily="34" charset="-122"/>
                 <a:cs typeface="Calibri" pitchFamily="34" charset="-120"/>
               </a:rPr>
-              <a:t>to look forward, await</a:t>
+              <a:t>having the quality of</a:t>
             </a:r>
             <a:endParaRPr lang="en-US" sz="850" dirty="0"/>
           </a:p>
@@ -20884,7 +21208,7 @@
                 <a:ea typeface="Trebuchet MS" pitchFamily="34" charset="-122"/>
                 <a:cs typeface="Trebuchet MS" pitchFamily="34" charset="-120"/>
               </a:rPr>
-              <a:t>ed</a:t>
+              <a:t>ly</a:t>
             </a:r>
             <a:endParaRPr lang="en-US" sz="1300" dirty="0"/>
           </a:p>
@@ -20923,7 +21247,7 @@
                 <a:ea typeface="Calibri" pitchFamily="34" charset="-122"/>
                 <a:cs typeface="Calibri" pitchFamily="34" charset="-120"/>
               </a:rPr>
-              <a:t>past tense or done</a:t>
+              <a:t>in a way that is</a:t>
             </a:r>
             <a:endParaRPr lang="en-US" sz="850" dirty="0"/>
           </a:p>
@@ -21618,7 +21942,7 @@
                 <a:ea typeface="Trebuchet MS" pitchFamily="34" charset="-122"/>
                 <a:cs typeface="Trebuchet MS" pitchFamily="34" charset="-120"/>
               </a:rPr>
-              <a:t>unexpected</a:t>
+              <a:t>expectantly</a:t>
             </a:r>
             <a:endParaRPr lang="en-US" sz="2800" dirty="0"/>
           </a:p>
@@ -21707,11 +22031,11 @@
             </a:avLst>
           </a:prstGeom>
           <a:solidFill>
-            <a:srgbClr val="DDD6FE"/>
+            <a:srgbClr val="CCFBF1"/>
           </a:solidFill>
           <a:ln w="19050">
             <a:solidFill>
-              <a:srgbClr val="7C3AED"/>
+              <a:srgbClr val="0D9488"/>
             </a:solidFill>
             <a:prstDash val="solid"/>
           </a:ln>
@@ -21751,13 +22075,13 @@
             <a:r>
               <a:rPr lang="en-US" sz="1300" b="1" dirty="0">
                 <a:solidFill>
-                  <a:srgbClr val="4C1D95"/>
+                  <a:srgbClr val="0F766E"/>
                 </a:solidFill>
                 <a:latin typeface="Trebuchet MS" pitchFamily="34" charset="0"/>
                 <a:ea typeface="Trebuchet MS" pitchFamily="34" charset="-122"/>
                 <a:cs typeface="Trebuchet MS" pitchFamily="34" charset="-120"/>
               </a:rPr>
-              <a:t>un</a:t>
+              <a:t>expect</a:t>
             </a:r>
             <a:endParaRPr lang="en-US" sz="1300" dirty="0"/>
           </a:p>
@@ -21796,7 +22120,7 @@
                 <a:ea typeface="Calibri" pitchFamily="34" charset="-122"/>
                 <a:cs typeface="Calibri" pitchFamily="34" charset="-120"/>
               </a:rPr>
-              <a:t>not</a:t>
+              <a:t>to look forward, await</a:t>
             </a:r>
             <a:endParaRPr lang="en-US" sz="850" dirty="0"/>
           </a:p>
@@ -21819,11 +22143,11 @@
             </a:avLst>
           </a:prstGeom>
           <a:solidFill>
-            <a:srgbClr val="CCFBF1"/>
+            <a:srgbClr val="FCE7F3"/>
           </a:solidFill>
           <a:ln w="19050">
             <a:solidFill>
-              <a:srgbClr val="0D9488"/>
+              <a:srgbClr val="DB2777"/>
             </a:solidFill>
             <a:prstDash val="solid"/>
           </a:ln>
@@ -21863,13 +22187,13 @@
             <a:r>
               <a:rPr lang="en-US" sz="1300" b="1" dirty="0">
                 <a:solidFill>
-                  <a:srgbClr val="0F766E"/>
+                  <a:srgbClr val="9D174D"/>
                 </a:solidFill>
                 <a:latin typeface="Trebuchet MS" pitchFamily="34" charset="0"/>
                 <a:ea typeface="Trebuchet MS" pitchFamily="34" charset="-122"/>
                 <a:cs typeface="Trebuchet MS" pitchFamily="34" charset="-120"/>
               </a:rPr>
-              <a:t>expect</a:t>
+              <a:t>ant</a:t>
             </a:r>
             <a:endParaRPr lang="en-US" sz="1300" dirty="0"/>
           </a:p>
@@ -21908,7 +22232,7 @@
                 <a:ea typeface="Calibri" pitchFamily="34" charset="-122"/>
                 <a:cs typeface="Calibri" pitchFamily="34" charset="-120"/>
               </a:rPr>
-              <a:t>to look forward, await</a:t>
+              <a:t>having the quality of</a:t>
             </a:r>
             <a:endParaRPr lang="en-US" sz="850" dirty="0"/>
           </a:p>
@@ -21981,7 +22305,7 @@
                 <a:ea typeface="Trebuchet MS" pitchFamily="34" charset="-122"/>
                 <a:cs typeface="Trebuchet MS" pitchFamily="34" charset="-120"/>
               </a:rPr>
-              <a:t>ed</a:t>
+              <a:t>ly</a:t>
             </a:r>
             <a:endParaRPr lang="en-US" sz="1300" dirty="0"/>
           </a:p>
@@ -22020,7 +22344,7 @@
                 <a:ea typeface="Calibri" pitchFamily="34" charset="-122"/>
                 <a:cs typeface="Calibri" pitchFamily="34" charset="-120"/>
               </a:rPr>
-              <a:t>past tense or done</a:t>
+              <a:t>in a way that is</a:t>
             </a:r>
             <a:endParaRPr lang="en-US" sz="850" dirty="0"/>
           </a:p>
@@ -22179,7 +22503,7 @@
                 <a:ea typeface="Trebuchet MS" pitchFamily="34" charset="-122"/>
                 <a:cs typeface="Trebuchet MS" pitchFamily="34" charset="-120"/>
               </a:rPr>
-              <a:t>un</a:t>
+              <a:t>ex</a:t>
             </a:r>
             <a:endParaRPr lang="en-US" sz="1400" dirty="0"/>
           </a:p>
@@ -22284,7 +22608,7 @@
                 <a:ea typeface="Trebuchet MS" pitchFamily="34" charset="-122"/>
                 <a:cs typeface="Trebuchet MS" pitchFamily="34" charset="-120"/>
               </a:rPr>
-              <a:t>ex</a:t>
+              <a:t>pec</a:t>
             </a:r>
             <a:endParaRPr lang="en-US" sz="1400" dirty="0"/>
           </a:p>
@@ -22389,7 +22713,7 @@
                 <a:ea typeface="Trebuchet MS" pitchFamily="34" charset="-122"/>
                 <a:cs typeface="Trebuchet MS" pitchFamily="34" charset="-120"/>
               </a:rPr>
-              <a:t>pect</a:t>
+              <a:t>tant</a:t>
             </a:r>
             <a:endParaRPr lang="en-US" sz="1400" dirty="0"/>
           </a:p>
@@ -22494,7 +22818,7 @@
                 <a:ea typeface="Trebuchet MS" pitchFamily="34" charset="-122"/>
                 <a:cs typeface="Trebuchet MS" pitchFamily="34" charset="-120"/>
               </a:rPr>
-              <a:t>ed</a:t>
+              <a:t>ly</a:t>
             </a:r>
             <a:endParaRPr lang="en-US" sz="1400" dirty="0"/>
           </a:p>
@@ -23057,7 +23381,7 @@
                 <a:ea typeface="Trebuchet MS" pitchFamily="34" charset="-122"/>
                 <a:cs typeface="Trebuchet MS" pitchFamily="34" charset="-120"/>
               </a:rPr>
-              <a:t>unexpected</a:t>
+              <a:t>expectantly</a:t>
             </a:r>
             <a:endParaRPr lang="en-US" sz="2800" dirty="0"/>
           </a:p>
@@ -23146,11 +23470,11 @@
             </a:avLst>
           </a:prstGeom>
           <a:solidFill>
-            <a:srgbClr val="DDD6FE"/>
+            <a:srgbClr val="CCFBF1"/>
           </a:solidFill>
           <a:ln w="19050">
             <a:solidFill>
-              <a:srgbClr val="7C3AED"/>
+              <a:srgbClr val="0D9488"/>
             </a:solidFill>
             <a:prstDash val="solid"/>
           </a:ln>
@@ -23190,13 +23514,13 @@
             <a:r>
               <a:rPr lang="en-US" sz="1300" b="1" dirty="0">
                 <a:solidFill>
-                  <a:srgbClr val="4C1D95"/>
+                  <a:srgbClr val="0F766E"/>
                 </a:solidFill>
                 <a:latin typeface="Trebuchet MS" pitchFamily="34" charset="0"/>
                 <a:ea typeface="Trebuchet MS" pitchFamily="34" charset="-122"/>
                 <a:cs typeface="Trebuchet MS" pitchFamily="34" charset="-120"/>
               </a:rPr>
-              <a:t>un</a:t>
+              <a:t>expect</a:t>
             </a:r>
             <a:endParaRPr lang="en-US" sz="1300" dirty="0"/>
           </a:p>
@@ -23235,7 +23559,7 @@
                 <a:ea typeface="Calibri" pitchFamily="34" charset="-122"/>
                 <a:cs typeface="Calibri" pitchFamily="34" charset="-120"/>
               </a:rPr>
-              <a:t>not</a:t>
+              <a:t>to look forward, await</a:t>
             </a:r>
             <a:endParaRPr lang="en-US" sz="850" dirty="0"/>
           </a:p>
@@ -23258,11 +23582,11 @@
             </a:avLst>
           </a:prstGeom>
           <a:solidFill>
-            <a:srgbClr val="CCFBF1"/>
+            <a:srgbClr val="FCE7F3"/>
           </a:solidFill>
           <a:ln w="19050">
             <a:solidFill>
-              <a:srgbClr val="0D9488"/>
+              <a:srgbClr val="DB2777"/>
             </a:solidFill>
             <a:prstDash val="solid"/>
           </a:ln>
@@ -23302,13 +23626,13 @@
             <a:r>
               <a:rPr lang="en-US" sz="1300" b="1" dirty="0">
                 <a:solidFill>
-                  <a:srgbClr val="0F766E"/>
+                  <a:srgbClr val="9D174D"/>
                 </a:solidFill>
                 <a:latin typeface="Trebuchet MS" pitchFamily="34" charset="0"/>
                 <a:ea typeface="Trebuchet MS" pitchFamily="34" charset="-122"/>
                 <a:cs typeface="Trebuchet MS" pitchFamily="34" charset="-120"/>
               </a:rPr>
-              <a:t>expect</a:t>
+              <a:t>ant</a:t>
             </a:r>
             <a:endParaRPr lang="en-US" sz="1300" dirty="0"/>
           </a:p>
@@ -23347,7 +23671,7 @@
                 <a:ea typeface="Calibri" pitchFamily="34" charset="-122"/>
                 <a:cs typeface="Calibri" pitchFamily="34" charset="-120"/>
               </a:rPr>
-              <a:t>to look forward, await</a:t>
+              <a:t>having the quality of</a:t>
             </a:r>
             <a:endParaRPr lang="en-US" sz="850" dirty="0"/>
           </a:p>
@@ -23420,7 +23744,7 @@
                 <a:ea typeface="Trebuchet MS" pitchFamily="34" charset="-122"/>
                 <a:cs typeface="Trebuchet MS" pitchFamily="34" charset="-120"/>
               </a:rPr>
-              <a:t>ed</a:t>
+              <a:t>ly</a:t>
             </a:r>
             <a:endParaRPr lang="en-US" sz="1300" dirty="0"/>
           </a:p>
@@ -23459,7 +23783,7 @@
                 <a:ea typeface="Calibri" pitchFamily="34" charset="-122"/>
                 <a:cs typeface="Calibri" pitchFamily="34" charset="-120"/>
               </a:rPr>
-              <a:t>past tense or done</a:t>
+              <a:t>in a way that is</a:t>
             </a:r>
             <a:endParaRPr lang="en-US" sz="850" dirty="0"/>
           </a:p>
@@ -23618,7 +23942,7 @@
                 <a:ea typeface="Trebuchet MS" pitchFamily="34" charset="-122"/>
                 <a:cs typeface="Trebuchet MS" pitchFamily="34" charset="-120"/>
               </a:rPr>
-              <a:t>un</a:t>
+              <a:t>ex</a:t>
             </a:r>
             <a:endParaRPr lang="en-US" sz="1400" dirty="0"/>
           </a:p>
@@ -23723,7 +24047,7 @@
                 <a:ea typeface="Trebuchet MS" pitchFamily="34" charset="-122"/>
                 <a:cs typeface="Trebuchet MS" pitchFamily="34" charset="-120"/>
               </a:rPr>
-              <a:t>ex</a:t>
+              <a:t>pec</a:t>
             </a:r>
             <a:endParaRPr lang="en-US" sz="1400" dirty="0"/>
           </a:p>
@@ -23828,7 +24152,7 @@
                 <a:ea typeface="Trebuchet MS" pitchFamily="34" charset="-122"/>
                 <a:cs typeface="Trebuchet MS" pitchFamily="34" charset="-120"/>
               </a:rPr>
-              <a:t>pect</a:t>
+              <a:t>tant</a:t>
             </a:r>
             <a:endParaRPr lang="en-US" sz="1400" dirty="0"/>
           </a:p>
@@ -23933,7 +24257,7 @@
                 <a:ea typeface="Trebuchet MS" pitchFamily="34" charset="-122"/>
                 <a:cs typeface="Trebuchet MS" pitchFamily="34" charset="-120"/>
               </a:rPr>
-              <a:t>ed</a:t>
+              <a:t>ly</a:t>
             </a:r>
             <a:endParaRPr lang="en-US" sz="1400" dirty="0"/>
           </a:p>
@@ -24040,8 +24364,8 @@
         </p:nvSpPr>
         <p:spPr>
           <a:xfrm>
-            <a:off x="1951828" y="4169664"/>
-            <a:ext cx="603504" cy="384048"/>
+            <a:off x="1952244" y="4169664"/>
+            <a:ext cx="543652" cy="384048"/>
           </a:xfrm>
           <a:prstGeom prst="rect">
             <a:avLst>
@@ -24067,8 +24391,8 @@
         </p:nvSpPr>
         <p:spPr>
           <a:xfrm>
-            <a:off x="1951828" y="4169664"/>
-            <a:ext cx="603504" cy="384048"/>
+            <a:off x="1952244" y="4169664"/>
+            <a:ext cx="543652" cy="384048"/>
           </a:xfrm>
           <a:prstGeom prst="rect">
             <a:avLst/>
@@ -24092,7 +24416,7 @@
                 <a:ea typeface="Trebuchet MS" pitchFamily="34" charset="-122"/>
                 <a:cs typeface="Trebuchet MS" pitchFamily="34" charset="-120"/>
               </a:rPr>
-              <a:t>u</a:t>
+              <a:t>e</a:t>
             </a:r>
             <a:endParaRPr lang="en-US" sz="900" dirty="0"/>
           </a:p>
@@ -24106,8 +24430,8 @@
         </p:nvSpPr>
         <p:spPr>
           <a:xfrm>
-            <a:off x="2605209" y="4169664"/>
-            <a:ext cx="603504" cy="384048"/>
+            <a:off x="2546188" y="4169664"/>
+            <a:ext cx="543652" cy="384048"/>
           </a:xfrm>
           <a:prstGeom prst="rect">
             <a:avLst>
@@ -24133,8 +24457,8 @@
         </p:nvSpPr>
         <p:spPr>
           <a:xfrm>
-            <a:off x="2605209" y="4169664"/>
-            <a:ext cx="603504" cy="384048"/>
+            <a:off x="2546188" y="4169664"/>
+            <a:ext cx="543652" cy="384048"/>
           </a:xfrm>
           <a:prstGeom prst="rect">
             <a:avLst/>
@@ -24158,7 +24482,7 @@
                 <a:ea typeface="Trebuchet MS" pitchFamily="34" charset="-122"/>
                 <a:cs typeface="Trebuchet MS" pitchFamily="34" charset="-120"/>
               </a:rPr>
-              <a:t>n</a:t>
+              <a:t>x</a:t>
             </a:r>
             <a:endParaRPr lang="en-US" sz="900" dirty="0"/>
           </a:p>
@@ -24166,14 +24490,53 @@
       </p:sp>
       <p:sp>
         <p:nvSpPr>
-          <p:cNvPr id="46" name="Shape 44"/>
-          <p:cNvSpPr/>
-          <p:nvPr/>
-        </p:nvSpPr>
-        <p:spPr>
-          <a:xfrm>
-            <a:off x="3258589" y="4169664"/>
-            <a:ext cx="603504" cy="384048"/>
+          <p:cNvPr id="46" name="Text 44"/>
+          <p:cNvSpPr/>
+          <p:nvPr/>
+        </p:nvSpPr>
+        <p:spPr>
+          <a:xfrm>
+            <a:off x="2546188" y="4572000"/>
+            <a:ext cx="543652" cy="219456"/>
+          </a:xfrm>
+          <a:prstGeom prst="rect">
+            <a:avLst/>
+          </a:prstGeom>
+          <a:noFill/>
+          <a:ln/>
+        </p:spPr>
+        <p:txBody>
+          <a:bodyPr wrap="square" lIns="0" tIns="0" rIns="0" bIns="0" rtlCol="0" anchor="t"/>
+          <a:lstStyle/>
+          <a:p>
+            <a:pPr algn="ctr" indent="0" marL="0">
+              <a:buNone/>
+            </a:pPr>
+            <a:r>
+              <a:rPr lang="en-US" sz="750" i="1" dirty="0">
+                <a:solidFill>
+                  <a:srgbClr val="94A3B8"/>
+                </a:solidFill>
+                <a:latin typeface="Calibri" pitchFamily="34" charset="0"/>
+                <a:ea typeface="Calibri" pitchFamily="34" charset="-122"/>
+                <a:cs typeface="Calibri" pitchFamily="34" charset="-120"/>
+              </a:rPr>
+              <a:t>/ks/</a:t>
+            </a:r>
+            <a:endParaRPr lang="en-US" sz="750" dirty="0"/>
+          </a:p>
+        </p:txBody>
+      </p:sp>
+      <p:sp>
+        <p:nvSpPr>
+          <p:cNvPr id="47" name="Shape 45"/>
+          <p:cNvSpPr/>
+          <p:nvPr/>
+        </p:nvSpPr>
+        <p:spPr>
+          <a:xfrm>
+            <a:off x="3140133" y="4169664"/>
+            <a:ext cx="543652" cy="384048"/>
           </a:xfrm>
           <a:prstGeom prst="rect">
             <a:avLst>
@@ -24193,14 +24556,14 @@
       </p:sp>
       <p:sp>
         <p:nvSpPr>
-          <p:cNvPr id="47" name="Text 45"/>
-          <p:cNvSpPr/>
-          <p:nvPr/>
-        </p:nvSpPr>
-        <p:spPr>
-          <a:xfrm>
-            <a:off x="3258589" y="4169664"/>
-            <a:ext cx="603504" cy="384048"/>
+          <p:cNvPr id="48" name="Text 46"/>
+          <p:cNvSpPr/>
+          <p:nvPr/>
+        </p:nvSpPr>
+        <p:spPr>
+          <a:xfrm>
+            <a:off x="3140133" y="4169664"/>
+            <a:ext cx="543652" cy="384048"/>
           </a:xfrm>
           <a:prstGeom prst="rect">
             <a:avLst/>
@@ -24224,7 +24587,7 @@
                 <a:ea typeface="Trebuchet MS" pitchFamily="34" charset="-122"/>
                 <a:cs typeface="Trebuchet MS" pitchFamily="34" charset="-120"/>
               </a:rPr>
-              <a:t>e</a:t>
+              <a:t>p</a:t>
             </a:r>
             <a:endParaRPr lang="en-US" sz="900" dirty="0"/>
           </a:p>
@@ -24232,14 +24595,14 @@
       </p:sp>
       <p:sp>
         <p:nvSpPr>
-          <p:cNvPr id="48" name="Shape 46"/>
-          <p:cNvSpPr/>
-          <p:nvPr/>
-        </p:nvSpPr>
-        <p:spPr>
-          <a:xfrm>
-            <a:off x="3911969" y="4169664"/>
-            <a:ext cx="603504" cy="384048"/>
+          <p:cNvPr id="49" name="Shape 47"/>
+          <p:cNvSpPr/>
+          <p:nvPr/>
+        </p:nvSpPr>
+        <p:spPr>
+          <a:xfrm>
+            <a:off x="3734077" y="4169664"/>
+            <a:ext cx="543652" cy="384048"/>
           </a:xfrm>
           <a:prstGeom prst="rect">
             <a:avLst>
@@ -24259,14 +24622,14 @@
       </p:sp>
       <p:sp>
         <p:nvSpPr>
-          <p:cNvPr id="49" name="Text 47"/>
-          <p:cNvSpPr/>
-          <p:nvPr/>
-        </p:nvSpPr>
-        <p:spPr>
-          <a:xfrm>
-            <a:off x="3911969" y="4169664"/>
-            <a:ext cx="603504" cy="384048"/>
+          <p:cNvPr id="50" name="Text 48"/>
+          <p:cNvSpPr/>
+          <p:nvPr/>
+        </p:nvSpPr>
+        <p:spPr>
+          <a:xfrm>
+            <a:off x="3734077" y="4169664"/>
+            <a:ext cx="543652" cy="384048"/>
           </a:xfrm>
           <a:prstGeom prst="rect">
             <a:avLst/>
@@ -24290,7 +24653,7 @@
                 <a:ea typeface="Trebuchet MS" pitchFamily="34" charset="-122"/>
                 <a:cs typeface="Trebuchet MS" pitchFamily="34" charset="-120"/>
               </a:rPr>
-              <a:t>x</a:t>
+              <a:t>e</a:t>
             </a:r>
             <a:endParaRPr lang="en-US" sz="900" dirty="0"/>
           </a:p>
@@ -24298,53 +24661,14 @@
       </p:sp>
       <p:sp>
         <p:nvSpPr>
-          <p:cNvPr id="50" name="Text 48"/>
-          <p:cNvSpPr/>
-          <p:nvPr/>
-        </p:nvSpPr>
-        <p:spPr>
-          <a:xfrm>
-            <a:off x="3911969" y="4572000"/>
-            <a:ext cx="603504" cy="219456"/>
-          </a:xfrm>
-          <a:prstGeom prst="rect">
-            <a:avLst/>
-          </a:prstGeom>
-          <a:noFill/>
-          <a:ln/>
-        </p:spPr>
-        <p:txBody>
-          <a:bodyPr wrap="square" lIns="0" tIns="0" rIns="0" bIns="0" rtlCol="0" anchor="t"/>
-          <a:lstStyle/>
-          <a:p>
-            <a:pPr algn="ctr" indent="0" marL="0">
-              <a:buNone/>
-            </a:pPr>
-            <a:r>
-              <a:rPr lang="en-US" sz="750" i="1" dirty="0">
-                <a:solidFill>
-                  <a:srgbClr val="94A3B8"/>
-                </a:solidFill>
-                <a:latin typeface="Calibri" pitchFamily="34" charset="0"/>
-                <a:ea typeface="Calibri" pitchFamily="34" charset="-122"/>
-                <a:cs typeface="Calibri" pitchFamily="34" charset="-120"/>
-              </a:rPr>
-              <a:t>/ks/</a:t>
-            </a:r>
-            <a:endParaRPr lang="en-US" sz="750" dirty="0"/>
-          </a:p>
-        </p:txBody>
-      </p:sp>
-      <p:sp>
-        <p:nvSpPr>
           <p:cNvPr id="51" name="Shape 49"/>
           <p:cNvSpPr/>
           <p:nvPr/>
         </p:nvSpPr>
         <p:spPr>
           <a:xfrm>
-            <a:off x="4565350" y="4169664"/>
-            <a:ext cx="603504" cy="384048"/>
+            <a:off x="4328021" y="4169664"/>
+            <a:ext cx="543652" cy="384048"/>
           </a:xfrm>
           <a:prstGeom prst="rect">
             <a:avLst>
@@ -24370,8 +24694,8 @@
         </p:nvSpPr>
         <p:spPr>
           <a:xfrm>
-            <a:off x="4565350" y="4169664"/>
-            <a:ext cx="603504" cy="384048"/>
+            <a:off x="4328021" y="4169664"/>
+            <a:ext cx="543652" cy="384048"/>
           </a:xfrm>
           <a:prstGeom prst="rect">
             <a:avLst/>
@@ -24395,7 +24719,7 @@
                 <a:ea typeface="Trebuchet MS" pitchFamily="34" charset="-122"/>
                 <a:cs typeface="Trebuchet MS" pitchFamily="34" charset="-120"/>
               </a:rPr>
-              <a:t>p</a:t>
+              <a:t>c</a:t>
             </a:r>
             <a:endParaRPr lang="en-US" sz="900" dirty="0"/>
           </a:p>
@@ -24409,8 +24733,8 @@
         </p:nvSpPr>
         <p:spPr>
           <a:xfrm>
-            <a:off x="5218730" y="4169664"/>
-            <a:ext cx="603504" cy="384048"/>
+            <a:off x="4921966" y="4169664"/>
+            <a:ext cx="543652" cy="384048"/>
           </a:xfrm>
           <a:prstGeom prst="rect">
             <a:avLst>
@@ -24436,8 +24760,8 @@
         </p:nvSpPr>
         <p:spPr>
           <a:xfrm>
-            <a:off x="5218730" y="4169664"/>
-            <a:ext cx="603504" cy="384048"/>
+            <a:off x="4921966" y="4169664"/>
+            <a:ext cx="543652" cy="384048"/>
           </a:xfrm>
           <a:prstGeom prst="rect">
             <a:avLst/>
@@ -24461,7 +24785,7 @@
                 <a:ea typeface="Trebuchet MS" pitchFamily="34" charset="-122"/>
                 <a:cs typeface="Trebuchet MS" pitchFamily="34" charset="-120"/>
               </a:rPr>
-              <a:t>e</a:t>
+              <a:t>t</a:t>
             </a:r>
             <a:endParaRPr lang="en-US" sz="900" dirty="0"/>
           </a:p>
@@ -24475,8 +24799,8 @@
         </p:nvSpPr>
         <p:spPr>
           <a:xfrm>
-            <a:off x="5872111" y="4169664"/>
-            <a:ext cx="603504" cy="384048"/>
+            <a:off x="5515910" y="4169664"/>
+            <a:ext cx="543652" cy="384048"/>
           </a:xfrm>
           <a:prstGeom prst="rect">
             <a:avLst>
@@ -24502,8 +24826,8 @@
         </p:nvSpPr>
         <p:spPr>
           <a:xfrm>
-            <a:off x="5872111" y="4169664"/>
-            <a:ext cx="603504" cy="384048"/>
+            <a:off x="5515910" y="4169664"/>
+            <a:ext cx="543652" cy="384048"/>
           </a:xfrm>
           <a:prstGeom prst="rect">
             <a:avLst/>
@@ -24527,7 +24851,7 @@
                 <a:ea typeface="Trebuchet MS" pitchFamily="34" charset="-122"/>
                 <a:cs typeface="Trebuchet MS" pitchFamily="34" charset="-120"/>
               </a:rPr>
-              <a:t>c</a:t>
+              <a:t>a</a:t>
             </a:r>
             <a:endParaRPr lang="en-US" sz="900" dirty="0"/>
           </a:p>
@@ -24535,53 +24859,14 @@
       </p:sp>
       <p:sp>
         <p:nvSpPr>
-          <p:cNvPr id="57" name="Text 55"/>
-          <p:cNvSpPr/>
-          <p:nvPr/>
-        </p:nvSpPr>
-        <p:spPr>
-          <a:xfrm>
-            <a:off x="5872111" y="4572000"/>
-            <a:ext cx="603504" cy="219456"/>
-          </a:xfrm>
-          <a:prstGeom prst="rect">
-            <a:avLst/>
-          </a:prstGeom>
-          <a:noFill/>
-          <a:ln/>
-        </p:spPr>
-        <p:txBody>
-          <a:bodyPr wrap="square" lIns="0" tIns="0" rIns="0" bIns="0" rtlCol="0" anchor="t"/>
-          <a:lstStyle/>
-          <a:p>
-            <a:pPr algn="ctr" indent="0" marL="0">
-              <a:buNone/>
-            </a:pPr>
-            <a:r>
-              <a:rPr lang="en-US" sz="750" i="1" dirty="0">
-                <a:solidFill>
-                  <a:srgbClr val="94A3B8"/>
-                </a:solidFill>
-                <a:latin typeface="Calibri" pitchFamily="34" charset="0"/>
-                <a:ea typeface="Calibri" pitchFamily="34" charset="-122"/>
-                <a:cs typeface="Calibri" pitchFamily="34" charset="-120"/>
-              </a:rPr>
-              <a:t>/k/</a:t>
-            </a:r>
-            <a:endParaRPr lang="en-US" sz="750" dirty="0"/>
-          </a:p>
-        </p:txBody>
-      </p:sp>
-      <p:sp>
-        <p:nvSpPr>
-          <p:cNvPr id="58" name="Shape 56"/>
-          <p:cNvSpPr/>
-          <p:nvPr/>
-        </p:nvSpPr>
-        <p:spPr>
-          <a:xfrm>
-            <a:off x="6525491" y="4169664"/>
-            <a:ext cx="603504" cy="384048"/>
+          <p:cNvPr id="57" name="Shape 55"/>
+          <p:cNvSpPr/>
+          <p:nvPr/>
+        </p:nvSpPr>
+        <p:spPr>
+          <a:xfrm>
+            <a:off x="6109855" y="4169664"/>
+            <a:ext cx="543652" cy="384048"/>
           </a:xfrm>
           <a:prstGeom prst="rect">
             <a:avLst>
@@ -24601,14 +24886,14 @@
       </p:sp>
       <p:sp>
         <p:nvSpPr>
-          <p:cNvPr id="59" name="Text 57"/>
-          <p:cNvSpPr/>
-          <p:nvPr/>
-        </p:nvSpPr>
-        <p:spPr>
-          <a:xfrm>
-            <a:off x="6525491" y="4169664"/>
-            <a:ext cx="603504" cy="384048"/>
+          <p:cNvPr id="58" name="Text 56"/>
+          <p:cNvSpPr/>
+          <p:nvPr/>
+        </p:nvSpPr>
+        <p:spPr>
+          <a:xfrm>
+            <a:off x="6109855" y="4169664"/>
+            <a:ext cx="543652" cy="384048"/>
           </a:xfrm>
           <a:prstGeom prst="rect">
             <a:avLst/>
@@ -24632,7 +24917,7 @@
                 <a:ea typeface="Trebuchet MS" pitchFamily="34" charset="-122"/>
                 <a:cs typeface="Trebuchet MS" pitchFamily="34" charset="-120"/>
               </a:rPr>
-              <a:t>t</a:t>
+              <a:t>n</a:t>
             </a:r>
             <a:endParaRPr lang="en-US" sz="900" dirty="0"/>
           </a:p>
@@ -24640,14 +24925,14 @@
       </p:sp>
       <p:sp>
         <p:nvSpPr>
-          <p:cNvPr id="60" name="Shape 58"/>
-          <p:cNvSpPr/>
-          <p:nvPr/>
-        </p:nvSpPr>
-        <p:spPr>
-          <a:xfrm>
-            <a:off x="7178871" y="4169664"/>
-            <a:ext cx="603504" cy="384048"/>
+          <p:cNvPr id="59" name="Shape 57"/>
+          <p:cNvSpPr/>
+          <p:nvPr/>
+        </p:nvSpPr>
+        <p:spPr>
+          <a:xfrm>
+            <a:off x="6703799" y="4169664"/>
+            <a:ext cx="543652" cy="384048"/>
           </a:xfrm>
           <a:prstGeom prst="rect">
             <a:avLst>
@@ -24667,14 +24952,14 @@
       </p:sp>
       <p:sp>
         <p:nvSpPr>
-          <p:cNvPr id="61" name="Text 59"/>
-          <p:cNvSpPr/>
-          <p:nvPr/>
-        </p:nvSpPr>
-        <p:spPr>
-          <a:xfrm>
-            <a:off x="7178871" y="4169664"/>
-            <a:ext cx="603504" cy="384048"/>
+          <p:cNvPr id="60" name="Text 58"/>
+          <p:cNvSpPr/>
+          <p:nvPr/>
+        </p:nvSpPr>
+        <p:spPr>
+          <a:xfrm>
+            <a:off x="6703799" y="4169664"/>
+            <a:ext cx="543652" cy="384048"/>
           </a:xfrm>
           <a:prstGeom prst="rect">
             <a:avLst/>
@@ -24698,7 +24983,7 @@
                 <a:ea typeface="Trebuchet MS" pitchFamily="34" charset="-122"/>
                 <a:cs typeface="Trebuchet MS" pitchFamily="34" charset="-120"/>
               </a:rPr>
-              <a:t>e</a:t>
+              <a:t>t</a:t>
             </a:r>
             <a:endParaRPr lang="en-US" sz="900" dirty="0"/>
           </a:p>
@@ -24706,14 +24991,14 @@
       </p:sp>
       <p:sp>
         <p:nvSpPr>
-          <p:cNvPr id="62" name="Shape 60"/>
-          <p:cNvSpPr/>
-          <p:nvPr/>
-        </p:nvSpPr>
-        <p:spPr>
-          <a:xfrm>
-            <a:off x="7832252" y="4169664"/>
-            <a:ext cx="603504" cy="384048"/>
+          <p:cNvPr id="61" name="Shape 59"/>
+          <p:cNvSpPr/>
+          <p:nvPr/>
+        </p:nvSpPr>
+        <p:spPr>
+          <a:xfrm>
+            <a:off x="7297743" y="4169664"/>
+            <a:ext cx="543652" cy="384048"/>
           </a:xfrm>
           <a:prstGeom prst="rect">
             <a:avLst>
@@ -24733,14 +25018,14 @@
       </p:sp>
       <p:sp>
         <p:nvSpPr>
-          <p:cNvPr id="63" name="Text 61"/>
-          <p:cNvSpPr/>
-          <p:nvPr/>
-        </p:nvSpPr>
-        <p:spPr>
-          <a:xfrm>
-            <a:off x="7832252" y="4169664"/>
-            <a:ext cx="603504" cy="384048"/>
+          <p:cNvPr id="62" name="Text 60"/>
+          <p:cNvSpPr/>
+          <p:nvPr/>
+        </p:nvSpPr>
+        <p:spPr>
+          <a:xfrm>
+            <a:off x="7297743" y="4169664"/>
+            <a:ext cx="543652" cy="384048"/>
           </a:xfrm>
           <a:prstGeom prst="rect">
             <a:avLst/>
@@ -24764,7 +25049,73 @@
                 <a:ea typeface="Trebuchet MS" pitchFamily="34" charset="-122"/>
                 <a:cs typeface="Trebuchet MS" pitchFamily="34" charset="-120"/>
               </a:rPr>
-              <a:t>d</a:t>
+              <a:t>l</a:t>
+            </a:r>
+            <a:endParaRPr lang="en-US" sz="900" dirty="0"/>
+          </a:p>
+        </p:txBody>
+      </p:sp>
+      <p:sp>
+        <p:nvSpPr>
+          <p:cNvPr id="63" name="Shape 61"/>
+          <p:cNvSpPr/>
+          <p:nvPr/>
+        </p:nvSpPr>
+        <p:spPr>
+          <a:xfrm>
+            <a:off x="7891688" y="4169664"/>
+            <a:ext cx="543652" cy="384048"/>
+          </a:xfrm>
+          <a:prstGeom prst="rect">
+            <a:avLst>
+              <a:gd name="adj" fmla="val 9524"/>
+            </a:avLst>
+          </a:prstGeom>
+          <a:solidFill>
+            <a:srgbClr val="FFFFFF"/>
+          </a:solidFill>
+          <a:ln w="12700">
+            <a:solidFill>
+              <a:srgbClr val="DB2777"/>
+            </a:solidFill>
+            <a:prstDash val="solid"/>
+          </a:ln>
+        </p:spPr>
+      </p:sp>
+      <p:sp>
+        <p:nvSpPr>
+          <p:cNvPr id="64" name="Text 62"/>
+          <p:cNvSpPr/>
+          <p:nvPr/>
+        </p:nvSpPr>
+        <p:spPr>
+          <a:xfrm>
+            <a:off x="7891688" y="4169664"/>
+            <a:ext cx="543652" cy="384048"/>
+          </a:xfrm>
+          <a:prstGeom prst="rect">
+            <a:avLst/>
+          </a:prstGeom>
+          <a:noFill/>
+          <a:ln/>
+        </p:spPr>
+        <p:txBody>
+          <a:bodyPr wrap="square" lIns="0" tIns="0" rIns="0" bIns="0" rtlCol="0" anchor="ctr"/>
+          <a:lstStyle/>
+          <a:p>
+            <a:pPr algn="ctr" indent="0" marL="0">
+              <a:buNone/>
+            </a:pPr>
+            <a:r>
+              <a:rPr lang="en-US" sz="900" b="1" dirty="0">
+                <a:solidFill>
+                  <a:srgbClr val="9D174D"/>
+                </a:solidFill>
+                <a:latin typeface="Trebuchet MS" pitchFamily="34" charset="0"/>
+                <a:ea typeface="Trebuchet MS" pitchFamily="34" charset="-122"/>
+                <a:cs typeface="Trebuchet MS" pitchFamily="34" charset="-120"/>
+              </a:rPr>
+              <a:t>y</a:t>
             </a:r>
             <a:endParaRPr lang="en-US" sz="900" dirty="0"/>
           </a:p>
@@ -25195,7 +25546,7 @@
                 <a:ea typeface="Trebuchet MS" pitchFamily="34" charset="-122"/>
                 <a:cs typeface="Trebuchet MS" pitchFamily="34" charset="-120"/>
               </a:rPr>
-              <a:t>expectant</a:t>
+              <a:t>expectancy</a:t>
             </a:r>
             <a:endParaRPr lang="en-US" sz="2800" dirty="0"/>
           </a:p>
@@ -26022,7 +26373,7 @@
                 <a:ea typeface="Trebuchet MS" pitchFamily="34" charset="-122"/>
                 <a:cs typeface="Trebuchet MS" pitchFamily="34" charset="-120"/>
               </a:rPr>
-              <a:t>expectant</a:t>
+              <a:t>expectancy</a:t>
             </a:r>
             <a:endParaRPr lang="en-US" sz="2800" dirty="0"/>
           </a:p>
@@ -26273,7 +26624,7 @@
                 <a:ea typeface="Trebuchet MS" pitchFamily="34" charset="-122"/>
                 <a:cs typeface="Trebuchet MS" pitchFamily="34" charset="-120"/>
               </a:rPr>
-              <a:t>ant</a:t>
+              <a:t>ancy</a:t>
             </a:r>
             <a:endParaRPr lang="en-US" sz="1300" dirty="0"/>
           </a:p>
@@ -26312,7 +26663,7 @@
                 <a:ea typeface="Calibri" pitchFamily="34" charset="-122"/>
                 <a:cs typeface="Calibri" pitchFamily="34" charset="-120"/>
               </a:rPr>
-              <a:t>being or doing</a:t>
+              <a:t>state or quality of</a:t>
             </a:r>
             <a:endParaRPr lang="en-US" sz="850" dirty="0"/>
           </a:p>
@@ -27726,7 +28077,7 @@
                 <a:ea typeface="Trebuchet MS" pitchFamily="34" charset="-122"/>
                 <a:cs typeface="Trebuchet MS" pitchFamily="34" charset="-120"/>
               </a:rPr>
-              <a:t>expectant</a:t>
+              <a:t>expectancy</a:t>
             </a:r>
             <a:endParaRPr lang="en-US" sz="2800" dirty="0"/>
           </a:p>
@@ -27977,7 +28328,7 @@
                 <a:ea typeface="Trebuchet MS" pitchFamily="34" charset="-122"/>
                 <a:cs typeface="Trebuchet MS" pitchFamily="34" charset="-120"/>
               </a:rPr>
-              <a:t>ant</a:t>
+              <a:t>ancy</a:t>
             </a:r>
             <a:endParaRPr lang="en-US" sz="1300" dirty="0"/>
           </a:p>
@@ -28016,7 +28367,7 @@
                 <a:ea typeface="Calibri" pitchFamily="34" charset="-122"/>
                 <a:cs typeface="Calibri" pitchFamily="34" charset="-120"/>
               </a:rPr>
-              <a:t>being or doing</a:t>
+              <a:t>state or quality of</a:t>
             </a:r>
             <a:endParaRPr lang="en-US" sz="850" dirty="0"/>
           </a:p>
@@ -28123,8 +28474,8 @@
         </p:nvSpPr>
         <p:spPr>
           <a:xfrm>
-            <a:off x="2313432" y="3364992"/>
-            <a:ext cx="1645920" cy="475488"/>
+            <a:off x="1975104" y="3364992"/>
+            <a:ext cx="1554480" cy="475488"/>
           </a:xfrm>
           <a:prstGeom prst="rect">
             <a:avLst>
@@ -28150,8 +28501,8 @@
         </p:nvSpPr>
         <p:spPr>
           <a:xfrm>
-            <a:off x="2313432" y="3364992"/>
-            <a:ext cx="1645920" cy="475488"/>
+            <a:off x="1975104" y="3364992"/>
+            <a:ext cx="1554480" cy="475488"/>
           </a:xfrm>
           <a:prstGeom prst="rect">
             <a:avLst/>
@@ -28189,8 +28540,8 @@
         </p:nvSpPr>
         <p:spPr>
           <a:xfrm>
-            <a:off x="3959352" y="3364992"/>
-            <a:ext cx="411480" cy="475488"/>
+            <a:off x="3529584" y="3364992"/>
+            <a:ext cx="73152" cy="475488"/>
           </a:xfrm>
           <a:prstGeom prst="rect">
             <a:avLst/>
@@ -28228,8 +28579,8 @@
         </p:nvSpPr>
         <p:spPr>
           <a:xfrm>
-            <a:off x="4370832" y="3364992"/>
-            <a:ext cx="1645920" cy="475488"/>
+            <a:off x="3602736" y="3364992"/>
+            <a:ext cx="1554480" cy="475488"/>
           </a:xfrm>
           <a:prstGeom prst="rect">
             <a:avLst>
@@ -28255,8 +28606,8 @@
         </p:nvSpPr>
         <p:spPr>
           <a:xfrm>
-            <a:off x="4370832" y="3364992"/>
-            <a:ext cx="1645920" cy="475488"/>
+            <a:off x="3602736" y="3364992"/>
+            <a:ext cx="1554480" cy="475488"/>
           </a:xfrm>
           <a:prstGeom prst="rect">
             <a:avLst/>
@@ -28280,7 +28631,7 @@
                 <a:ea typeface="Trebuchet MS" pitchFamily="34" charset="-122"/>
                 <a:cs typeface="Trebuchet MS" pitchFamily="34" charset="-120"/>
               </a:rPr>
-              <a:t>pect</a:t>
+              <a:t>pec</a:t>
             </a:r>
             <a:endParaRPr lang="en-US" sz="1400" dirty="0"/>
           </a:p>
@@ -28294,8 +28645,8 @@
         </p:nvSpPr>
         <p:spPr>
           <a:xfrm>
-            <a:off x="6016752" y="3364992"/>
-            <a:ext cx="411480" cy="475488"/>
+            <a:off x="5157216" y="3364992"/>
+            <a:ext cx="73152" cy="475488"/>
           </a:xfrm>
           <a:prstGeom prst="rect">
             <a:avLst/>
@@ -28333,8 +28684,8 @@
         </p:nvSpPr>
         <p:spPr>
           <a:xfrm>
-            <a:off x="6428232" y="3364992"/>
-            <a:ext cx="1645920" cy="475488"/>
+            <a:off x="5230368" y="3364992"/>
+            <a:ext cx="1554480" cy="475488"/>
           </a:xfrm>
           <a:prstGeom prst="rect">
             <a:avLst>
@@ -28360,8 +28711,8 @@
         </p:nvSpPr>
         <p:spPr>
           <a:xfrm>
-            <a:off x="6428232" y="3364992"/>
-            <a:ext cx="1645920" cy="475488"/>
+            <a:off x="5230368" y="3364992"/>
+            <a:ext cx="1554480" cy="475488"/>
           </a:xfrm>
           <a:prstGeom prst="rect">
             <a:avLst/>
@@ -28385,7 +28736,7 @@
                 <a:ea typeface="Trebuchet MS" pitchFamily="34" charset="-122"/>
                 <a:cs typeface="Trebuchet MS" pitchFamily="34" charset="-120"/>
               </a:rPr>
-              <a:t>ant</a:t>
+              <a:t>tan</a:t>
             </a:r>
             <a:endParaRPr lang="en-US" sz="1400" dirty="0"/>
           </a:p>
@@ -28393,7 +28744,112 @@
       </p:sp>
       <p:sp>
         <p:nvSpPr>
-          <p:cNvPr id="33" name="Shape 31"/>
+          <p:cNvPr id="33" name="Text 31"/>
+          <p:cNvSpPr/>
+          <p:nvPr/>
+        </p:nvSpPr>
+        <p:spPr>
+          <a:xfrm>
+            <a:off x="6784848" y="3364992"/>
+            <a:ext cx="73152" cy="475488"/>
+          </a:xfrm>
+          <a:prstGeom prst="rect">
+            <a:avLst/>
+          </a:prstGeom>
+          <a:noFill/>
+          <a:ln/>
+        </p:spPr>
+        <p:txBody>
+          <a:bodyPr wrap="square" lIns="0" tIns="0" rIns="0" bIns="0" rtlCol="0" anchor="ctr"/>
+          <a:lstStyle/>
+          <a:p>
+            <a:pPr algn="ctr" indent="0" marL="0">
+              <a:buNone/>
+            </a:pPr>
+            <a:r>
+              <a:rPr lang="en-US" sz="1600" b="1" dirty="0">
+                <a:solidFill>
+                  <a:srgbClr val="0D9488"/>
+                </a:solidFill>
+                <a:latin typeface="Trebuchet MS" pitchFamily="34" charset="0"/>
+                <a:ea typeface="Trebuchet MS" pitchFamily="34" charset="-122"/>
+                <a:cs typeface="Trebuchet MS" pitchFamily="34" charset="-120"/>
+              </a:rPr>
+              <a:t>·</a:t>
+            </a:r>
+            <a:endParaRPr lang="en-US" sz="1600" dirty="0"/>
+          </a:p>
+        </p:txBody>
+      </p:sp>
+      <p:sp>
+        <p:nvSpPr>
+          <p:cNvPr id="34" name="Shape 32"/>
+          <p:cNvSpPr/>
+          <p:nvPr/>
+        </p:nvSpPr>
+        <p:spPr>
+          <a:xfrm>
+            <a:off x="6858000" y="3364992"/>
+            <a:ext cx="1554480" cy="475488"/>
+          </a:xfrm>
+          <a:prstGeom prst="rect">
+            <a:avLst>
+              <a:gd name="adj" fmla="val 9615"/>
+            </a:avLst>
+          </a:prstGeom>
+          <a:solidFill>
+            <a:srgbClr val="FFFFFF"/>
+          </a:solidFill>
+          <a:ln w="12700">
+            <a:solidFill>
+              <a:srgbClr val="0D9488"/>
+            </a:solidFill>
+            <a:prstDash val="solid"/>
+          </a:ln>
+        </p:spPr>
+      </p:sp>
+      <p:sp>
+        <p:nvSpPr>
+          <p:cNvPr id="35" name="Text 33"/>
+          <p:cNvSpPr/>
+          <p:nvPr/>
+        </p:nvSpPr>
+        <p:spPr>
+          <a:xfrm>
+            <a:off x="6858000" y="3364992"/>
+            <a:ext cx="1554480" cy="475488"/>
+          </a:xfrm>
+          <a:prstGeom prst="rect">
+            <a:avLst/>
+          </a:prstGeom>
+          <a:noFill/>
+          <a:ln/>
+        </p:spPr>
+        <p:txBody>
+          <a:bodyPr wrap="square" lIns="0" tIns="0" rIns="0" bIns="0" rtlCol="0" anchor="ctr"/>
+          <a:lstStyle/>
+          <a:p>
+            <a:pPr algn="ctr" indent="0" marL="0">
+              <a:buNone/>
+            </a:pPr>
+            <a:r>
+              <a:rPr lang="en-US" sz="1400" b="1" dirty="0">
+                <a:solidFill>
+                  <a:srgbClr val="0D9488"/>
+                </a:solidFill>
+                <a:latin typeface="Trebuchet MS" pitchFamily="34" charset="0"/>
+                <a:ea typeface="Trebuchet MS" pitchFamily="34" charset="-122"/>
+                <a:cs typeface="Trebuchet MS" pitchFamily="34" charset="-120"/>
+              </a:rPr>
+              <a:t>cy</a:t>
+            </a:r>
+            <a:endParaRPr lang="en-US" sz="1400" dirty="0"/>
+          </a:p>
+        </p:txBody>
+      </p:sp>
+      <p:sp>
+        <p:nvSpPr>
+          <p:cNvPr id="36" name="Shape 34"/>
           <p:cNvSpPr/>
           <p:nvPr/>
         </p:nvSpPr>
@@ -28420,7 +28876,7 @@
       </p:sp>
       <p:sp>
         <p:nvSpPr>
-          <p:cNvPr id="34" name="Text 32"/>
+          <p:cNvPr id="37" name="Text 35"/>
           <p:cNvSpPr/>
           <p:nvPr/>
         </p:nvSpPr>
@@ -28459,7 +28915,7 @@
       </p:sp>
       <p:sp>
         <p:nvSpPr>
-          <p:cNvPr id="35" name="Shape 33"/>
+          <p:cNvPr id="38" name="Shape 36"/>
           <p:cNvSpPr/>
           <p:nvPr/>
         </p:nvSpPr>
@@ -28486,7 +28942,7 @@
       </p:sp>
       <p:sp>
         <p:nvSpPr>
-          <p:cNvPr id="36" name="Text 34"/>
+          <p:cNvPr id="39" name="Text 37"/>
           <p:cNvSpPr/>
           <p:nvPr/>
         </p:nvSpPr>
@@ -28948,7 +29404,7 @@
                 <a:ea typeface="Trebuchet MS" pitchFamily="34" charset="-122"/>
                 <a:cs typeface="Trebuchet MS" pitchFamily="34" charset="-120"/>
               </a:rPr>
-              <a:t>expectant</a:t>
+              <a:t>expectancy</a:t>
             </a:r>
             <a:endParaRPr lang="en-US" sz="2800" dirty="0"/>
           </a:p>
@@ -29199,7 +29655,7 @@
                 <a:ea typeface="Trebuchet MS" pitchFamily="34" charset="-122"/>
                 <a:cs typeface="Trebuchet MS" pitchFamily="34" charset="-120"/>
               </a:rPr>
-              <a:t>ant</a:t>
+              <a:t>ancy</a:t>
             </a:r>
             <a:endParaRPr lang="en-US" sz="1300" dirty="0"/>
           </a:p>
@@ -29238,7 +29694,7 @@
                 <a:ea typeface="Calibri" pitchFamily="34" charset="-122"/>
                 <a:cs typeface="Calibri" pitchFamily="34" charset="-120"/>
               </a:rPr>
-              <a:t>being or doing</a:t>
+              <a:t>state or quality of</a:t>
             </a:r>
             <a:endParaRPr lang="en-US" sz="850" dirty="0"/>
           </a:p>
@@ -29345,8 +29801,8 @@
         </p:nvSpPr>
         <p:spPr>
           <a:xfrm>
-            <a:off x="2313432" y="3364992"/>
-            <a:ext cx="1645920" cy="475488"/>
+            <a:off x="1975104" y="3364992"/>
+            <a:ext cx="1554480" cy="475488"/>
           </a:xfrm>
           <a:prstGeom prst="rect">
             <a:avLst>
@@ -29372,8 +29828,8 @@
         </p:nvSpPr>
         <p:spPr>
           <a:xfrm>
-            <a:off x="2313432" y="3364992"/>
-            <a:ext cx="1645920" cy="475488"/>
+            <a:off x="1975104" y="3364992"/>
+            <a:ext cx="1554480" cy="475488"/>
           </a:xfrm>
           <a:prstGeom prst="rect">
             <a:avLst/>
@@ -29411,8 +29867,8 @@
         </p:nvSpPr>
         <p:spPr>
           <a:xfrm>
-            <a:off x="3959352" y="3364992"/>
-            <a:ext cx="411480" cy="475488"/>
+            <a:off x="3529584" y="3364992"/>
+            <a:ext cx="73152" cy="475488"/>
           </a:xfrm>
           <a:prstGeom prst="rect">
             <a:avLst/>
@@ -29450,8 +29906,8 @@
         </p:nvSpPr>
         <p:spPr>
           <a:xfrm>
-            <a:off x="4370832" y="3364992"/>
-            <a:ext cx="1645920" cy="475488"/>
+            <a:off x="3602736" y="3364992"/>
+            <a:ext cx="1554480" cy="475488"/>
           </a:xfrm>
           <a:prstGeom prst="rect">
             <a:avLst>
@@ -29477,8 +29933,8 @@
         </p:nvSpPr>
         <p:spPr>
           <a:xfrm>
-            <a:off x="4370832" y="3364992"/>
-            <a:ext cx="1645920" cy="475488"/>
+            <a:off x="3602736" y="3364992"/>
+            <a:ext cx="1554480" cy="475488"/>
           </a:xfrm>
           <a:prstGeom prst="rect">
             <a:avLst/>
@@ -29502,7 +29958,7 @@
                 <a:ea typeface="Trebuchet MS" pitchFamily="34" charset="-122"/>
                 <a:cs typeface="Trebuchet MS" pitchFamily="34" charset="-120"/>
               </a:rPr>
-              <a:t>pect</a:t>
+              <a:t>pec</a:t>
             </a:r>
             <a:endParaRPr lang="en-US" sz="1400" dirty="0"/>
           </a:p>
@@ -29516,8 +29972,8 @@
         </p:nvSpPr>
         <p:spPr>
           <a:xfrm>
-            <a:off x="6016752" y="3364992"/>
-            <a:ext cx="411480" cy="475488"/>
+            <a:off x="5157216" y="3364992"/>
+            <a:ext cx="73152" cy="475488"/>
           </a:xfrm>
           <a:prstGeom prst="rect">
             <a:avLst/>
@@ -29555,8 +30011,8 @@
         </p:nvSpPr>
         <p:spPr>
           <a:xfrm>
-            <a:off x="6428232" y="3364992"/>
-            <a:ext cx="1645920" cy="475488"/>
+            <a:off x="5230368" y="3364992"/>
+            <a:ext cx="1554480" cy="475488"/>
           </a:xfrm>
           <a:prstGeom prst="rect">
             <a:avLst>
@@ -29582,8 +30038,8 @@
         </p:nvSpPr>
         <p:spPr>
           <a:xfrm>
-            <a:off x="6428232" y="3364992"/>
-            <a:ext cx="1645920" cy="475488"/>
+            <a:off x="5230368" y="3364992"/>
+            <a:ext cx="1554480" cy="475488"/>
           </a:xfrm>
           <a:prstGeom prst="rect">
             <a:avLst/>
@@ -29607,7 +30063,7 @@
                 <a:ea typeface="Trebuchet MS" pitchFamily="34" charset="-122"/>
                 <a:cs typeface="Trebuchet MS" pitchFamily="34" charset="-120"/>
               </a:rPr>
-              <a:t>ant</a:t>
+              <a:t>tan</a:t>
             </a:r>
             <a:endParaRPr lang="en-US" sz="1400" dirty="0"/>
           </a:p>
@@ -29615,7 +30071,112 @@
       </p:sp>
       <p:sp>
         <p:nvSpPr>
-          <p:cNvPr id="33" name="Shape 31"/>
+          <p:cNvPr id="33" name="Text 31"/>
+          <p:cNvSpPr/>
+          <p:nvPr/>
+        </p:nvSpPr>
+        <p:spPr>
+          <a:xfrm>
+            <a:off x="6784848" y="3364992"/>
+            <a:ext cx="73152" cy="475488"/>
+          </a:xfrm>
+          <a:prstGeom prst="rect">
+            <a:avLst/>
+          </a:prstGeom>
+          <a:noFill/>
+          <a:ln/>
+        </p:spPr>
+        <p:txBody>
+          <a:bodyPr wrap="square" lIns="0" tIns="0" rIns="0" bIns="0" rtlCol="0" anchor="ctr"/>
+          <a:lstStyle/>
+          <a:p>
+            <a:pPr algn="ctr" indent="0" marL="0">
+              <a:buNone/>
+            </a:pPr>
+            <a:r>
+              <a:rPr lang="en-US" sz="1600" b="1" dirty="0">
+                <a:solidFill>
+                  <a:srgbClr val="0D9488"/>
+                </a:solidFill>
+                <a:latin typeface="Trebuchet MS" pitchFamily="34" charset="0"/>
+                <a:ea typeface="Trebuchet MS" pitchFamily="34" charset="-122"/>
+                <a:cs typeface="Trebuchet MS" pitchFamily="34" charset="-120"/>
+              </a:rPr>
+              <a:t>·</a:t>
+            </a:r>
+            <a:endParaRPr lang="en-US" sz="1600" dirty="0"/>
+          </a:p>
+        </p:txBody>
+      </p:sp>
+      <p:sp>
+        <p:nvSpPr>
+          <p:cNvPr id="34" name="Shape 32"/>
+          <p:cNvSpPr/>
+          <p:nvPr/>
+        </p:nvSpPr>
+        <p:spPr>
+          <a:xfrm>
+            <a:off x="6858000" y="3364992"/>
+            <a:ext cx="1554480" cy="475488"/>
+          </a:xfrm>
+          <a:prstGeom prst="rect">
+            <a:avLst>
+              <a:gd name="adj" fmla="val 9615"/>
+            </a:avLst>
+          </a:prstGeom>
+          <a:solidFill>
+            <a:srgbClr val="FFFFFF"/>
+          </a:solidFill>
+          <a:ln w="12700">
+            <a:solidFill>
+              <a:srgbClr val="0D9488"/>
+            </a:solidFill>
+            <a:prstDash val="solid"/>
+          </a:ln>
+        </p:spPr>
+      </p:sp>
+      <p:sp>
+        <p:nvSpPr>
+          <p:cNvPr id="35" name="Text 33"/>
+          <p:cNvSpPr/>
+          <p:nvPr/>
+        </p:nvSpPr>
+        <p:spPr>
+          <a:xfrm>
+            <a:off x="6858000" y="3364992"/>
+            <a:ext cx="1554480" cy="475488"/>
+          </a:xfrm>
+          <a:prstGeom prst="rect">
+            <a:avLst/>
+          </a:prstGeom>
+          <a:noFill/>
+          <a:ln/>
+        </p:spPr>
+        <p:txBody>
+          <a:bodyPr wrap="square" lIns="0" tIns="0" rIns="0" bIns="0" rtlCol="0" anchor="ctr"/>
+          <a:lstStyle/>
+          <a:p>
+            <a:pPr algn="ctr" indent="0" marL="0">
+              <a:buNone/>
+            </a:pPr>
+            <a:r>
+              <a:rPr lang="en-US" sz="1400" b="1" dirty="0">
+                <a:solidFill>
+                  <a:srgbClr val="0D9488"/>
+                </a:solidFill>
+                <a:latin typeface="Trebuchet MS" pitchFamily="34" charset="0"/>
+                <a:ea typeface="Trebuchet MS" pitchFamily="34" charset="-122"/>
+                <a:cs typeface="Trebuchet MS" pitchFamily="34" charset="-120"/>
+              </a:rPr>
+              <a:t>cy</a:t>
+            </a:r>
+            <a:endParaRPr lang="en-US" sz="1400" dirty="0"/>
+          </a:p>
+        </p:txBody>
+      </p:sp>
+      <p:sp>
+        <p:nvSpPr>
+          <p:cNvPr id="36" name="Shape 34"/>
           <p:cNvSpPr/>
           <p:nvPr/>
         </p:nvSpPr>
@@ -29642,7 +30203,7 @@
       </p:sp>
       <p:sp>
         <p:nvSpPr>
-          <p:cNvPr id="34" name="Text 32"/>
+          <p:cNvPr id="37" name="Text 35"/>
           <p:cNvSpPr/>
           <p:nvPr/>
         </p:nvSpPr>
@@ -29681,7 +30242,7 @@
       </p:sp>
       <p:sp>
         <p:nvSpPr>
-          <p:cNvPr id="35" name="Shape 33"/>
+          <p:cNvPr id="38" name="Shape 36"/>
           <p:cNvSpPr/>
           <p:nvPr/>
         </p:nvSpPr>
@@ -29708,14 +30269,14 @@
       </p:sp>
       <p:sp>
         <p:nvSpPr>
-          <p:cNvPr id="36" name="Shape 34"/>
-          <p:cNvSpPr/>
-          <p:nvPr/>
-        </p:nvSpPr>
-        <p:spPr>
-          <a:xfrm>
-            <a:off x="1951330" y="4169664"/>
-            <a:ext cx="676656" cy="384048"/>
+          <p:cNvPr id="39" name="Shape 37"/>
+          <p:cNvSpPr/>
+          <p:nvPr/>
+        </p:nvSpPr>
+        <p:spPr>
+          <a:xfrm>
+            <a:off x="1951828" y="4169664"/>
+            <a:ext cx="603504" cy="384048"/>
           </a:xfrm>
           <a:prstGeom prst="rect">
             <a:avLst>
@@ -29735,14 +30296,14 @@
       </p:sp>
       <p:sp>
         <p:nvSpPr>
-          <p:cNvPr id="37" name="Text 35"/>
-          <p:cNvSpPr/>
-          <p:nvPr/>
-        </p:nvSpPr>
-        <p:spPr>
-          <a:xfrm>
-            <a:off x="1951330" y="4169664"/>
-            <a:ext cx="676656" cy="384048"/>
+          <p:cNvPr id="40" name="Text 38"/>
+          <p:cNvSpPr/>
+          <p:nvPr/>
+        </p:nvSpPr>
+        <p:spPr>
+          <a:xfrm>
+            <a:off x="1951828" y="4169664"/>
+            <a:ext cx="603504" cy="384048"/>
           </a:xfrm>
           <a:prstGeom prst="rect">
             <a:avLst/>
@@ -29774,14 +30335,14 @@
       </p:sp>
       <p:sp>
         <p:nvSpPr>
-          <p:cNvPr id="38" name="Shape 36"/>
-          <p:cNvSpPr/>
-          <p:nvPr/>
-        </p:nvSpPr>
-        <p:spPr>
-          <a:xfrm>
-            <a:off x="2677363" y="4169664"/>
-            <a:ext cx="676656" cy="384048"/>
+          <p:cNvPr id="41" name="Shape 39"/>
+          <p:cNvSpPr/>
+          <p:nvPr/>
+        </p:nvSpPr>
+        <p:spPr>
+          <a:xfrm>
+            <a:off x="2605209" y="4169664"/>
+            <a:ext cx="603504" cy="384048"/>
           </a:xfrm>
           <a:prstGeom prst="rect">
             <a:avLst>
@@ -29801,14 +30362,14 @@
       </p:sp>
       <p:sp>
         <p:nvSpPr>
-          <p:cNvPr id="39" name="Text 37"/>
-          <p:cNvSpPr/>
-          <p:nvPr/>
-        </p:nvSpPr>
-        <p:spPr>
-          <a:xfrm>
-            <a:off x="2677363" y="4169664"/>
-            <a:ext cx="676656" cy="384048"/>
+          <p:cNvPr id="42" name="Text 40"/>
+          <p:cNvSpPr/>
+          <p:nvPr/>
+        </p:nvSpPr>
+        <p:spPr>
+          <a:xfrm>
+            <a:off x="2605209" y="4169664"/>
+            <a:ext cx="603504" cy="384048"/>
           </a:xfrm>
           <a:prstGeom prst="rect">
             <a:avLst/>
@@ -29840,14 +30401,14 @@
       </p:sp>
       <p:sp>
         <p:nvSpPr>
-          <p:cNvPr id="40" name="Text 38"/>
-          <p:cNvSpPr/>
-          <p:nvPr/>
-        </p:nvSpPr>
-        <p:spPr>
-          <a:xfrm>
-            <a:off x="2677363" y="4572000"/>
-            <a:ext cx="676656" cy="219456"/>
+          <p:cNvPr id="43" name="Text 41"/>
+          <p:cNvSpPr/>
+          <p:nvPr/>
+        </p:nvSpPr>
+        <p:spPr>
+          <a:xfrm>
+            <a:off x="2605209" y="4572000"/>
+            <a:ext cx="603504" cy="219456"/>
           </a:xfrm>
           <a:prstGeom prst="rect">
             <a:avLst/>
@@ -29879,14 +30440,14 @@
       </p:sp>
       <p:sp>
         <p:nvSpPr>
-          <p:cNvPr id="41" name="Shape 39"/>
-          <p:cNvSpPr/>
-          <p:nvPr/>
-        </p:nvSpPr>
-        <p:spPr>
-          <a:xfrm>
-            <a:off x="3403397" y="4169664"/>
-            <a:ext cx="676656" cy="384048"/>
+          <p:cNvPr id="44" name="Shape 42"/>
+          <p:cNvSpPr/>
+          <p:nvPr/>
+        </p:nvSpPr>
+        <p:spPr>
+          <a:xfrm>
+            <a:off x="3258589" y="4169664"/>
+            <a:ext cx="603504" cy="384048"/>
           </a:xfrm>
           <a:prstGeom prst="rect">
             <a:avLst>
@@ -29906,14 +30467,14 @@
       </p:sp>
       <p:sp>
         <p:nvSpPr>
-          <p:cNvPr id="42" name="Text 40"/>
-          <p:cNvSpPr/>
-          <p:nvPr/>
-        </p:nvSpPr>
-        <p:spPr>
-          <a:xfrm>
-            <a:off x="3403397" y="4169664"/>
-            <a:ext cx="676656" cy="384048"/>
+          <p:cNvPr id="45" name="Text 43"/>
+          <p:cNvSpPr/>
+          <p:nvPr/>
+        </p:nvSpPr>
+        <p:spPr>
+          <a:xfrm>
+            <a:off x="3258589" y="4169664"/>
+            <a:ext cx="603504" cy="384048"/>
           </a:xfrm>
           <a:prstGeom prst="rect">
             <a:avLst/>
@@ -29945,14 +30506,14 @@
       </p:sp>
       <p:sp>
         <p:nvSpPr>
-          <p:cNvPr id="43" name="Shape 41"/>
-          <p:cNvSpPr/>
-          <p:nvPr/>
-        </p:nvSpPr>
-        <p:spPr>
-          <a:xfrm>
-            <a:off x="4129430" y="4169664"/>
-            <a:ext cx="676656" cy="384048"/>
+          <p:cNvPr id="46" name="Shape 44"/>
+          <p:cNvSpPr/>
+          <p:nvPr/>
+        </p:nvSpPr>
+        <p:spPr>
+          <a:xfrm>
+            <a:off x="3911969" y="4169664"/>
+            <a:ext cx="603504" cy="384048"/>
           </a:xfrm>
           <a:prstGeom prst="rect">
             <a:avLst>
@@ -29972,14 +30533,14 @@
       </p:sp>
       <p:sp>
         <p:nvSpPr>
-          <p:cNvPr id="44" name="Text 42"/>
-          <p:cNvSpPr/>
-          <p:nvPr/>
-        </p:nvSpPr>
-        <p:spPr>
-          <a:xfrm>
-            <a:off x="4129430" y="4169664"/>
-            <a:ext cx="676656" cy="384048"/>
+          <p:cNvPr id="47" name="Text 45"/>
+          <p:cNvSpPr/>
+          <p:nvPr/>
+        </p:nvSpPr>
+        <p:spPr>
+          <a:xfrm>
+            <a:off x="3911969" y="4169664"/>
+            <a:ext cx="603504" cy="384048"/>
           </a:xfrm>
           <a:prstGeom prst="rect">
             <a:avLst/>
@@ -30011,14 +30572,14 @@
       </p:sp>
       <p:sp>
         <p:nvSpPr>
-          <p:cNvPr id="45" name="Shape 43"/>
-          <p:cNvSpPr/>
-          <p:nvPr/>
-        </p:nvSpPr>
-        <p:spPr>
-          <a:xfrm>
-            <a:off x="4855464" y="4169664"/>
-            <a:ext cx="676656" cy="384048"/>
+          <p:cNvPr id="48" name="Shape 46"/>
+          <p:cNvSpPr/>
+          <p:nvPr/>
+        </p:nvSpPr>
+        <p:spPr>
+          <a:xfrm>
+            <a:off x="4565350" y="4169664"/>
+            <a:ext cx="603504" cy="384048"/>
           </a:xfrm>
           <a:prstGeom prst="rect">
             <a:avLst>
@@ -30038,14 +30599,14 @@
       </p:sp>
       <p:sp>
         <p:nvSpPr>
-          <p:cNvPr id="46" name="Text 44"/>
-          <p:cNvSpPr/>
-          <p:nvPr/>
-        </p:nvSpPr>
-        <p:spPr>
-          <a:xfrm>
-            <a:off x="4855464" y="4169664"/>
-            <a:ext cx="676656" cy="384048"/>
+          <p:cNvPr id="49" name="Text 47"/>
+          <p:cNvSpPr/>
+          <p:nvPr/>
+        </p:nvSpPr>
+        <p:spPr>
+          <a:xfrm>
+            <a:off x="4565350" y="4169664"/>
+            <a:ext cx="603504" cy="384048"/>
           </a:xfrm>
           <a:prstGeom prst="rect">
             <a:avLst/>
@@ -30077,53 +30638,14 @@
       </p:sp>
       <p:sp>
         <p:nvSpPr>
-          <p:cNvPr id="47" name="Text 45"/>
-          <p:cNvSpPr/>
-          <p:nvPr/>
-        </p:nvSpPr>
-        <p:spPr>
-          <a:xfrm>
-            <a:off x="4855464" y="4572000"/>
-            <a:ext cx="676656" cy="219456"/>
-          </a:xfrm>
-          <a:prstGeom prst="rect">
-            <a:avLst/>
-          </a:prstGeom>
-          <a:noFill/>
-          <a:ln/>
-        </p:spPr>
-        <p:txBody>
-          <a:bodyPr wrap="square" lIns="0" tIns="0" rIns="0" bIns="0" rtlCol="0" anchor="t"/>
-          <a:lstStyle/>
-          <a:p>
-            <a:pPr algn="ctr" indent="0" marL="0">
-              <a:buNone/>
-            </a:pPr>
-            <a:r>
-              <a:rPr lang="en-US" sz="750" i="1" dirty="0">
-                <a:solidFill>
-                  <a:srgbClr val="94A3B8"/>
-                </a:solidFill>
-                <a:latin typeface="Calibri" pitchFamily="34" charset="0"/>
-                <a:ea typeface="Calibri" pitchFamily="34" charset="-122"/>
-                <a:cs typeface="Calibri" pitchFamily="34" charset="-120"/>
-              </a:rPr>
-              <a:t>/k/</a:t>
-            </a:r>
-            <a:endParaRPr lang="en-US" sz="750" dirty="0"/>
-          </a:p>
-        </p:txBody>
-      </p:sp>
-      <p:sp>
-        <p:nvSpPr>
-          <p:cNvPr id="48" name="Shape 46"/>
-          <p:cNvSpPr/>
-          <p:nvPr/>
-        </p:nvSpPr>
-        <p:spPr>
-          <a:xfrm>
-            <a:off x="5581498" y="4169664"/>
-            <a:ext cx="676656" cy="384048"/>
+          <p:cNvPr id="50" name="Shape 48"/>
+          <p:cNvSpPr/>
+          <p:nvPr/>
+        </p:nvSpPr>
+        <p:spPr>
+          <a:xfrm>
+            <a:off x="5218730" y="4169664"/>
+            <a:ext cx="603504" cy="384048"/>
           </a:xfrm>
           <a:prstGeom prst="rect">
             <a:avLst>
@@ -30143,14 +30665,14 @@
       </p:sp>
       <p:sp>
         <p:nvSpPr>
-          <p:cNvPr id="49" name="Text 47"/>
-          <p:cNvSpPr/>
-          <p:nvPr/>
-        </p:nvSpPr>
-        <p:spPr>
-          <a:xfrm>
-            <a:off x="5581498" y="4169664"/>
-            <a:ext cx="676656" cy="384048"/>
+          <p:cNvPr id="51" name="Text 49"/>
+          <p:cNvSpPr/>
+          <p:nvPr/>
+        </p:nvSpPr>
+        <p:spPr>
+          <a:xfrm>
+            <a:off x="5218730" y="4169664"/>
+            <a:ext cx="603504" cy="384048"/>
           </a:xfrm>
           <a:prstGeom prst="rect">
             <a:avLst/>
@@ -30182,14 +30704,14 @@
       </p:sp>
       <p:sp>
         <p:nvSpPr>
-          <p:cNvPr id="50" name="Shape 48"/>
-          <p:cNvSpPr/>
-          <p:nvPr/>
-        </p:nvSpPr>
-        <p:spPr>
-          <a:xfrm>
-            <a:off x="6307531" y="4169664"/>
-            <a:ext cx="676656" cy="384048"/>
+          <p:cNvPr id="52" name="Shape 50"/>
+          <p:cNvSpPr/>
+          <p:nvPr/>
+        </p:nvSpPr>
+        <p:spPr>
+          <a:xfrm>
+            <a:off x="5872111" y="4169664"/>
+            <a:ext cx="603504" cy="384048"/>
           </a:xfrm>
           <a:prstGeom prst="rect">
             <a:avLst>
@@ -30209,14 +30731,14 @@
       </p:sp>
       <p:sp>
         <p:nvSpPr>
-          <p:cNvPr id="51" name="Text 49"/>
-          <p:cNvSpPr/>
-          <p:nvPr/>
-        </p:nvSpPr>
-        <p:spPr>
-          <a:xfrm>
-            <a:off x="6307531" y="4169664"/>
-            <a:ext cx="676656" cy="384048"/>
+          <p:cNvPr id="53" name="Text 51"/>
+          <p:cNvSpPr/>
+          <p:nvPr/>
+        </p:nvSpPr>
+        <p:spPr>
+          <a:xfrm>
+            <a:off x="5872111" y="4169664"/>
+            <a:ext cx="603504" cy="384048"/>
           </a:xfrm>
           <a:prstGeom prst="rect">
             <a:avLst/>
@@ -30248,14 +30770,14 @@
       </p:sp>
       <p:sp>
         <p:nvSpPr>
-          <p:cNvPr id="52" name="Shape 50"/>
-          <p:cNvSpPr/>
-          <p:nvPr/>
-        </p:nvSpPr>
-        <p:spPr>
-          <a:xfrm>
-            <a:off x="7033565" y="4169664"/>
-            <a:ext cx="676656" cy="384048"/>
+          <p:cNvPr id="54" name="Shape 52"/>
+          <p:cNvSpPr/>
+          <p:nvPr/>
+        </p:nvSpPr>
+        <p:spPr>
+          <a:xfrm>
+            <a:off x="6525491" y="4169664"/>
+            <a:ext cx="603504" cy="384048"/>
           </a:xfrm>
           <a:prstGeom prst="rect">
             <a:avLst>
@@ -30275,14 +30797,14 @@
       </p:sp>
       <p:sp>
         <p:nvSpPr>
-          <p:cNvPr id="53" name="Text 51"/>
-          <p:cNvSpPr/>
-          <p:nvPr/>
-        </p:nvSpPr>
-        <p:spPr>
-          <a:xfrm>
-            <a:off x="7033565" y="4169664"/>
-            <a:ext cx="676656" cy="384048"/>
+          <p:cNvPr id="55" name="Text 53"/>
+          <p:cNvSpPr/>
+          <p:nvPr/>
+        </p:nvSpPr>
+        <p:spPr>
+          <a:xfrm>
+            <a:off x="6525491" y="4169664"/>
+            <a:ext cx="603504" cy="384048"/>
           </a:xfrm>
           <a:prstGeom prst="rect">
             <a:avLst/>
@@ -30314,14 +30836,14 @@
       </p:sp>
       <p:sp>
         <p:nvSpPr>
-          <p:cNvPr id="54" name="Shape 52"/>
-          <p:cNvSpPr/>
-          <p:nvPr/>
-        </p:nvSpPr>
-        <p:spPr>
-          <a:xfrm>
-            <a:off x="7759598" y="4169664"/>
-            <a:ext cx="676656" cy="384048"/>
+          <p:cNvPr id="56" name="Shape 54"/>
+          <p:cNvSpPr/>
+          <p:nvPr/>
+        </p:nvSpPr>
+        <p:spPr>
+          <a:xfrm>
+            <a:off x="7178871" y="4169664"/>
+            <a:ext cx="603504" cy="384048"/>
           </a:xfrm>
           <a:prstGeom prst="rect">
             <a:avLst>
@@ -30341,14 +30863,14 @@
       </p:sp>
       <p:sp>
         <p:nvSpPr>
-          <p:cNvPr id="55" name="Text 53"/>
-          <p:cNvSpPr/>
-          <p:nvPr/>
-        </p:nvSpPr>
-        <p:spPr>
-          <a:xfrm>
-            <a:off x="7759598" y="4169664"/>
-            <a:ext cx="676656" cy="384048"/>
+          <p:cNvPr id="57" name="Text 55"/>
+          <p:cNvSpPr/>
+          <p:nvPr/>
+        </p:nvSpPr>
+        <p:spPr>
+          <a:xfrm>
+            <a:off x="7178871" y="4169664"/>
+            <a:ext cx="603504" cy="384048"/>
           </a:xfrm>
           <a:prstGeom prst="rect">
             <a:avLst/>
@@ -30372,7 +30894,73 @@
                 <a:ea typeface="Trebuchet MS" pitchFamily="34" charset="-122"/>
                 <a:cs typeface="Trebuchet MS" pitchFamily="34" charset="-120"/>
               </a:rPr>
-              <a:t>t</a:t>
+              <a:t>c</a:t>
+            </a:r>
+            <a:endParaRPr lang="en-US" sz="900" dirty="0"/>
+          </a:p>
+        </p:txBody>
+      </p:sp>
+      <p:sp>
+        <p:nvSpPr>
+          <p:cNvPr id="58" name="Shape 56"/>
+          <p:cNvSpPr/>
+          <p:nvPr/>
+        </p:nvSpPr>
+        <p:spPr>
+          <a:xfrm>
+            <a:off x="7832252" y="4169664"/>
+            <a:ext cx="603504" cy="384048"/>
+          </a:xfrm>
+          <a:prstGeom prst="rect">
+            <a:avLst>
+              <a:gd name="adj" fmla="val 9524"/>
+            </a:avLst>
+          </a:prstGeom>
+          <a:solidFill>
+            <a:srgbClr val="FFFFFF"/>
+          </a:solidFill>
+          <a:ln w="12700">
+            <a:solidFill>
+              <a:srgbClr val="DB2777"/>
+            </a:solidFill>
+            <a:prstDash val="solid"/>
+          </a:ln>
+        </p:spPr>
+      </p:sp>
+      <p:sp>
+        <p:nvSpPr>
+          <p:cNvPr id="59" name="Text 57"/>
+          <p:cNvSpPr/>
+          <p:nvPr/>
+        </p:nvSpPr>
+        <p:spPr>
+          <a:xfrm>
+            <a:off x="7832252" y="4169664"/>
+            <a:ext cx="603504" cy="384048"/>
+          </a:xfrm>
+          <a:prstGeom prst="rect">
+            <a:avLst/>
+          </a:prstGeom>
+          <a:noFill/>
+          <a:ln/>
+        </p:spPr>
+        <p:txBody>
+          <a:bodyPr wrap="square" lIns="0" tIns="0" rIns="0" bIns="0" rtlCol="0" anchor="ctr"/>
+          <a:lstStyle/>
+          <a:p>
+            <a:pPr algn="ctr" indent="0" marL="0">
+              <a:buNone/>
+            </a:pPr>
+            <a:r>
+              <a:rPr lang="en-US" sz="900" b="1" dirty="0">
+                <a:solidFill>
+                  <a:srgbClr val="9D174D"/>
+                </a:solidFill>
+                <a:latin typeface="Trebuchet MS" pitchFamily="34" charset="0"/>
+                <a:ea typeface="Trebuchet MS" pitchFamily="34" charset="-122"/>
+                <a:cs typeface="Trebuchet MS" pitchFamily="34" charset="-120"/>
+              </a:rPr>
+              <a:t>y</a:t>
             </a:r>
             <a:endParaRPr lang="en-US" sz="900" dirty="0"/>
           </a:p>
@@ -30803,7 +31391,7 @@
                 <a:ea typeface="Trebuchet MS" pitchFamily="34" charset="-122"/>
                 <a:cs typeface="Trebuchet MS" pitchFamily="34" charset="-120"/>
               </a:rPr>
-              <a:t>expectations</a:t>
+              <a:t>unexpectedly</a:t>
             </a:r>
             <a:endParaRPr lang="en-US" sz="2800" dirty="0"/>
           </a:p>
@@ -31630,7 +32218,7 @@
                 <a:ea typeface="Trebuchet MS" pitchFamily="34" charset="-122"/>
                 <a:cs typeface="Trebuchet MS" pitchFamily="34" charset="-120"/>
               </a:rPr>
-              <a:t>expectations</a:t>
+              <a:t>unexpectedly</a:t>
             </a:r>
             <a:endParaRPr lang="en-US" sz="2800" dirty="0"/>
           </a:p>
@@ -31710,8 +32298,8 @@
         </p:nvSpPr>
         <p:spPr>
           <a:xfrm>
-            <a:off x="2221992" y="2258568"/>
-            <a:ext cx="1828800" cy="292608"/>
+            <a:off x="1989734" y="2258568"/>
+            <a:ext cx="1581912" cy="292608"/>
           </a:xfrm>
           <a:prstGeom prst="rect">
             <a:avLst>
@@ -31719,11 +32307,11 @@
             </a:avLst>
           </a:prstGeom>
           <a:solidFill>
-            <a:srgbClr val="CCFBF1"/>
+            <a:srgbClr val="DDD6FE"/>
           </a:solidFill>
           <a:ln w="19050">
             <a:solidFill>
-              <a:srgbClr val="0D9488"/>
+              <a:srgbClr val="7C3AED"/>
             </a:solidFill>
             <a:prstDash val="solid"/>
           </a:ln>
@@ -31744,8 +32332,8 @@
         </p:nvSpPr>
         <p:spPr>
           <a:xfrm>
-            <a:off x="2221992" y="2258568"/>
-            <a:ext cx="1828800" cy="292608"/>
+            <a:off x="1989734" y="2258568"/>
+            <a:ext cx="1581912" cy="292608"/>
           </a:xfrm>
           <a:prstGeom prst="rect">
             <a:avLst/>
@@ -31763,13 +32351,13 @@
             <a:r>
               <a:rPr lang="en-US" sz="1300" b="1" dirty="0">
                 <a:solidFill>
-                  <a:srgbClr val="0F766E"/>
+                  <a:srgbClr val="4C1D95"/>
                 </a:solidFill>
                 <a:latin typeface="Trebuchet MS" pitchFamily="34" charset="0"/>
                 <a:ea typeface="Trebuchet MS" pitchFamily="34" charset="-122"/>
                 <a:cs typeface="Trebuchet MS" pitchFamily="34" charset="-120"/>
               </a:rPr>
-              <a:t>expect</a:t>
+              <a:t>un</a:t>
             </a:r>
             <a:endParaRPr lang="en-US" sz="1300" dirty="0"/>
           </a:p>
@@ -31783,8 +32371,8 @@
         </p:nvSpPr>
         <p:spPr>
           <a:xfrm>
-            <a:off x="2221992" y="2569464"/>
-            <a:ext cx="1828800" cy="201168"/>
+            <a:off x="1989734" y="2569464"/>
+            <a:ext cx="1581912" cy="201168"/>
           </a:xfrm>
           <a:prstGeom prst="rect">
             <a:avLst/>
@@ -31808,7 +32396,7 @@
                 <a:ea typeface="Calibri" pitchFamily="34" charset="-122"/>
                 <a:cs typeface="Calibri" pitchFamily="34" charset="-120"/>
               </a:rPr>
-              <a:t>to look forward, await</a:t>
+              <a:t>not</a:t>
             </a:r>
             <a:endParaRPr lang="en-US" sz="850" dirty="0"/>
           </a:p>
@@ -31822,8 +32410,8 @@
         </p:nvSpPr>
         <p:spPr>
           <a:xfrm>
-            <a:off x="4370832" y="2258568"/>
-            <a:ext cx="1828800" cy="292608"/>
+            <a:off x="3659429" y="2258568"/>
+            <a:ext cx="1581912" cy="292608"/>
           </a:xfrm>
           <a:prstGeom prst="rect">
             <a:avLst>
@@ -31831,11 +32419,11 @@
             </a:avLst>
           </a:prstGeom>
           <a:solidFill>
-            <a:srgbClr val="FCE7F3"/>
+            <a:srgbClr val="CCFBF1"/>
           </a:solidFill>
           <a:ln w="19050">
             <a:solidFill>
-              <a:srgbClr val="DB2777"/>
+              <a:srgbClr val="0D9488"/>
             </a:solidFill>
             <a:prstDash val="solid"/>
           </a:ln>
@@ -31856,8 +32444,8 @@
         </p:nvSpPr>
         <p:spPr>
           <a:xfrm>
-            <a:off x="4370832" y="2258568"/>
-            <a:ext cx="1828800" cy="292608"/>
+            <a:off x="3659429" y="2258568"/>
+            <a:ext cx="1581912" cy="292608"/>
           </a:xfrm>
           <a:prstGeom prst="rect">
             <a:avLst/>
@@ -31875,13 +32463,13 @@
             <a:r>
               <a:rPr lang="en-US" sz="1300" b="1" dirty="0">
                 <a:solidFill>
-                  <a:srgbClr val="9D174D"/>
+                  <a:srgbClr val="0F766E"/>
                 </a:solidFill>
                 <a:latin typeface="Trebuchet MS" pitchFamily="34" charset="0"/>
                 <a:ea typeface="Trebuchet MS" pitchFamily="34" charset="-122"/>
                 <a:cs typeface="Trebuchet MS" pitchFamily="34" charset="-120"/>
               </a:rPr>
-              <a:t>ation</a:t>
+              <a:t>expect</a:t>
             </a:r>
             <a:endParaRPr lang="en-US" sz="1300" dirty="0"/>
           </a:p>
@@ -31895,8 +32483,8 @@
         </p:nvSpPr>
         <p:spPr>
           <a:xfrm>
-            <a:off x="4370832" y="2569464"/>
-            <a:ext cx="1828800" cy="201168"/>
+            <a:off x="3659429" y="2569464"/>
+            <a:ext cx="1581912" cy="201168"/>
           </a:xfrm>
           <a:prstGeom prst="rect">
             <a:avLst/>
@@ -31920,7 +32508,7 @@
                 <a:ea typeface="Calibri" pitchFamily="34" charset="-122"/>
                 <a:cs typeface="Calibri" pitchFamily="34" charset="-120"/>
               </a:rPr>
-              <a:t>the act or state of</a:t>
+              <a:t>to look forward, await</a:t>
             </a:r>
             <a:endParaRPr lang="en-US" sz="850" dirty="0"/>
           </a:p>
@@ -31934,8 +32522,8 @@
         </p:nvSpPr>
         <p:spPr>
           <a:xfrm>
-            <a:off x="6519672" y="2258568"/>
-            <a:ext cx="1828800" cy="292608"/>
+            <a:off x="5329123" y="2258568"/>
+            <a:ext cx="1581912" cy="292608"/>
           </a:xfrm>
           <a:prstGeom prst="rect">
             <a:avLst>
@@ -31968,8 +32556,8 @@
         </p:nvSpPr>
         <p:spPr>
           <a:xfrm>
-            <a:off x="6519672" y="2258568"/>
-            <a:ext cx="1828800" cy="292608"/>
+            <a:off x="5329123" y="2258568"/>
+            <a:ext cx="1581912" cy="292608"/>
           </a:xfrm>
           <a:prstGeom prst="rect">
             <a:avLst/>
@@ -31993,7 +32581,7 @@
                 <a:ea typeface="Trebuchet MS" pitchFamily="34" charset="-122"/>
                 <a:cs typeface="Trebuchet MS" pitchFamily="34" charset="-120"/>
               </a:rPr>
-              <a:t>s</a:t>
+              <a:t>ed</a:t>
             </a:r>
             <a:endParaRPr lang="en-US" sz="1300" dirty="0"/>
           </a:p>
@@ -32007,8 +32595,8 @@
         </p:nvSpPr>
         <p:spPr>
           <a:xfrm>
-            <a:off x="6519672" y="2569464"/>
-            <a:ext cx="1828800" cy="201168"/>
+            <a:off x="5329123" y="2569464"/>
+            <a:ext cx="1581912" cy="201168"/>
           </a:xfrm>
           <a:prstGeom prst="rect">
             <a:avLst/>
@@ -32032,7 +32620,7 @@
                 <a:ea typeface="Calibri" pitchFamily="34" charset="-122"/>
                 <a:cs typeface="Calibri" pitchFamily="34" charset="-120"/>
               </a:rPr>
-              <a:t>more than one</a:t>
+              <a:t>past tense, having been</a:t>
             </a:r>
             <a:endParaRPr lang="en-US" sz="850" dirty="0"/>
           </a:p>
@@ -32041,6 +32629,118 @@
       <p:sp>
         <p:nvSpPr>
           <p:cNvPr id="25" name="Shape 23"/>
+          <p:cNvSpPr/>
+          <p:nvPr/>
+        </p:nvSpPr>
+        <p:spPr>
+          <a:xfrm>
+            <a:off x="6998818" y="2258568"/>
+            <a:ext cx="1581912" cy="292608"/>
+          </a:xfrm>
+          <a:prstGeom prst="rect">
+            <a:avLst>
+              <a:gd name="adj" fmla="val 25000"/>
+            </a:avLst>
+          </a:prstGeom>
+          <a:solidFill>
+            <a:srgbClr val="FCE7F3"/>
+          </a:solidFill>
+          <a:ln w="19050">
+            <a:solidFill>
+              <a:srgbClr val="DB2777"/>
+            </a:solidFill>
+            <a:prstDash val="solid"/>
+          </a:ln>
+          <a:effectLst>
+            <a:outerShdw sx="100000" sy="100000" kx="0" ky="0" algn="bl" rotWithShape="0" blurRad="101600" dist="38100" dir="8100000">
+              <a:srgbClr val="000000">
+                <a:alpha val="12000"/>
+              </a:srgbClr>
+            </a:outerShdw>
+          </a:effectLst>
+        </p:spPr>
+      </p:sp>
+      <p:sp>
+        <p:nvSpPr>
+          <p:cNvPr id="26" name="Text 24"/>
+          <p:cNvSpPr/>
+          <p:nvPr/>
+        </p:nvSpPr>
+        <p:spPr>
+          <a:xfrm>
+            <a:off x="6998818" y="2258568"/>
+            <a:ext cx="1581912" cy="292608"/>
+          </a:xfrm>
+          <a:prstGeom prst="rect">
+            <a:avLst/>
+          </a:prstGeom>
+          <a:noFill/>
+          <a:ln/>
+        </p:spPr>
+        <p:txBody>
+          <a:bodyPr wrap="square" lIns="0" tIns="0" rIns="0" bIns="0" rtlCol="0" anchor="ctr"/>
+          <a:lstStyle/>
+          <a:p>
+            <a:pPr algn="ctr" indent="0" marL="0">
+              <a:buNone/>
+            </a:pPr>
+            <a:r>
+              <a:rPr lang="en-US" sz="1300" b="1" dirty="0">
+                <a:solidFill>
+                  <a:srgbClr val="9D174D"/>
+                </a:solidFill>
+                <a:latin typeface="Trebuchet MS" pitchFamily="34" charset="0"/>
+                <a:ea typeface="Trebuchet MS" pitchFamily="34" charset="-122"/>
+                <a:cs typeface="Trebuchet MS" pitchFamily="34" charset="-120"/>
+              </a:rPr>
+              <a:t>ly</a:t>
+            </a:r>
+            <a:endParaRPr lang="en-US" sz="1300" dirty="0"/>
+          </a:p>
+        </p:txBody>
+      </p:sp>
+      <p:sp>
+        <p:nvSpPr>
+          <p:cNvPr id="27" name="Text 25"/>
+          <p:cNvSpPr/>
+          <p:nvPr/>
+        </p:nvSpPr>
+        <p:spPr>
+          <a:xfrm>
+            <a:off x="6998818" y="2569464"/>
+            <a:ext cx="1581912" cy="201168"/>
+          </a:xfrm>
+          <a:prstGeom prst="rect">
+            <a:avLst/>
+          </a:prstGeom>
+          <a:noFill/>
+          <a:ln/>
+        </p:spPr>
+        <p:txBody>
+          <a:bodyPr wrap="square" lIns="0" tIns="0" rIns="0" bIns="0" rtlCol="0" anchor="t"/>
+          <a:lstStyle/>
+          <a:p>
+            <a:pPr algn="ctr" indent="0" marL="0">
+              <a:buNone/>
+            </a:pPr>
+            <a:r>
+              <a:rPr lang="en-US" sz="850" dirty="0">
+                <a:solidFill>
+                  <a:srgbClr val="475569"/>
+                </a:solidFill>
+                <a:latin typeface="Calibri" pitchFamily="34" charset="0"/>
+                <a:ea typeface="Calibri" pitchFamily="34" charset="-122"/>
+                <a:cs typeface="Calibri" pitchFamily="34" charset="-120"/>
+              </a:rPr>
+              <a:t>in a way that is</a:t>
+            </a:r>
+            <a:endParaRPr lang="en-US" sz="850" dirty="0"/>
+          </a:p>
+        </p:txBody>
+      </p:sp>
+      <p:sp>
+        <p:nvSpPr>
+          <p:cNvPr id="28" name="Shape 26"/>
           <p:cNvSpPr/>
           <p:nvPr/>
         </p:nvSpPr>
@@ -32067,7 +32767,7 @@
       </p:sp>
       <p:sp>
         <p:nvSpPr>
-          <p:cNvPr id="26" name="Text 24"/>
+          <p:cNvPr id="29" name="Text 27"/>
           <p:cNvSpPr/>
           <p:nvPr/>
         </p:nvSpPr>
@@ -32106,7 +32806,7 @@
       </p:sp>
       <p:sp>
         <p:nvSpPr>
-          <p:cNvPr id="27" name="Shape 25"/>
+          <p:cNvPr id="30" name="Shape 28"/>
           <p:cNvSpPr/>
           <p:nvPr/>
         </p:nvSpPr>
@@ -32133,7 +32833,7 @@
       </p:sp>
       <p:sp>
         <p:nvSpPr>
-          <p:cNvPr id="28" name="Text 26"/>
+          <p:cNvPr id="31" name="Text 29"/>
           <p:cNvSpPr/>
           <p:nvPr/>
         </p:nvSpPr>
@@ -32172,7 +32872,7 @@
       </p:sp>
       <p:sp>
         <p:nvSpPr>
-          <p:cNvPr id="29" name="Shape 27"/>
+          <p:cNvPr id="32" name="Shape 30"/>
           <p:cNvSpPr/>
           <p:nvPr/>
         </p:nvSpPr>
@@ -32199,7 +32899,7 @@
       </p:sp>
       <p:sp>
         <p:nvSpPr>
-          <p:cNvPr id="30" name="Text 28"/>
+          <p:cNvPr id="33" name="Text 31"/>
           <p:cNvSpPr/>
           <p:nvPr/>
         </p:nvSpPr>
@@ -32238,7 +32938,7 @@
       </p:sp>
       <p:sp>
         <p:nvSpPr>
-          <p:cNvPr id="31" name="Shape 29"/>
+          <p:cNvPr id="34" name="Shape 32"/>
           <p:cNvSpPr/>
           <p:nvPr/>
         </p:nvSpPr>
@@ -32265,7 +32965,7 @@
       </p:sp>
       <p:sp>
         <p:nvSpPr>
-          <p:cNvPr id="32" name="Text 30"/>
+          <p:cNvPr id="35" name="Text 33"/>
           <p:cNvSpPr/>
           <p:nvPr/>
         </p:nvSpPr>
@@ -32727,7 +33427,7 @@
                 <a:ea typeface="Trebuchet MS" pitchFamily="34" charset="-122"/>
                 <a:cs typeface="Trebuchet MS" pitchFamily="34" charset="-120"/>
               </a:rPr>
-              <a:t>expectations</a:t>
+              <a:t>unexpectedly</a:t>
             </a:r>
             <a:endParaRPr lang="en-US" sz="2800" dirty="0"/>
           </a:p>
@@ -32807,8 +33507,8 @@
         </p:nvSpPr>
         <p:spPr>
           <a:xfrm>
-            <a:off x="2221992" y="2258568"/>
-            <a:ext cx="1828800" cy="292608"/>
+            <a:off x="1989734" y="2258568"/>
+            <a:ext cx="1581912" cy="292608"/>
           </a:xfrm>
           <a:prstGeom prst="rect">
             <a:avLst>
@@ -32816,11 +33516,11 @@
             </a:avLst>
           </a:prstGeom>
           <a:solidFill>
-            <a:srgbClr val="CCFBF1"/>
+            <a:srgbClr val="DDD6FE"/>
           </a:solidFill>
           <a:ln w="19050">
             <a:solidFill>
-              <a:srgbClr val="0D9488"/>
+              <a:srgbClr val="7C3AED"/>
             </a:solidFill>
             <a:prstDash val="solid"/>
           </a:ln>
@@ -32841,8 +33541,8 @@
         </p:nvSpPr>
         <p:spPr>
           <a:xfrm>
-            <a:off x="2221992" y="2258568"/>
-            <a:ext cx="1828800" cy="292608"/>
+            <a:off x="1989734" y="2258568"/>
+            <a:ext cx="1581912" cy="292608"/>
           </a:xfrm>
           <a:prstGeom prst="rect">
             <a:avLst/>
@@ -32860,13 +33560,13 @@
             <a:r>
               <a:rPr lang="en-US" sz="1300" b="1" dirty="0">
                 <a:solidFill>
-                  <a:srgbClr val="0F766E"/>
+                  <a:srgbClr val="4C1D95"/>
                 </a:solidFill>
                 <a:latin typeface="Trebuchet MS" pitchFamily="34" charset="0"/>
                 <a:ea typeface="Trebuchet MS" pitchFamily="34" charset="-122"/>
                 <a:cs typeface="Trebuchet MS" pitchFamily="34" charset="-120"/>
               </a:rPr>
-              <a:t>expect</a:t>
+              <a:t>un</a:t>
             </a:r>
             <a:endParaRPr lang="en-US" sz="1300" dirty="0"/>
           </a:p>
@@ -32880,8 +33580,8 @@
         </p:nvSpPr>
         <p:spPr>
           <a:xfrm>
-            <a:off x="2221992" y="2569464"/>
-            <a:ext cx="1828800" cy="201168"/>
+            <a:off x="1989734" y="2569464"/>
+            <a:ext cx="1581912" cy="201168"/>
           </a:xfrm>
           <a:prstGeom prst="rect">
             <a:avLst/>
@@ -32905,7 +33605,7 @@
                 <a:ea typeface="Calibri" pitchFamily="34" charset="-122"/>
                 <a:cs typeface="Calibri" pitchFamily="34" charset="-120"/>
               </a:rPr>
-              <a:t>to look forward, await</a:t>
+              <a:t>not</a:t>
             </a:r>
             <a:endParaRPr lang="en-US" sz="850" dirty="0"/>
           </a:p>
@@ -32919,8 +33619,8 @@
         </p:nvSpPr>
         <p:spPr>
           <a:xfrm>
-            <a:off x="4370832" y="2258568"/>
-            <a:ext cx="1828800" cy="292608"/>
+            <a:off x="3659429" y="2258568"/>
+            <a:ext cx="1581912" cy="292608"/>
           </a:xfrm>
           <a:prstGeom prst="rect">
             <a:avLst>
@@ -32928,11 +33628,11 @@
             </a:avLst>
           </a:prstGeom>
           <a:solidFill>
-            <a:srgbClr val="FCE7F3"/>
+            <a:srgbClr val="CCFBF1"/>
           </a:solidFill>
           <a:ln w="19050">
             <a:solidFill>
-              <a:srgbClr val="DB2777"/>
+              <a:srgbClr val="0D9488"/>
             </a:solidFill>
             <a:prstDash val="solid"/>
           </a:ln>
@@ -32953,8 +33653,8 @@
         </p:nvSpPr>
         <p:spPr>
           <a:xfrm>
-            <a:off x="4370832" y="2258568"/>
-            <a:ext cx="1828800" cy="292608"/>
+            <a:off x="3659429" y="2258568"/>
+            <a:ext cx="1581912" cy="292608"/>
           </a:xfrm>
           <a:prstGeom prst="rect">
             <a:avLst/>
@@ -32972,13 +33672,13 @@
             <a:r>
               <a:rPr lang="en-US" sz="1300" b="1" dirty="0">
                 <a:solidFill>
-                  <a:srgbClr val="9D174D"/>
+                  <a:srgbClr val="0F766E"/>
                 </a:solidFill>
                 <a:latin typeface="Trebuchet MS" pitchFamily="34" charset="0"/>
                 <a:ea typeface="Trebuchet MS" pitchFamily="34" charset="-122"/>
                 <a:cs typeface="Trebuchet MS" pitchFamily="34" charset="-120"/>
               </a:rPr>
-              <a:t>ation</a:t>
+              <a:t>expect</a:t>
             </a:r>
             <a:endParaRPr lang="en-US" sz="1300" dirty="0"/>
           </a:p>
@@ -32992,8 +33692,8 @@
         </p:nvSpPr>
         <p:spPr>
           <a:xfrm>
-            <a:off x="4370832" y="2569464"/>
-            <a:ext cx="1828800" cy="201168"/>
+            <a:off x="3659429" y="2569464"/>
+            <a:ext cx="1581912" cy="201168"/>
           </a:xfrm>
           <a:prstGeom prst="rect">
             <a:avLst/>
@@ -33017,7 +33717,7 @@
                 <a:ea typeface="Calibri" pitchFamily="34" charset="-122"/>
                 <a:cs typeface="Calibri" pitchFamily="34" charset="-120"/>
               </a:rPr>
-              <a:t>the act or state of</a:t>
+              <a:t>to look forward, await</a:t>
             </a:r>
             <a:endParaRPr lang="en-US" sz="850" dirty="0"/>
           </a:p>
@@ -33031,8 +33731,8 @@
         </p:nvSpPr>
         <p:spPr>
           <a:xfrm>
-            <a:off x="6519672" y="2258568"/>
-            <a:ext cx="1828800" cy="292608"/>
+            <a:off x="5329123" y="2258568"/>
+            <a:ext cx="1581912" cy="292608"/>
           </a:xfrm>
           <a:prstGeom prst="rect">
             <a:avLst>
@@ -33065,8 +33765,8 @@
         </p:nvSpPr>
         <p:spPr>
           <a:xfrm>
-            <a:off x="6519672" y="2258568"/>
-            <a:ext cx="1828800" cy="292608"/>
+            <a:off x="5329123" y="2258568"/>
+            <a:ext cx="1581912" cy="292608"/>
           </a:xfrm>
           <a:prstGeom prst="rect">
             <a:avLst/>
@@ -33090,7 +33790,7 @@
                 <a:ea typeface="Trebuchet MS" pitchFamily="34" charset="-122"/>
                 <a:cs typeface="Trebuchet MS" pitchFamily="34" charset="-120"/>
               </a:rPr>
-              <a:t>s</a:t>
+              <a:t>ed</a:t>
             </a:r>
             <a:endParaRPr lang="en-US" sz="1300" dirty="0"/>
           </a:p>
@@ -33104,8 +33804,8 @@
         </p:nvSpPr>
         <p:spPr>
           <a:xfrm>
-            <a:off x="6519672" y="2569464"/>
-            <a:ext cx="1828800" cy="201168"/>
+            <a:off x="5329123" y="2569464"/>
+            <a:ext cx="1581912" cy="201168"/>
           </a:xfrm>
           <a:prstGeom prst="rect">
             <a:avLst/>
@@ -33129,7 +33829,7 @@
                 <a:ea typeface="Calibri" pitchFamily="34" charset="-122"/>
                 <a:cs typeface="Calibri" pitchFamily="34" charset="-120"/>
               </a:rPr>
-              <a:t>more than one</a:t>
+              <a:t>past tense, having been</a:t>
             </a:r>
             <a:endParaRPr lang="en-US" sz="850" dirty="0"/>
           </a:p>
@@ -33138,6 +33838,118 @@
       <p:sp>
         <p:nvSpPr>
           <p:cNvPr id="25" name="Shape 23"/>
+          <p:cNvSpPr/>
+          <p:nvPr/>
+        </p:nvSpPr>
+        <p:spPr>
+          <a:xfrm>
+            <a:off x="6998818" y="2258568"/>
+            <a:ext cx="1581912" cy="292608"/>
+          </a:xfrm>
+          <a:prstGeom prst="rect">
+            <a:avLst>
+              <a:gd name="adj" fmla="val 25000"/>
+            </a:avLst>
+          </a:prstGeom>
+          <a:solidFill>
+            <a:srgbClr val="FCE7F3"/>
+          </a:solidFill>
+          <a:ln w="19050">
+            <a:solidFill>
+              <a:srgbClr val="DB2777"/>
+            </a:solidFill>
+            <a:prstDash val="solid"/>
+          </a:ln>
+          <a:effectLst>
+            <a:outerShdw sx="100000" sy="100000" kx="0" ky="0" algn="bl" rotWithShape="0" blurRad="101600" dist="38100" dir="8100000">
+              <a:srgbClr val="000000">
+                <a:alpha val="12000"/>
+              </a:srgbClr>
+            </a:outerShdw>
+          </a:effectLst>
+        </p:spPr>
+      </p:sp>
+      <p:sp>
+        <p:nvSpPr>
+          <p:cNvPr id="26" name="Text 24"/>
+          <p:cNvSpPr/>
+          <p:nvPr/>
+        </p:nvSpPr>
+        <p:spPr>
+          <a:xfrm>
+            <a:off x="6998818" y="2258568"/>
+            <a:ext cx="1581912" cy="292608"/>
+          </a:xfrm>
+          <a:prstGeom prst="rect">
+            <a:avLst/>
+          </a:prstGeom>
+          <a:noFill/>
+          <a:ln/>
+        </p:spPr>
+        <p:txBody>
+          <a:bodyPr wrap="square" lIns="0" tIns="0" rIns="0" bIns="0" rtlCol="0" anchor="ctr"/>
+          <a:lstStyle/>
+          <a:p>
+            <a:pPr algn="ctr" indent="0" marL="0">
+              <a:buNone/>
+            </a:pPr>
+            <a:r>
+              <a:rPr lang="en-US" sz="1300" b="1" dirty="0">
+                <a:solidFill>
+                  <a:srgbClr val="9D174D"/>
+                </a:solidFill>
+                <a:latin typeface="Trebuchet MS" pitchFamily="34" charset="0"/>
+                <a:ea typeface="Trebuchet MS" pitchFamily="34" charset="-122"/>
+                <a:cs typeface="Trebuchet MS" pitchFamily="34" charset="-120"/>
+              </a:rPr>
+              <a:t>ly</a:t>
+            </a:r>
+            <a:endParaRPr lang="en-US" sz="1300" dirty="0"/>
+          </a:p>
+        </p:txBody>
+      </p:sp>
+      <p:sp>
+        <p:nvSpPr>
+          <p:cNvPr id="27" name="Text 25"/>
+          <p:cNvSpPr/>
+          <p:nvPr/>
+        </p:nvSpPr>
+        <p:spPr>
+          <a:xfrm>
+            <a:off x="6998818" y="2569464"/>
+            <a:ext cx="1581912" cy="201168"/>
+          </a:xfrm>
+          <a:prstGeom prst="rect">
+            <a:avLst/>
+          </a:prstGeom>
+          <a:noFill/>
+          <a:ln/>
+        </p:spPr>
+        <p:txBody>
+          <a:bodyPr wrap="square" lIns="0" tIns="0" rIns="0" bIns="0" rtlCol="0" anchor="t"/>
+          <a:lstStyle/>
+          <a:p>
+            <a:pPr algn="ctr" indent="0" marL="0">
+              <a:buNone/>
+            </a:pPr>
+            <a:r>
+              <a:rPr lang="en-US" sz="850" dirty="0">
+                <a:solidFill>
+                  <a:srgbClr val="475569"/>
+                </a:solidFill>
+                <a:latin typeface="Calibri" pitchFamily="34" charset="0"/>
+                <a:ea typeface="Calibri" pitchFamily="34" charset="-122"/>
+                <a:cs typeface="Calibri" pitchFamily="34" charset="-120"/>
+              </a:rPr>
+              <a:t>in a way that is</a:t>
+            </a:r>
+            <a:endParaRPr lang="en-US" sz="850" dirty="0"/>
+          </a:p>
+        </p:txBody>
+      </p:sp>
+      <p:sp>
+        <p:nvSpPr>
+          <p:cNvPr id="28" name="Shape 26"/>
           <p:cNvSpPr/>
           <p:nvPr/>
         </p:nvSpPr>
@@ -33164,7 +33976,7 @@
       </p:sp>
       <p:sp>
         <p:nvSpPr>
-          <p:cNvPr id="26" name="Text 24"/>
+          <p:cNvPr id="29" name="Text 27"/>
           <p:cNvSpPr/>
           <p:nvPr/>
         </p:nvSpPr>
@@ -33203,7 +34015,7 @@
       </p:sp>
       <p:sp>
         <p:nvSpPr>
-          <p:cNvPr id="27" name="Shape 25"/>
+          <p:cNvPr id="30" name="Shape 28"/>
           <p:cNvSpPr/>
           <p:nvPr/>
         </p:nvSpPr>
@@ -33230,14 +34042,14 @@
       </p:sp>
       <p:sp>
         <p:nvSpPr>
-          <p:cNvPr id="28" name="Shape 26"/>
-          <p:cNvSpPr/>
-          <p:nvPr/>
-        </p:nvSpPr>
-        <p:spPr>
-          <a:xfrm>
-            <a:off x="1975104" y="3364992"/>
-            <a:ext cx="1554480" cy="475488"/>
+          <p:cNvPr id="31" name="Shape 29"/>
+          <p:cNvSpPr/>
+          <p:nvPr/>
+        </p:nvSpPr>
+        <p:spPr>
+          <a:xfrm>
+            <a:off x="1978152" y="3364992"/>
+            <a:ext cx="1225296" cy="475488"/>
           </a:xfrm>
           <a:prstGeom prst="rect">
             <a:avLst>
@@ -33257,14 +34069,14 @@
       </p:sp>
       <p:sp>
         <p:nvSpPr>
-          <p:cNvPr id="29" name="Text 27"/>
-          <p:cNvSpPr/>
-          <p:nvPr/>
-        </p:nvSpPr>
-        <p:spPr>
-          <a:xfrm>
-            <a:off x="1975104" y="3364992"/>
-            <a:ext cx="1554480" cy="475488"/>
+          <p:cNvPr id="32" name="Text 30"/>
+          <p:cNvSpPr/>
+          <p:nvPr/>
+        </p:nvSpPr>
+        <p:spPr>
+          <a:xfrm>
+            <a:off x="1978152" y="3364992"/>
+            <a:ext cx="1225296" cy="475488"/>
           </a:xfrm>
           <a:prstGeom prst="rect">
             <a:avLst/>
@@ -33288,7 +34100,7 @@
                 <a:ea typeface="Trebuchet MS" pitchFamily="34" charset="-122"/>
                 <a:cs typeface="Trebuchet MS" pitchFamily="34" charset="-120"/>
               </a:rPr>
-              <a:t>ex</a:t>
+              <a:t>un</a:t>
             </a:r>
             <a:endParaRPr lang="en-US" sz="1400" dirty="0"/>
           </a:p>
@@ -33296,14 +34108,14 @@
       </p:sp>
       <p:sp>
         <p:nvSpPr>
-          <p:cNvPr id="30" name="Text 28"/>
-          <p:cNvSpPr/>
-          <p:nvPr/>
-        </p:nvSpPr>
-        <p:spPr>
-          <a:xfrm>
-            <a:off x="3529584" y="3364992"/>
-            <a:ext cx="73152" cy="475488"/>
+          <p:cNvPr id="33" name="Text 31"/>
+          <p:cNvSpPr/>
+          <p:nvPr/>
+        </p:nvSpPr>
+        <p:spPr>
+          <a:xfrm>
+            <a:off x="3203448" y="3364992"/>
+            <a:ext cx="76200" cy="475488"/>
           </a:xfrm>
           <a:prstGeom prst="rect">
             <a:avLst/>
@@ -33335,14 +34147,14 @@
       </p:sp>
       <p:sp>
         <p:nvSpPr>
-          <p:cNvPr id="31" name="Shape 29"/>
-          <p:cNvSpPr/>
-          <p:nvPr/>
-        </p:nvSpPr>
-        <p:spPr>
-          <a:xfrm>
-            <a:off x="3602736" y="3364992"/>
-            <a:ext cx="1554480" cy="475488"/>
+          <p:cNvPr id="34" name="Shape 32"/>
+          <p:cNvSpPr/>
+          <p:nvPr/>
+        </p:nvSpPr>
+        <p:spPr>
+          <a:xfrm>
+            <a:off x="3279648" y="3364992"/>
+            <a:ext cx="1225296" cy="475488"/>
           </a:xfrm>
           <a:prstGeom prst="rect">
             <a:avLst>
@@ -33362,14 +34174,14 @@
       </p:sp>
       <p:sp>
         <p:nvSpPr>
-          <p:cNvPr id="32" name="Text 30"/>
-          <p:cNvSpPr/>
-          <p:nvPr/>
-        </p:nvSpPr>
-        <p:spPr>
-          <a:xfrm>
-            <a:off x="3602736" y="3364992"/>
-            <a:ext cx="1554480" cy="475488"/>
+          <p:cNvPr id="35" name="Text 33"/>
+          <p:cNvSpPr/>
+          <p:nvPr/>
+        </p:nvSpPr>
+        <p:spPr>
+          <a:xfrm>
+            <a:off x="3279648" y="3364992"/>
+            <a:ext cx="1225296" cy="475488"/>
           </a:xfrm>
           <a:prstGeom prst="rect">
             <a:avLst/>
@@ -33393,7 +34205,7 @@
                 <a:ea typeface="Trebuchet MS" pitchFamily="34" charset="-122"/>
                 <a:cs typeface="Trebuchet MS" pitchFamily="34" charset="-120"/>
               </a:rPr>
-              <a:t>pec</a:t>
+              <a:t>ex</a:t>
             </a:r>
             <a:endParaRPr lang="en-US" sz="1400" dirty="0"/>
           </a:p>
@@ -33401,14 +34213,14 @@
       </p:sp>
       <p:sp>
         <p:nvSpPr>
-          <p:cNvPr id="33" name="Text 31"/>
-          <p:cNvSpPr/>
-          <p:nvPr/>
-        </p:nvSpPr>
-        <p:spPr>
-          <a:xfrm>
-            <a:off x="5157216" y="3364992"/>
-            <a:ext cx="73152" cy="475488"/>
+          <p:cNvPr id="36" name="Text 34"/>
+          <p:cNvSpPr/>
+          <p:nvPr/>
+        </p:nvSpPr>
+        <p:spPr>
+          <a:xfrm>
+            <a:off x="4504944" y="3364992"/>
+            <a:ext cx="76200" cy="475488"/>
           </a:xfrm>
           <a:prstGeom prst="rect">
             <a:avLst/>
@@ -33440,14 +34252,14 @@
       </p:sp>
       <p:sp>
         <p:nvSpPr>
-          <p:cNvPr id="34" name="Shape 32"/>
-          <p:cNvSpPr/>
-          <p:nvPr/>
-        </p:nvSpPr>
-        <p:spPr>
-          <a:xfrm>
-            <a:off x="5230368" y="3364992"/>
-            <a:ext cx="1554480" cy="475488"/>
+          <p:cNvPr id="37" name="Shape 35"/>
+          <p:cNvSpPr/>
+          <p:nvPr/>
+        </p:nvSpPr>
+        <p:spPr>
+          <a:xfrm>
+            <a:off x="4581144" y="3364992"/>
+            <a:ext cx="1225296" cy="475488"/>
           </a:xfrm>
           <a:prstGeom prst="rect">
             <a:avLst>
@@ -33467,14 +34279,14 @@
       </p:sp>
       <p:sp>
         <p:nvSpPr>
-          <p:cNvPr id="35" name="Text 33"/>
-          <p:cNvSpPr/>
-          <p:nvPr/>
-        </p:nvSpPr>
-        <p:spPr>
-          <a:xfrm>
-            <a:off x="5230368" y="3364992"/>
-            <a:ext cx="1554480" cy="475488"/>
+          <p:cNvPr id="38" name="Text 36"/>
+          <p:cNvSpPr/>
+          <p:nvPr/>
+        </p:nvSpPr>
+        <p:spPr>
+          <a:xfrm>
+            <a:off x="4581144" y="3364992"/>
+            <a:ext cx="1225296" cy="475488"/>
           </a:xfrm>
           <a:prstGeom prst="rect">
             <a:avLst/>
@@ -33498,7 +34310,7 @@
                 <a:ea typeface="Trebuchet MS" pitchFamily="34" charset="-122"/>
                 <a:cs typeface="Trebuchet MS" pitchFamily="34" charset="-120"/>
               </a:rPr>
-              <a:t>ta</a:t>
+              <a:t>pec</a:t>
             </a:r>
             <a:endParaRPr lang="en-US" sz="1400" dirty="0"/>
           </a:p>
@@ -33506,14 +34318,14 @@
       </p:sp>
       <p:sp>
         <p:nvSpPr>
-          <p:cNvPr id="36" name="Text 34"/>
-          <p:cNvSpPr/>
-          <p:nvPr/>
-        </p:nvSpPr>
-        <p:spPr>
-          <a:xfrm>
-            <a:off x="6784848" y="3364992"/>
-            <a:ext cx="73152" cy="475488"/>
+          <p:cNvPr id="39" name="Text 37"/>
+          <p:cNvSpPr/>
+          <p:nvPr/>
+        </p:nvSpPr>
+        <p:spPr>
+          <a:xfrm>
+            <a:off x="5806440" y="3364992"/>
+            <a:ext cx="76200" cy="475488"/>
           </a:xfrm>
           <a:prstGeom prst="rect">
             <a:avLst/>
@@ -33545,14 +34357,14 @@
       </p:sp>
       <p:sp>
         <p:nvSpPr>
-          <p:cNvPr id="37" name="Shape 35"/>
-          <p:cNvSpPr/>
-          <p:nvPr/>
-        </p:nvSpPr>
-        <p:spPr>
-          <a:xfrm>
-            <a:off x="6858000" y="3364992"/>
-            <a:ext cx="1554480" cy="475488"/>
+          <p:cNvPr id="40" name="Shape 38"/>
+          <p:cNvSpPr/>
+          <p:nvPr/>
+        </p:nvSpPr>
+        <p:spPr>
+          <a:xfrm>
+            <a:off x="5882640" y="3364992"/>
+            <a:ext cx="1225296" cy="475488"/>
           </a:xfrm>
           <a:prstGeom prst="rect">
             <a:avLst>
@@ -33572,14 +34384,14 @@
       </p:sp>
       <p:sp>
         <p:nvSpPr>
-          <p:cNvPr id="38" name="Text 36"/>
-          <p:cNvSpPr/>
-          <p:nvPr/>
-        </p:nvSpPr>
-        <p:spPr>
-          <a:xfrm>
-            <a:off x="6858000" y="3364992"/>
-            <a:ext cx="1554480" cy="475488"/>
+          <p:cNvPr id="41" name="Text 39"/>
+          <p:cNvSpPr/>
+          <p:nvPr/>
+        </p:nvSpPr>
+        <p:spPr>
+          <a:xfrm>
+            <a:off x="5882640" y="3364992"/>
+            <a:ext cx="1225296" cy="475488"/>
           </a:xfrm>
           <a:prstGeom prst="rect">
             <a:avLst/>
@@ -33603,7 +34415,7 @@
                 <a:ea typeface="Trebuchet MS" pitchFamily="34" charset="-122"/>
                 <a:cs typeface="Trebuchet MS" pitchFamily="34" charset="-120"/>
               </a:rPr>
-              <a:t>tions</a:t>
+              <a:t>ted</a:t>
             </a:r>
             <a:endParaRPr lang="en-US" sz="1400" dirty="0"/>
           </a:p>
@@ -33611,7 +34423,112 @@
       </p:sp>
       <p:sp>
         <p:nvSpPr>
-          <p:cNvPr id="39" name="Shape 37"/>
+          <p:cNvPr id="42" name="Text 40"/>
+          <p:cNvSpPr/>
+          <p:nvPr/>
+        </p:nvSpPr>
+        <p:spPr>
+          <a:xfrm>
+            <a:off x="7107936" y="3364992"/>
+            <a:ext cx="76200" cy="475488"/>
+          </a:xfrm>
+          <a:prstGeom prst="rect">
+            <a:avLst/>
+          </a:prstGeom>
+          <a:noFill/>
+          <a:ln/>
+        </p:spPr>
+        <p:txBody>
+          <a:bodyPr wrap="square" lIns="0" tIns="0" rIns="0" bIns="0" rtlCol="0" anchor="ctr"/>
+          <a:lstStyle/>
+          <a:p>
+            <a:pPr algn="ctr" indent="0" marL="0">
+              <a:buNone/>
+            </a:pPr>
+            <a:r>
+              <a:rPr lang="en-US" sz="1600" b="1" dirty="0">
+                <a:solidFill>
+                  <a:srgbClr val="0D9488"/>
+                </a:solidFill>
+                <a:latin typeface="Trebuchet MS" pitchFamily="34" charset="0"/>
+                <a:ea typeface="Trebuchet MS" pitchFamily="34" charset="-122"/>
+                <a:cs typeface="Trebuchet MS" pitchFamily="34" charset="-120"/>
+              </a:rPr>
+              <a:t>·</a:t>
+            </a:r>
+            <a:endParaRPr lang="en-US" sz="1600" dirty="0"/>
+          </a:p>
+        </p:txBody>
+      </p:sp>
+      <p:sp>
+        <p:nvSpPr>
+          <p:cNvPr id="43" name="Shape 41"/>
+          <p:cNvSpPr/>
+          <p:nvPr/>
+        </p:nvSpPr>
+        <p:spPr>
+          <a:xfrm>
+            <a:off x="7184136" y="3364992"/>
+            <a:ext cx="1225296" cy="475488"/>
+          </a:xfrm>
+          <a:prstGeom prst="rect">
+            <a:avLst>
+              <a:gd name="adj" fmla="val 9615"/>
+            </a:avLst>
+          </a:prstGeom>
+          <a:solidFill>
+            <a:srgbClr val="FFFFFF"/>
+          </a:solidFill>
+          <a:ln w="12700">
+            <a:solidFill>
+              <a:srgbClr val="0D9488"/>
+            </a:solidFill>
+            <a:prstDash val="solid"/>
+          </a:ln>
+        </p:spPr>
+      </p:sp>
+      <p:sp>
+        <p:nvSpPr>
+          <p:cNvPr id="44" name="Text 42"/>
+          <p:cNvSpPr/>
+          <p:nvPr/>
+        </p:nvSpPr>
+        <p:spPr>
+          <a:xfrm>
+            <a:off x="7184136" y="3364992"/>
+            <a:ext cx="1225296" cy="475488"/>
+          </a:xfrm>
+          <a:prstGeom prst="rect">
+            <a:avLst/>
+          </a:prstGeom>
+          <a:noFill/>
+          <a:ln/>
+        </p:spPr>
+        <p:txBody>
+          <a:bodyPr wrap="square" lIns="0" tIns="0" rIns="0" bIns="0" rtlCol="0" anchor="ctr"/>
+          <a:lstStyle/>
+          <a:p>
+            <a:pPr algn="ctr" indent="0" marL="0">
+              <a:buNone/>
+            </a:pPr>
+            <a:r>
+              <a:rPr lang="en-US" sz="1400" b="1" dirty="0">
+                <a:solidFill>
+                  <a:srgbClr val="0D9488"/>
+                </a:solidFill>
+                <a:latin typeface="Trebuchet MS" pitchFamily="34" charset="0"/>
+                <a:ea typeface="Trebuchet MS" pitchFamily="34" charset="-122"/>
+                <a:cs typeface="Trebuchet MS" pitchFamily="34" charset="-120"/>
+              </a:rPr>
+              <a:t>ly</a:t>
+            </a:r>
+            <a:endParaRPr lang="en-US" sz="1400" dirty="0"/>
+          </a:p>
+        </p:txBody>
+      </p:sp>
+      <p:sp>
+        <p:nvSpPr>
+          <p:cNvPr id="45" name="Shape 43"/>
           <p:cNvSpPr/>
           <p:nvPr/>
         </p:nvSpPr>
@@ -33638,7 +34555,7 @@
       </p:sp>
       <p:sp>
         <p:nvSpPr>
-          <p:cNvPr id="40" name="Text 38"/>
+          <p:cNvPr id="46" name="Text 44"/>
           <p:cNvSpPr/>
           <p:nvPr/>
         </p:nvSpPr>
@@ -33677,7 +34594,7 @@
       </p:sp>
       <p:sp>
         <p:nvSpPr>
-          <p:cNvPr id="41" name="Shape 39"/>
+          <p:cNvPr id="47" name="Shape 45"/>
           <p:cNvSpPr/>
           <p:nvPr/>
         </p:nvSpPr>
@@ -33704,7 +34621,7 @@
       </p:sp>
       <p:sp>
         <p:nvSpPr>
-          <p:cNvPr id="42" name="Text 40"/>
+          <p:cNvPr id="48" name="Text 46"/>
           <p:cNvSpPr/>
           <p:nvPr/>
         </p:nvSpPr>
@@ -34166,7 +35083,7 @@
                 <a:ea typeface="Trebuchet MS" pitchFamily="34" charset="-122"/>
                 <a:cs typeface="Trebuchet MS" pitchFamily="34" charset="-120"/>
               </a:rPr>
-              <a:t>expectations</a:t>
+              <a:t>unexpectedly</a:t>
             </a:r>
             <a:endParaRPr lang="en-US" sz="2800" dirty="0"/>
           </a:p>
@@ -34246,8 +35163,8 @@
         </p:nvSpPr>
         <p:spPr>
           <a:xfrm>
-            <a:off x="2221992" y="2258568"/>
-            <a:ext cx="1828800" cy="292608"/>
+            <a:off x="1989734" y="2258568"/>
+            <a:ext cx="1581912" cy="292608"/>
           </a:xfrm>
           <a:prstGeom prst="rect">
             <a:avLst>
@@ -34255,11 +35172,11 @@
             </a:avLst>
           </a:prstGeom>
           <a:solidFill>
-            <a:srgbClr val="CCFBF1"/>
+            <a:srgbClr val="DDD6FE"/>
           </a:solidFill>
           <a:ln w="19050">
             <a:solidFill>
-              <a:srgbClr val="0D9488"/>
+              <a:srgbClr val="7C3AED"/>
             </a:solidFill>
             <a:prstDash val="solid"/>
           </a:ln>
@@ -34280,8 +35197,8 @@
         </p:nvSpPr>
         <p:spPr>
           <a:xfrm>
-            <a:off x="2221992" y="2258568"/>
-            <a:ext cx="1828800" cy="292608"/>
+            <a:off x="1989734" y="2258568"/>
+            <a:ext cx="1581912" cy="292608"/>
           </a:xfrm>
           <a:prstGeom prst="rect">
             <a:avLst/>
@@ -34299,13 +35216,13 @@
             <a:r>
               <a:rPr lang="en-US" sz="1300" b="1" dirty="0">
                 <a:solidFill>
-                  <a:srgbClr val="0F766E"/>
+                  <a:srgbClr val="4C1D95"/>
                 </a:solidFill>
                 <a:latin typeface="Trebuchet MS" pitchFamily="34" charset="0"/>
                 <a:ea typeface="Trebuchet MS" pitchFamily="34" charset="-122"/>
                 <a:cs typeface="Trebuchet MS" pitchFamily="34" charset="-120"/>
               </a:rPr>
-              <a:t>expect</a:t>
+              <a:t>un</a:t>
             </a:r>
             <a:endParaRPr lang="en-US" sz="1300" dirty="0"/>
           </a:p>
@@ -34319,8 +35236,8 @@
         </p:nvSpPr>
         <p:spPr>
           <a:xfrm>
-            <a:off x="2221992" y="2569464"/>
-            <a:ext cx="1828800" cy="201168"/>
+            <a:off x="1989734" y="2569464"/>
+            <a:ext cx="1581912" cy="201168"/>
           </a:xfrm>
           <a:prstGeom prst="rect">
             <a:avLst/>
@@ -34344,7 +35261,7 @@
                 <a:ea typeface="Calibri" pitchFamily="34" charset="-122"/>
                 <a:cs typeface="Calibri" pitchFamily="34" charset="-120"/>
               </a:rPr>
-              <a:t>to look forward, await</a:t>
+              <a:t>not</a:t>
             </a:r>
             <a:endParaRPr lang="en-US" sz="850" dirty="0"/>
           </a:p>
@@ -34358,8 +35275,8 @@
         </p:nvSpPr>
         <p:spPr>
           <a:xfrm>
-            <a:off x="4370832" y="2258568"/>
-            <a:ext cx="1828800" cy="292608"/>
+            <a:off x="3659429" y="2258568"/>
+            <a:ext cx="1581912" cy="292608"/>
           </a:xfrm>
           <a:prstGeom prst="rect">
             <a:avLst>
@@ -34367,11 +35284,11 @@
             </a:avLst>
           </a:prstGeom>
           <a:solidFill>
-            <a:srgbClr val="FCE7F3"/>
+            <a:srgbClr val="CCFBF1"/>
           </a:solidFill>
           <a:ln w="19050">
             <a:solidFill>
-              <a:srgbClr val="DB2777"/>
+              <a:srgbClr val="0D9488"/>
             </a:solidFill>
             <a:prstDash val="solid"/>
           </a:ln>
@@ -34392,8 +35309,8 @@
         </p:nvSpPr>
         <p:spPr>
           <a:xfrm>
-            <a:off x="4370832" y="2258568"/>
-            <a:ext cx="1828800" cy="292608"/>
+            <a:off x="3659429" y="2258568"/>
+            <a:ext cx="1581912" cy="292608"/>
           </a:xfrm>
           <a:prstGeom prst="rect">
             <a:avLst/>
@@ -34411,13 +35328,13 @@
             <a:r>
               <a:rPr lang="en-US" sz="1300" b="1" dirty="0">
                 <a:solidFill>
-                  <a:srgbClr val="9D174D"/>
+                  <a:srgbClr val="0F766E"/>
                 </a:solidFill>
                 <a:latin typeface="Trebuchet MS" pitchFamily="34" charset="0"/>
                 <a:ea typeface="Trebuchet MS" pitchFamily="34" charset="-122"/>
                 <a:cs typeface="Trebuchet MS" pitchFamily="34" charset="-120"/>
               </a:rPr>
-              <a:t>ation</a:t>
+              <a:t>expect</a:t>
             </a:r>
             <a:endParaRPr lang="en-US" sz="1300" dirty="0"/>
           </a:p>
@@ -34431,8 +35348,8 @@
         </p:nvSpPr>
         <p:spPr>
           <a:xfrm>
-            <a:off x="4370832" y="2569464"/>
-            <a:ext cx="1828800" cy="201168"/>
+            <a:off x="3659429" y="2569464"/>
+            <a:ext cx="1581912" cy="201168"/>
           </a:xfrm>
           <a:prstGeom prst="rect">
             <a:avLst/>
@@ -34456,7 +35373,7 @@
                 <a:ea typeface="Calibri" pitchFamily="34" charset="-122"/>
                 <a:cs typeface="Calibri" pitchFamily="34" charset="-120"/>
               </a:rPr>
-              <a:t>the act or state of</a:t>
+              <a:t>to look forward, await</a:t>
             </a:r>
             <a:endParaRPr lang="en-US" sz="850" dirty="0"/>
           </a:p>
@@ -34470,8 +35387,8 @@
         </p:nvSpPr>
         <p:spPr>
           <a:xfrm>
-            <a:off x="6519672" y="2258568"/>
-            <a:ext cx="1828800" cy="292608"/>
+            <a:off x="5329123" y="2258568"/>
+            <a:ext cx="1581912" cy="292608"/>
           </a:xfrm>
           <a:prstGeom prst="rect">
             <a:avLst>
@@ -34504,8 +35421,8 @@
         </p:nvSpPr>
         <p:spPr>
           <a:xfrm>
-            <a:off x="6519672" y="2258568"/>
-            <a:ext cx="1828800" cy="292608"/>
+            <a:off x="5329123" y="2258568"/>
+            <a:ext cx="1581912" cy="292608"/>
           </a:xfrm>
           <a:prstGeom prst="rect">
             <a:avLst/>
@@ -34529,7 +35446,7 @@
                 <a:ea typeface="Trebuchet MS" pitchFamily="34" charset="-122"/>
                 <a:cs typeface="Trebuchet MS" pitchFamily="34" charset="-120"/>
               </a:rPr>
-              <a:t>s</a:t>
+              <a:t>ed</a:t>
             </a:r>
             <a:endParaRPr lang="en-US" sz="1300" dirty="0"/>
           </a:p>
@@ -34543,8 +35460,8 @@
         </p:nvSpPr>
         <p:spPr>
           <a:xfrm>
-            <a:off x="6519672" y="2569464"/>
-            <a:ext cx="1828800" cy="201168"/>
+            <a:off x="5329123" y="2569464"/>
+            <a:ext cx="1581912" cy="201168"/>
           </a:xfrm>
           <a:prstGeom prst="rect">
             <a:avLst/>
@@ -34568,7 +35485,7 @@
                 <a:ea typeface="Calibri" pitchFamily="34" charset="-122"/>
                 <a:cs typeface="Calibri" pitchFamily="34" charset="-120"/>
               </a:rPr>
-              <a:t>more than one</a:t>
+              <a:t>past tense, having been</a:t>
             </a:r>
             <a:endParaRPr lang="en-US" sz="850" dirty="0"/>
           </a:p>
@@ -34577,6 +35494,118 @@
       <p:sp>
         <p:nvSpPr>
           <p:cNvPr id="25" name="Shape 23"/>
+          <p:cNvSpPr/>
+          <p:nvPr/>
+        </p:nvSpPr>
+        <p:spPr>
+          <a:xfrm>
+            <a:off x="6998818" y="2258568"/>
+            <a:ext cx="1581912" cy="292608"/>
+          </a:xfrm>
+          <a:prstGeom prst="rect">
+            <a:avLst>
+              <a:gd name="adj" fmla="val 25000"/>
+            </a:avLst>
+          </a:prstGeom>
+          <a:solidFill>
+            <a:srgbClr val="FCE7F3"/>
+          </a:solidFill>
+          <a:ln w="19050">
+            <a:solidFill>
+              <a:srgbClr val="DB2777"/>
+            </a:solidFill>
+            <a:prstDash val="solid"/>
+          </a:ln>
+          <a:effectLst>
+            <a:outerShdw sx="100000" sy="100000" kx="0" ky="0" algn="bl" rotWithShape="0" blurRad="101600" dist="38100" dir="8100000">
+              <a:srgbClr val="000000">
+                <a:alpha val="12000"/>
+              </a:srgbClr>
+            </a:outerShdw>
+          </a:effectLst>
+        </p:spPr>
+      </p:sp>
+      <p:sp>
+        <p:nvSpPr>
+          <p:cNvPr id="26" name="Text 24"/>
+          <p:cNvSpPr/>
+          <p:nvPr/>
+        </p:nvSpPr>
+        <p:spPr>
+          <a:xfrm>
+            <a:off x="6998818" y="2258568"/>
+            <a:ext cx="1581912" cy="292608"/>
+          </a:xfrm>
+          <a:prstGeom prst="rect">
+            <a:avLst/>
+          </a:prstGeom>
+          <a:noFill/>
+          <a:ln/>
+        </p:spPr>
+        <p:txBody>
+          <a:bodyPr wrap="square" lIns="0" tIns="0" rIns="0" bIns="0" rtlCol="0" anchor="ctr"/>
+          <a:lstStyle/>
+          <a:p>
+            <a:pPr algn="ctr" indent="0" marL="0">
+              <a:buNone/>
+            </a:pPr>
+            <a:r>
+              <a:rPr lang="en-US" sz="1300" b="1" dirty="0">
+                <a:solidFill>
+                  <a:srgbClr val="9D174D"/>
+                </a:solidFill>
+                <a:latin typeface="Trebuchet MS" pitchFamily="34" charset="0"/>
+                <a:ea typeface="Trebuchet MS" pitchFamily="34" charset="-122"/>
+                <a:cs typeface="Trebuchet MS" pitchFamily="34" charset="-120"/>
+              </a:rPr>
+              <a:t>ly</a:t>
+            </a:r>
+            <a:endParaRPr lang="en-US" sz="1300" dirty="0"/>
+          </a:p>
+        </p:txBody>
+      </p:sp>
+      <p:sp>
+        <p:nvSpPr>
+          <p:cNvPr id="27" name="Text 25"/>
+          <p:cNvSpPr/>
+          <p:nvPr/>
+        </p:nvSpPr>
+        <p:spPr>
+          <a:xfrm>
+            <a:off x="6998818" y="2569464"/>
+            <a:ext cx="1581912" cy="201168"/>
+          </a:xfrm>
+          <a:prstGeom prst="rect">
+            <a:avLst/>
+          </a:prstGeom>
+          <a:noFill/>
+          <a:ln/>
+        </p:spPr>
+        <p:txBody>
+          <a:bodyPr wrap="square" lIns="0" tIns="0" rIns="0" bIns="0" rtlCol="0" anchor="t"/>
+          <a:lstStyle/>
+          <a:p>
+            <a:pPr algn="ctr" indent="0" marL="0">
+              <a:buNone/>
+            </a:pPr>
+            <a:r>
+              <a:rPr lang="en-US" sz="850" dirty="0">
+                <a:solidFill>
+                  <a:srgbClr val="475569"/>
+                </a:solidFill>
+                <a:latin typeface="Calibri" pitchFamily="34" charset="0"/>
+                <a:ea typeface="Calibri" pitchFamily="34" charset="-122"/>
+                <a:cs typeface="Calibri" pitchFamily="34" charset="-120"/>
+              </a:rPr>
+              <a:t>in a way that is</a:t>
+            </a:r>
+            <a:endParaRPr lang="en-US" sz="850" dirty="0"/>
+          </a:p>
+        </p:txBody>
+      </p:sp>
+      <p:sp>
+        <p:nvSpPr>
+          <p:cNvPr id="28" name="Shape 26"/>
           <p:cNvSpPr/>
           <p:nvPr/>
         </p:nvSpPr>
@@ -34603,7 +35632,7 @@
       </p:sp>
       <p:sp>
         <p:nvSpPr>
-          <p:cNvPr id="26" name="Text 24"/>
+          <p:cNvPr id="29" name="Text 27"/>
           <p:cNvSpPr/>
           <p:nvPr/>
         </p:nvSpPr>
@@ -34642,7 +35671,7 @@
       </p:sp>
       <p:sp>
         <p:nvSpPr>
-          <p:cNvPr id="27" name="Shape 25"/>
+          <p:cNvPr id="30" name="Shape 28"/>
           <p:cNvSpPr/>
           <p:nvPr/>
         </p:nvSpPr>
@@ -34669,14 +35698,14 @@
       </p:sp>
       <p:sp>
         <p:nvSpPr>
-          <p:cNvPr id="28" name="Shape 26"/>
-          <p:cNvSpPr/>
-          <p:nvPr/>
-        </p:nvSpPr>
-        <p:spPr>
-          <a:xfrm>
-            <a:off x="1975104" y="3364992"/>
-            <a:ext cx="1554480" cy="475488"/>
+          <p:cNvPr id="31" name="Shape 29"/>
+          <p:cNvSpPr/>
+          <p:nvPr/>
+        </p:nvSpPr>
+        <p:spPr>
+          <a:xfrm>
+            <a:off x="1978152" y="3364992"/>
+            <a:ext cx="1225296" cy="475488"/>
           </a:xfrm>
           <a:prstGeom prst="rect">
             <a:avLst>
@@ -34696,14 +35725,14 @@
       </p:sp>
       <p:sp>
         <p:nvSpPr>
-          <p:cNvPr id="29" name="Text 27"/>
-          <p:cNvSpPr/>
-          <p:nvPr/>
-        </p:nvSpPr>
-        <p:spPr>
-          <a:xfrm>
-            <a:off x="1975104" y="3364992"/>
-            <a:ext cx="1554480" cy="475488"/>
+          <p:cNvPr id="32" name="Text 30"/>
+          <p:cNvSpPr/>
+          <p:nvPr/>
+        </p:nvSpPr>
+        <p:spPr>
+          <a:xfrm>
+            <a:off x="1978152" y="3364992"/>
+            <a:ext cx="1225296" cy="475488"/>
           </a:xfrm>
           <a:prstGeom prst="rect">
             <a:avLst/>
@@ -34727,7 +35756,7 @@
                 <a:ea typeface="Trebuchet MS" pitchFamily="34" charset="-122"/>
                 <a:cs typeface="Trebuchet MS" pitchFamily="34" charset="-120"/>
               </a:rPr>
-              <a:t>ex</a:t>
+              <a:t>un</a:t>
             </a:r>
             <a:endParaRPr lang="en-US" sz="1400" dirty="0"/>
           </a:p>
@@ -34735,14 +35764,14 @@
       </p:sp>
       <p:sp>
         <p:nvSpPr>
-          <p:cNvPr id="30" name="Text 28"/>
-          <p:cNvSpPr/>
-          <p:nvPr/>
-        </p:nvSpPr>
-        <p:spPr>
-          <a:xfrm>
-            <a:off x="3529584" y="3364992"/>
-            <a:ext cx="73152" cy="475488"/>
+          <p:cNvPr id="33" name="Text 31"/>
+          <p:cNvSpPr/>
+          <p:nvPr/>
+        </p:nvSpPr>
+        <p:spPr>
+          <a:xfrm>
+            <a:off x="3203448" y="3364992"/>
+            <a:ext cx="76200" cy="475488"/>
           </a:xfrm>
           <a:prstGeom prst="rect">
             <a:avLst/>
@@ -34774,14 +35803,14 @@
       </p:sp>
       <p:sp>
         <p:nvSpPr>
-          <p:cNvPr id="31" name="Shape 29"/>
-          <p:cNvSpPr/>
-          <p:nvPr/>
-        </p:nvSpPr>
-        <p:spPr>
-          <a:xfrm>
-            <a:off x="3602736" y="3364992"/>
-            <a:ext cx="1554480" cy="475488"/>
+          <p:cNvPr id="34" name="Shape 32"/>
+          <p:cNvSpPr/>
+          <p:nvPr/>
+        </p:nvSpPr>
+        <p:spPr>
+          <a:xfrm>
+            <a:off x="3279648" y="3364992"/>
+            <a:ext cx="1225296" cy="475488"/>
           </a:xfrm>
           <a:prstGeom prst="rect">
             <a:avLst>
@@ -34801,14 +35830,14 @@
       </p:sp>
       <p:sp>
         <p:nvSpPr>
-          <p:cNvPr id="32" name="Text 30"/>
-          <p:cNvSpPr/>
-          <p:nvPr/>
-        </p:nvSpPr>
-        <p:spPr>
-          <a:xfrm>
-            <a:off x="3602736" y="3364992"/>
-            <a:ext cx="1554480" cy="475488"/>
+          <p:cNvPr id="35" name="Text 33"/>
+          <p:cNvSpPr/>
+          <p:nvPr/>
+        </p:nvSpPr>
+        <p:spPr>
+          <a:xfrm>
+            <a:off x="3279648" y="3364992"/>
+            <a:ext cx="1225296" cy="475488"/>
           </a:xfrm>
           <a:prstGeom prst="rect">
             <a:avLst/>
@@ -34832,7 +35861,7 @@
                 <a:ea typeface="Trebuchet MS" pitchFamily="34" charset="-122"/>
                 <a:cs typeface="Trebuchet MS" pitchFamily="34" charset="-120"/>
               </a:rPr>
-              <a:t>pec</a:t>
+              <a:t>ex</a:t>
             </a:r>
             <a:endParaRPr lang="en-US" sz="1400" dirty="0"/>
           </a:p>
@@ -34840,14 +35869,14 @@
       </p:sp>
       <p:sp>
         <p:nvSpPr>
-          <p:cNvPr id="33" name="Text 31"/>
-          <p:cNvSpPr/>
-          <p:nvPr/>
-        </p:nvSpPr>
-        <p:spPr>
-          <a:xfrm>
-            <a:off x="5157216" y="3364992"/>
-            <a:ext cx="73152" cy="475488"/>
+          <p:cNvPr id="36" name="Text 34"/>
+          <p:cNvSpPr/>
+          <p:nvPr/>
+        </p:nvSpPr>
+        <p:spPr>
+          <a:xfrm>
+            <a:off x="4504944" y="3364992"/>
+            <a:ext cx="76200" cy="475488"/>
           </a:xfrm>
           <a:prstGeom prst="rect">
             <a:avLst/>
@@ -34879,14 +35908,14 @@
       </p:sp>
       <p:sp>
         <p:nvSpPr>
-          <p:cNvPr id="34" name="Shape 32"/>
-          <p:cNvSpPr/>
-          <p:nvPr/>
-        </p:nvSpPr>
-        <p:spPr>
-          <a:xfrm>
-            <a:off x="5230368" y="3364992"/>
-            <a:ext cx="1554480" cy="475488"/>
+          <p:cNvPr id="37" name="Shape 35"/>
+          <p:cNvSpPr/>
+          <p:nvPr/>
+        </p:nvSpPr>
+        <p:spPr>
+          <a:xfrm>
+            <a:off x="4581144" y="3364992"/>
+            <a:ext cx="1225296" cy="475488"/>
           </a:xfrm>
           <a:prstGeom prst="rect">
             <a:avLst>
@@ -34906,14 +35935,14 @@
       </p:sp>
       <p:sp>
         <p:nvSpPr>
-          <p:cNvPr id="35" name="Text 33"/>
-          <p:cNvSpPr/>
-          <p:nvPr/>
-        </p:nvSpPr>
-        <p:spPr>
-          <a:xfrm>
-            <a:off x="5230368" y="3364992"/>
-            <a:ext cx="1554480" cy="475488"/>
+          <p:cNvPr id="38" name="Text 36"/>
+          <p:cNvSpPr/>
+          <p:nvPr/>
+        </p:nvSpPr>
+        <p:spPr>
+          <a:xfrm>
+            <a:off x="4581144" y="3364992"/>
+            <a:ext cx="1225296" cy="475488"/>
           </a:xfrm>
           <a:prstGeom prst="rect">
             <a:avLst/>
@@ -34937,7 +35966,7 @@
                 <a:ea typeface="Trebuchet MS" pitchFamily="34" charset="-122"/>
                 <a:cs typeface="Trebuchet MS" pitchFamily="34" charset="-120"/>
               </a:rPr>
-              <a:t>ta</a:t>
+              <a:t>pec</a:t>
             </a:r>
             <a:endParaRPr lang="en-US" sz="1400" dirty="0"/>
           </a:p>
@@ -34945,14 +35974,14 @@
       </p:sp>
       <p:sp>
         <p:nvSpPr>
-          <p:cNvPr id="36" name="Text 34"/>
-          <p:cNvSpPr/>
-          <p:nvPr/>
-        </p:nvSpPr>
-        <p:spPr>
-          <a:xfrm>
-            <a:off x="6784848" y="3364992"/>
-            <a:ext cx="73152" cy="475488"/>
+          <p:cNvPr id="39" name="Text 37"/>
+          <p:cNvSpPr/>
+          <p:nvPr/>
+        </p:nvSpPr>
+        <p:spPr>
+          <a:xfrm>
+            <a:off x="5806440" y="3364992"/>
+            <a:ext cx="76200" cy="475488"/>
           </a:xfrm>
           <a:prstGeom prst="rect">
             <a:avLst/>
@@ -34984,14 +36013,14 @@
       </p:sp>
       <p:sp>
         <p:nvSpPr>
-          <p:cNvPr id="37" name="Shape 35"/>
-          <p:cNvSpPr/>
-          <p:nvPr/>
-        </p:nvSpPr>
-        <p:spPr>
-          <a:xfrm>
-            <a:off x="6858000" y="3364992"/>
-            <a:ext cx="1554480" cy="475488"/>
+          <p:cNvPr id="40" name="Shape 38"/>
+          <p:cNvSpPr/>
+          <p:nvPr/>
+        </p:nvSpPr>
+        <p:spPr>
+          <a:xfrm>
+            <a:off x="5882640" y="3364992"/>
+            <a:ext cx="1225296" cy="475488"/>
           </a:xfrm>
           <a:prstGeom prst="rect">
             <a:avLst>
@@ -35011,14 +36040,14 @@
       </p:sp>
       <p:sp>
         <p:nvSpPr>
-          <p:cNvPr id="38" name="Text 36"/>
-          <p:cNvSpPr/>
-          <p:nvPr/>
-        </p:nvSpPr>
-        <p:spPr>
-          <a:xfrm>
-            <a:off x="6858000" y="3364992"/>
-            <a:ext cx="1554480" cy="475488"/>
+          <p:cNvPr id="41" name="Text 39"/>
+          <p:cNvSpPr/>
+          <p:nvPr/>
+        </p:nvSpPr>
+        <p:spPr>
+          <a:xfrm>
+            <a:off x="5882640" y="3364992"/>
+            <a:ext cx="1225296" cy="475488"/>
           </a:xfrm>
           <a:prstGeom prst="rect">
             <a:avLst/>
@@ -35042,7 +36071,7 @@
                 <a:ea typeface="Trebuchet MS" pitchFamily="34" charset="-122"/>
                 <a:cs typeface="Trebuchet MS" pitchFamily="34" charset="-120"/>
               </a:rPr>
-              <a:t>tions</a:t>
+              <a:t>ted</a:t>
             </a:r>
             <a:endParaRPr lang="en-US" sz="1400" dirty="0"/>
           </a:p>
@@ -35050,7 +36079,112 @@
       </p:sp>
       <p:sp>
         <p:nvSpPr>
-          <p:cNvPr id="39" name="Shape 37"/>
+          <p:cNvPr id="42" name="Text 40"/>
+          <p:cNvSpPr/>
+          <p:nvPr/>
+        </p:nvSpPr>
+        <p:spPr>
+          <a:xfrm>
+            <a:off x="7107936" y="3364992"/>
+            <a:ext cx="76200" cy="475488"/>
+          </a:xfrm>
+          <a:prstGeom prst="rect">
+            <a:avLst/>
+          </a:prstGeom>
+          <a:noFill/>
+          <a:ln/>
+        </p:spPr>
+        <p:txBody>
+          <a:bodyPr wrap="square" lIns="0" tIns="0" rIns="0" bIns="0" rtlCol="0" anchor="ctr"/>
+          <a:lstStyle/>
+          <a:p>
+            <a:pPr algn="ctr" indent="0" marL="0">
+              <a:buNone/>
+            </a:pPr>
+            <a:r>
+              <a:rPr lang="en-US" sz="1600" b="1" dirty="0">
+                <a:solidFill>
+                  <a:srgbClr val="0D9488"/>
+                </a:solidFill>
+                <a:latin typeface="Trebuchet MS" pitchFamily="34" charset="0"/>
+                <a:ea typeface="Trebuchet MS" pitchFamily="34" charset="-122"/>
+                <a:cs typeface="Trebuchet MS" pitchFamily="34" charset="-120"/>
+              </a:rPr>
+              <a:t>·</a:t>
+            </a:r>
+            <a:endParaRPr lang="en-US" sz="1600" dirty="0"/>
+          </a:p>
+        </p:txBody>
+      </p:sp>
+      <p:sp>
+        <p:nvSpPr>
+          <p:cNvPr id="43" name="Shape 41"/>
+          <p:cNvSpPr/>
+          <p:nvPr/>
+        </p:nvSpPr>
+        <p:spPr>
+          <a:xfrm>
+            <a:off x="7184136" y="3364992"/>
+            <a:ext cx="1225296" cy="475488"/>
+          </a:xfrm>
+          <a:prstGeom prst="rect">
+            <a:avLst>
+              <a:gd name="adj" fmla="val 9615"/>
+            </a:avLst>
+          </a:prstGeom>
+          <a:solidFill>
+            <a:srgbClr val="FFFFFF"/>
+          </a:solidFill>
+          <a:ln w="12700">
+            <a:solidFill>
+              <a:srgbClr val="0D9488"/>
+            </a:solidFill>
+            <a:prstDash val="solid"/>
+          </a:ln>
+        </p:spPr>
+      </p:sp>
+      <p:sp>
+        <p:nvSpPr>
+          <p:cNvPr id="44" name="Text 42"/>
+          <p:cNvSpPr/>
+          <p:nvPr/>
+        </p:nvSpPr>
+        <p:spPr>
+          <a:xfrm>
+            <a:off x="7184136" y="3364992"/>
+            <a:ext cx="1225296" cy="475488"/>
+          </a:xfrm>
+          <a:prstGeom prst="rect">
+            <a:avLst/>
+          </a:prstGeom>
+          <a:noFill/>
+          <a:ln/>
+        </p:spPr>
+        <p:txBody>
+          <a:bodyPr wrap="square" lIns="0" tIns="0" rIns="0" bIns="0" rtlCol="0" anchor="ctr"/>
+          <a:lstStyle/>
+          <a:p>
+            <a:pPr algn="ctr" indent="0" marL="0">
+              <a:buNone/>
+            </a:pPr>
+            <a:r>
+              <a:rPr lang="en-US" sz="1400" b="1" dirty="0">
+                <a:solidFill>
+                  <a:srgbClr val="0D9488"/>
+                </a:solidFill>
+                <a:latin typeface="Trebuchet MS" pitchFamily="34" charset="0"/>
+                <a:ea typeface="Trebuchet MS" pitchFamily="34" charset="-122"/>
+                <a:cs typeface="Trebuchet MS" pitchFamily="34" charset="-120"/>
+              </a:rPr>
+              <a:t>ly</a:t>
+            </a:r>
+            <a:endParaRPr lang="en-US" sz="1400" dirty="0"/>
+          </a:p>
+        </p:txBody>
+      </p:sp>
+      <p:sp>
+        <p:nvSpPr>
+          <p:cNvPr id="45" name="Shape 43"/>
           <p:cNvSpPr/>
           <p:nvPr/>
         </p:nvSpPr>
@@ -35077,7 +36211,7 @@
       </p:sp>
       <p:sp>
         <p:nvSpPr>
-          <p:cNvPr id="40" name="Text 38"/>
+          <p:cNvPr id="46" name="Text 44"/>
           <p:cNvSpPr/>
           <p:nvPr/>
         </p:nvSpPr>
@@ -35116,7 +36250,7 @@
       </p:sp>
       <p:sp>
         <p:nvSpPr>
-          <p:cNvPr id="41" name="Shape 39"/>
+          <p:cNvPr id="47" name="Shape 45"/>
           <p:cNvSpPr/>
           <p:nvPr/>
         </p:nvSpPr>
@@ -35143,14 +36277,14 @@
       </p:sp>
       <p:sp>
         <p:nvSpPr>
-          <p:cNvPr id="42" name="Shape 40"/>
-          <p:cNvSpPr/>
-          <p:nvPr/>
-        </p:nvSpPr>
-        <p:spPr>
-          <a:xfrm>
-            <a:off x="1952244" y="4169664"/>
-            <a:ext cx="543652" cy="384048"/>
+          <p:cNvPr id="48" name="Shape 46"/>
+          <p:cNvSpPr/>
+          <p:nvPr/>
+        </p:nvSpPr>
+        <p:spPr>
+          <a:xfrm>
+            <a:off x="1952596" y="4169664"/>
+            <a:ext cx="493776" cy="384048"/>
           </a:xfrm>
           <a:prstGeom prst="rect">
             <a:avLst>
@@ -35170,14 +36304,14 @@
       </p:sp>
       <p:sp>
         <p:nvSpPr>
-          <p:cNvPr id="43" name="Text 41"/>
-          <p:cNvSpPr/>
-          <p:nvPr/>
-        </p:nvSpPr>
-        <p:spPr>
-          <a:xfrm>
-            <a:off x="1952244" y="4169664"/>
-            <a:ext cx="543652" cy="384048"/>
+          <p:cNvPr id="49" name="Text 47"/>
+          <p:cNvSpPr/>
+          <p:nvPr/>
+        </p:nvSpPr>
+        <p:spPr>
+          <a:xfrm>
+            <a:off x="1952596" y="4169664"/>
+            <a:ext cx="493776" cy="384048"/>
           </a:xfrm>
           <a:prstGeom prst="rect">
             <a:avLst/>
@@ -35201,7 +36335,7 @@
                 <a:ea typeface="Trebuchet MS" pitchFamily="34" charset="-122"/>
                 <a:cs typeface="Trebuchet MS" pitchFamily="34" charset="-120"/>
               </a:rPr>
-              <a:t>e</a:t>
+              <a:t>u</a:t>
             </a:r>
             <a:endParaRPr lang="en-US" sz="900" dirty="0"/>
           </a:p>
@@ -35209,14 +36343,14 @@
       </p:sp>
       <p:sp>
         <p:nvSpPr>
-          <p:cNvPr id="44" name="Shape 42"/>
-          <p:cNvSpPr/>
-          <p:nvPr/>
-        </p:nvSpPr>
-        <p:spPr>
-          <a:xfrm>
-            <a:off x="2546188" y="4169664"/>
-            <a:ext cx="543652" cy="384048"/>
+          <p:cNvPr id="50" name="Shape 48"/>
+          <p:cNvSpPr/>
+          <p:nvPr/>
+        </p:nvSpPr>
+        <p:spPr>
+          <a:xfrm>
+            <a:off x="2497015" y="4169664"/>
+            <a:ext cx="493776" cy="384048"/>
           </a:xfrm>
           <a:prstGeom prst="rect">
             <a:avLst>
@@ -35236,14 +36370,14 @@
       </p:sp>
       <p:sp>
         <p:nvSpPr>
-          <p:cNvPr id="45" name="Text 43"/>
-          <p:cNvSpPr/>
-          <p:nvPr/>
-        </p:nvSpPr>
-        <p:spPr>
-          <a:xfrm>
-            <a:off x="2546188" y="4169664"/>
-            <a:ext cx="543652" cy="384048"/>
+          <p:cNvPr id="51" name="Text 49"/>
+          <p:cNvSpPr/>
+          <p:nvPr/>
+        </p:nvSpPr>
+        <p:spPr>
+          <a:xfrm>
+            <a:off x="2497015" y="4169664"/>
+            <a:ext cx="493776" cy="384048"/>
           </a:xfrm>
           <a:prstGeom prst="rect">
             <a:avLst/>
@@ -35267,6 +36401,138 @@
                 <a:ea typeface="Trebuchet MS" pitchFamily="34" charset="-122"/>
                 <a:cs typeface="Trebuchet MS" pitchFamily="34" charset="-120"/>
               </a:rPr>
+              <a:t>n</a:t>
+            </a:r>
+            <a:endParaRPr lang="en-US" sz="900" dirty="0"/>
+          </a:p>
+        </p:txBody>
+      </p:sp>
+      <p:sp>
+        <p:nvSpPr>
+          <p:cNvPr id="52" name="Shape 50"/>
+          <p:cNvSpPr/>
+          <p:nvPr/>
+        </p:nvSpPr>
+        <p:spPr>
+          <a:xfrm>
+            <a:off x="3041435" y="4169664"/>
+            <a:ext cx="493776" cy="384048"/>
+          </a:xfrm>
+          <a:prstGeom prst="rect">
+            <a:avLst>
+              <a:gd name="adj" fmla="val 9524"/>
+            </a:avLst>
+          </a:prstGeom>
+          <a:solidFill>
+            <a:srgbClr val="FFFFFF"/>
+          </a:solidFill>
+          <a:ln w="12700">
+            <a:solidFill>
+              <a:srgbClr val="DB2777"/>
+            </a:solidFill>
+            <a:prstDash val="solid"/>
+          </a:ln>
+        </p:spPr>
+      </p:sp>
+      <p:sp>
+        <p:nvSpPr>
+          <p:cNvPr id="53" name="Text 51"/>
+          <p:cNvSpPr/>
+          <p:nvPr/>
+        </p:nvSpPr>
+        <p:spPr>
+          <a:xfrm>
+            <a:off x="3041435" y="4169664"/>
+            <a:ext cx="493776" cy="384048"/>
+          </a:xfrm>
+          <a:prstGeom prst="rect">
+            <a:avLst/>
+          </a:prstGeom>
+          <a:noFill/>
+          <a:ln/>
+        </p:spPr>
+        <p:txBody>
+          <a:bodyPr wrap="square" lIns="0" tIns="0" rIns="0" bIns="0" rtlCol="0" anchor="ctr"/>
+          <a:lstStyle/>
+          <a:p>
+            <a:pPr algn="ctr" indent="0" marL="0">
+              <a:buNone/>
+            </a:pPr>
+            <a:r>
+              <a:rPr lang="en-US" sz="900" b="1" dirty="0">
+                <a:solidFill>
+                  <a:srgbClr val="9D174D"/>
+                </a:solidFill>
+                <a:latin typeface="Trebuchet MS" pitchFamily="34" charset="0"/>
+                <a:ea typeface="Trebuchet MS" pitchFamily="34" charset="-122"/>
+                <a:cs typeface="Trebuchet MS" pitchFamily="34" charset="-120"/>
+              </a:rPr>
+              <a:t>e</a:t>
+            </a:r>
+            <a:endParaRPr lang="en-US" sz="900" dirty="0"/>
+          </a:p>
+        </p:txBody>
+      </p:sp>
+      <p:sp>
+        <p:nvSpPr>
+          <p:cNvPr id="54" name="Shape 52"/>
+          <p:cNvSpPr/>
+          <p:nvPr/>
+        </p:nvSpPr>
+        <p:spPr>
+          <a:xfrm>
+            <a:off x="3585855" y="4169664"/>
+            <a:ext cx="493776" cy="384048"/>
+          </a:xfrm>
+          <a:prstGeom prst="rect">
+            <a:avLst>
+              <a:gd name="adj" fmla="val 9524"/>
+            </a:avLst>
+          </a:prstGeom>
+          <a:solidFill>
+            <a:srgbClr val="FFFFFF"/>
+          </a:solidFill>
+          <a:ln w="12700">
+            <a:solidFill>
+              <a:srgbClr val="DB2777"/>
+            </a:solidFill>
+            <a:prstDash val="solid"/>
+          </a:ln>
+        </p:spPr>
+      </p:sp>
+      <p:sp>
+        <p:nvSpPr>
+          <p:cNvPr id="55" name="Text 53"/>
+          <p:cNvSpPr/>
+          <p:nvPr/>
+        </p:nvSpPr>
+        <p:spPr>
+          <a:xfrm>
+            <a:off x="3585855" y="4169664"/>
+            <a:ext cx="493776" cy="384048"/>
+          </a:xfrm>
+          <a:prstGeom prst="rect">
+            <a:avLst/>
+          </a:prstGeom>
+          <a:noFill/>
+          <a:ln/>
+        </p:spPr>
+        <p:txBody>
+          <a:bodyPr wrap="square" lIns="0" tIns="0" rIns="0" bIns="0" rtlCol="0" anchor="ctr"/>
+          <a:lstStyle/>
+          <a:p>
+            <a:pPr algn="ctr" indent="0" marL="0">
+              <a:buNone/>
+            </a:pPr>
+            <a:r>
+              <a:rPr lang="en-US" sz="900" b="1" dirty="0">
+                <a:solidFill>
+                  <a:srgbClr val="9D174D"/>
+                </a:solidFill>
+                <a:latin typeface="Trebuchet MS" pitchFamily="34" charset="0"/>
+                <a:ea typeface="Trebuchet MS" pitchFamily="34" charset="-122"/>
+                <a:cs typeface="Trebuchet MS" pitchFamily="34" charset="-120"/>
+              </a:rPr>
               <a:t>x</a:t>
             </a:r>
             <a:endParaRPr lang="en-US" sz="900" dirty="0"/>
@@ -35275,14 +36541,14 @@
       </p:sp>
       <p:sp>
         <p:nvSpPr>
-          <p:cNvPr id="46" name="Text 44"/>
-          <p:cNvSpPr/>
-          <p:nvPr/>
-        </p:nvSpPr>
-        <p:spPr>
-          <a:xfrm>
-            <a:off x="2546188" y="4572000"/>
-            <a:ext cx="543652" cy="219456"/>
+          <p:cNvPr id="56" name="Text 54"/>
+          <p:cNvSpPr/>
+          <p:nvPr/>
+        </p:nvSpPr>
+        <p:spPr>
+          <a:xfrm>
+            <a:off x="3585855" y="4572000"/>
+            <a:ext cx="493776" cy="219456"/>
           </a:xfrm>
           <a:prstGeom prst="rect">
             <a:avLst/>
@@ -35314,14 +36580,14 @@
       </p:sp>
       <p:sp>
         <p:nvSpPr>
-          <p:cNvPr id="47" name="Shape 45"/>
-          <p:cNvSpPr/>
-          <p:nvPr/>
-        </p:nvSpPr>
-        <p:spPr>
-          <a:xfrm>
-            <a:off x="3140133" y="4169664"/>
-            <a:ext cx="543652" cy="384048"/>
+          <p:cNvPr id="57" name="Shape 55"/>
+          <p:cNvSpPr/>
+          <p:nvPr/>
+        </p:nvSpPr>
+        <p:spPr>
+          <a:xfrm>
+            <a:off x="4130274" y="4169664"/>
+            <a:ext cx="493776" cy="384048"/>
           </a:xfrm>
           <a:prstGeom prst="rect">
             <a:avLst>
@@ -35341,14 +36607,14 @@
       </p:sp>
       <p:sp>
         <p:nvSpPr>
-          <p:cNvPr id="48" name="Text 46"/>
-          <p:cNvSpPr/>
-          <p:nvPr/>
-        </p:nvSpPr>
-        <p:spPr>
-          <a:xfrm>
-            <a:off x="3140133" y="4169664"/>
-            <a:ext cx="543652" cy="384048"/>
+          <p:cNvPr id="58" name="Text 56"/>
+          <p:cNvSpPr/>
+          <p:nvPr/>
+        </p:nvSpPr>
+        <p:spPr>
+          <a:xfrm>
+            <a:off x="4130274" y="4169664"/>
+            <a:ext cx="493776" cy="384048"/>
           </a:xfrm>
           <a:prstGeom prst="rect">
             <a:avLst/>
@@ -35380,14 +36646,14 @@
       </p:sp>
       <p:sp>
         <p:nvSpPr>
-          <p:cNvPr id="49" name="Shape 47"/>
-          <p:cNvSpPr/>
-          <p:nvPr/>
-        </p:nvSpPr>
-        <p:spPr>
-          <a:xfrm>
-            <a:off x="3734077" y="4169664"/>
-            <a:ext cx="543652" cy="384048"/>
+          <p:cNvPr id="59" name="Shape 57"/>
+          <p:cNvSpPr/>
+          <p:nvPr/>
+        </p:nvSpPr>
+        <p:spPr>
+          <a:xfrm>
+            <a:off x="4674694" y="4169664"/>
+            <a:ext cx="493776" cy="384048"/>
           </a:xfrm>
           <a:prstGeom prst="rect">
             <a:avLst>
@@ -35407,14 +36673,14 @@
       </p:sp>
       <p:sp>
         <p:nvSpPr>
-          <p:cNvPr id="50" name="Text 48"/>
-          <p:cNvSpPr/>
-          <p:nvPr/>
-        </p:nvSpPr>
-        <p:spPr>
-          <a:xfrm>
-            <a:off x="3734077" y="4169664"/>
-            <a:ext cx="543652" cy="384048"/>
+          <p:cNvPr id="60" name="Text 58"/>
+          <p:cNvSpPr/>
+          <p:nvPr/>
+        </p:nvSpPr>
+        <p:spPr>
+          <a:xfrm>
+            <a:off x="4674694" y="4169664"/>
+            <a:ext cx="493776" cy="384048"/>
           </a:xfrm>
           <a:prstGeom prst="rect">
             <a:avLst/>
@@ -35446,14 +36712,14 @@
       </p:sp>
       <p:sp>
         <p:nvSpPr>
-          <p:cNvPr id="51" name="Shape 49"/>
-          <p:cNvSpPr/>
-          <p:nvPr/>
-        </p:nvSpPr>
-        <p:spPr>
-          <a:xfrm>
-            <a:off x="4328021" y="4169664"/>
-            <a:ext cx="543652" cy="384048"/>
+          <p:cNvPr id="61" name="Shape 59"/>
+          <p:cNvSpPr/>
+          <p:nvPr/>
+        </p:nvSpPr>
+        <p:spPr>
+          <a:xfrm>
+            <a:off x="5219114" y="4169664"/>
+            <a:ext cx="493776" cy="384048"/>
           </a:xfrm>
           <a:prstGeom prst="rect">
             <a:avLst>
@@ -35473,14 +36739,14 @@
       </p:sp>
       <p:sp>
         <p:nvSpPr>
-          <p:cNvPr id="52" name="Text 50"/>
-          <p:cNvSpPr/>
-          <p:nvPr/>
-        </p:nvSpPr>
-        <p:spPr>
-          <a:xfrm>
-            <a:off x="4328021" y="4169664"/>
-            <a:ext cx="543652" cy="384048"/>
+          <p:cNvPr id="62" name="Text 60"/>
+          <p:cNvSpPr/>
+          <p:nvPr/>
+        </p:nvSpPr>
+        <p:spPr>
+          <a:xfrm>
+            <a:off x="5219114" y="4169664"/>
+            <a:ext cx="493776" cy="384048"/>
           </a:xfrm>
           <a:prstGeom prst="rect">
             <a:avLst/>
@@ -35512,53 +36778,14 @@
       </p:sp>
       <p:sp>
         <p:nvSpPr>
-          <p:cNvPr id="53" name="Text 51"/>
-          <p:cNvSpPr/>
-          <p:nvPr/>
-        </p:nvSpPr>
-        <p:spPr>
-          <a:xfrm>
-            <a:off x="4328021" y="4572000"/>
-            <a:ext cx="543652" cy="219456"/>
-          </a:xfrm>
-          <a:prstGeom prst="rect">
-            <a:avLst/>
-          </a:prstGeom>
-          <a:noFill/>
-          <a:ln/>
-        </p:spPr>
-        <p:txBody>
-          <a:bodyPr wrap="square" lIns="0" tIns="0" rIns="0" bIns="0" rtlCol="0" anchor="t"/>
-          <a:lstStyle/>
-          <a:p>
-            <a:pPr algn="ctr" indent="0" marL="0">
-              <a:buNone/>
-            </a:pPr>
-            <a:r>
-              <a:rPr lang="en-US" sz="750" i="1" dirty="0">
-                <a:solidFill>
-                  <a:srgbClr val="94A3B8"/>
-                </a:solidFill>
-                <a:latin typeface="Calibri" pitchFamily="34" charset="0"/>
-                <a:ea typeface="Calibri" pitchFamily="34" charset="-122"/>
-                <a:cs typeface="Calibri" pitchFamily="34" charset="-120"/>
-              </a:rPr>
-              <a:t>/k/</a:t>
-            </a:r>
-            <a:endParaRPr lang="en-US" sz="750" dirty="0"/>
-          </a:p>
-        </p:txBody>
-      </p:sp>
-      <p:sp>
-        <p:nvSpPr>
-          <p:cNvPr id="54" name="Shape 52"/>
-          <p:cNvSpPr/>
-          <p:nvPr/>
-        </p:nvSpPr>
-        <p:spPr>
-          <a:xfrm>
-            <a:off x="4921966" y="4169664"/>
-            <a:ext cx="543652" cy="384048"/>
+          <p:cNvPr id="63" name="Shape 61"/>
+          <p:cNvSpPr/>
+          <p:nvPr/>
+        </p:nvSpPr>
+        <p:spPr>
+          <a:xfrm>
+            <a:off x="5763534" y="4169664"/>
+            <a:ext cx="493776" cy="384048"/>
           </a:xfrm>
           <a:prstGeom prst="rect">
             <a:avLst>
@@ -35578,14 +36805,14 @@
       </p:sp>
       <p:sp>
         <p:nvSpPr>
-          <p:cNvPr id="55" name="Text 53"/>
-          <p:cNvSpPr/>
-          <p:nvPr/>
-        </p:nvSpPr>
-        <p:spPr>
-          <a:xfrm>
-            <a:off x="4921966" y="4169664"/>
-            <a:ext cx="543652" cy="384048"/>
+          <p:cNvPr id="64" name="Text 62"/>
+          <p:cNvSpPr/>
+          <p:nvPr/>
+        </p:nvSpPr>
+        <p:spPr>
+          <a:xfrm>
+            <a:off x="5763534" y="4169664"/>
+            <a:ext cx="493776" cy="384048"/>
           </a:xfrm>
           <a:prstGeom prst="rect">
             <a:avLst/>
@@ -35617,14 +36844,14 @@
       </p:sp>
       <p:sp>
         <p:nvSpPr>
-          <p:cNvPr id="56" name="Shape 54"/>
-          <p:cNvSpPr/>
-          <p:nvPr/>
-        </p:nvSpPr>
-        <p:spPr>
-          <a:xfrm>
-            <a:off x="5515910" y="4169664"/>
-            <a:ext cx="543652" cy="384048"/>
+          <p:cNvPr id="65" name="Shape 63"/>
+          <p:cNvSpPr/>
+          <p:nvPr/>
+        </p:nvSpPr>
+        <p:spPr>
+          <a:xfrm>
+            <a:off x="6307953" y="4169664"/>
+            <a:ext cx="493776" cy="384048"/>
           </a:xfrm>
           <a:prstGeom prst="rect">
             <a:avLst>
@@ -35644,14 +36871,14 @@
       </p:sp>
       <p:sp>
         <p:nvSpPr>
-          <p:cNvPr id="57" name="Text 55"/>
-          <p:cNvSpPr/>
-          <p:nvPr/>
-        </p:nvSpPr>
-        <p:spPr>
-          <a:xfrm>
-            <a:off x="5515910" y="4169664"/>
-            <a:ext cx="543652" cy="384048"/>
+          <p:cNvPr id="66" name="Text 64"/>
+          <p:cNvSpPr/>
+          <p:nvPr/>
+        </p:nvSpPr>
+        <p:spPr>
+          <a:xfrm>
+            <a:off x="6307953" y="4169664"/>
+            <a:ext cx="493776" cy="384048"/>
           </a:xfrm>
           <a:prstGeom prst="rect">
             <a:avLst/>
@@ -35675,7 +36902,7 @@
                 <a:ea typeface="Trebuchet MS" pitchFamily="34" charset="-122"/>
                 <a:cs typeface="Trebuchet MS" pitchFamily="34" charset="-120"/>
               </a:rPr>
-              <a:t>a</a:t>
+              <a:t>e</a:t>
             </a:r>
             <a:endParaRPr lang="en-US" sz="900" dirty="0"/>
           </a:p>
@@ -35683,14 +36910,14 @@
       </p:sp>
       <p:sp>
         <p:nvSpPr>
-          <p:cNvPr id="58" name="Shape 56"/>
-          <p:cNvSpPr/>
-          <p:nvPr/>
-        </p:nvSpPr>
-        <p:spPr>
-          <a:xfrm>
-            <a:off x="6109855" y="4169664"/>
-            <a:ext cx="543652" cy="384048"/>
+          <p:cNvPr id="67" name="Shape 65"/>
+          <p:cNvSpPr/>
+          <p:nvPr/>
+        </p:nvSpPr>
+        <p:spPr>
+          <a:xfrm>
+            <a:off x="6852373" y="4169664"/>
+            <a:ext cx="493776" cy="384048"/>
           </a:xfrm>
           <a:prstGeom prst="rect">
             <a:avLst>
@@ -35710,14 +36937,14 @@
       </p:sp>
       <p:sp>
         <p:nvSpPr>
-          <p:cNvPr id="59" name="Text 57"/>
-          <p:cNvSpPr/>
-          <p:nvPr/>
-        </p:nvSpPr>
-        <p:spPr>
-          <a:xfrm>
-            <a:off x="6109855" y="4169664"/>
-            <a:ext cx="543652" cy="384048"/>
+          <p:cNvPr id="68" name="Text 66"/>
+          <p:cNvSpPr/>
+          <p:nvPr/>
+        </p:nvSpPr>
+        <p:spPr>
+          <a:xfrm>
+            <a:off x="6852373" y="4169664"/>
+            <a:ext cx="493776" cy="384048"/>
           </a:xfrm>
           <a:prstGeom prst="rect">
             <a:avLst/>
@@ -35741,7 +36968,7 @@
                 <a:ea typeface="Trebuchet MS" pitchFamily="34" charset="-122"/>
                 <a:cs typeface="Trebuchet MS" pitchFamily="34" charset="-120"/>
               </a:rPr>
-              <a:t>ti</a:t>
+              <a:t>d</a:t>
             </a:r>
             <a:endParaRPr lang="en-US" sz="900" dirty="0"/>
           </a:p>
@@ -35749,53 +36976,14 @@
       </p:sp>
       <p:sp>
         <p:nvSpPr>
-          <p:cNvPr id="60" name="Text 58"/>
-          <p:cNvSpPr/>
-          <p:nvPr/>
-        </p:nvSpPr>
-        <p:spPr>
-          <a:xfrm>
-            <a:off x="6109855" y="4572000"/>
-            <a:ext cx="543652" cy="219456"/>
-          </a:xfrm>
-          <a:prstGeom prst="rect">
-            <a:avLst/>
-          </a:prstGeom>
-          <a:noFill/>
-          <a:ln/>
-        </p:spPr>
-        <p:txBody>
-          <a:bodyPr wrap="square" lIns="0" tIns="0" rIns="0" bIns="0" rtlCol="0" anchor="t"/>
-          <a:lstStyle/>
-          <a:p>
-            <a:pPr algn="ctr" indent="0" marL="0">
-              <a:buNone/>
-            </a:pPr>
-            <a:r>
-              <a:rPr lang="en-US" sz="750" i="1" dirty="0">
-                <a:solidFill>
-                  <a:srgbClr val="94A3B8"/>
-                </a:solidFill>
-                <a:latin typeface="Calibri" pitchFamily="34" charset="0"/>
-                <a:ea typeface="Calibri" pitchFamily="34" charset="-122"/>
-                <a:cs typeface="Calibri" pitchFamily="34" charset="-120"/>
-              </a:rPr>
-              <a:t>/sh/</a:t>
-            </a:r>
-            <a:endParaRPr lang="en-US" sz="750" dirty="0"/>
-          </a:p>
-        </p:txBody>
-      </p:sp>
-      <p:sp>
-        <p:nvSpPr>
-          <p:cNvPr id="61" name="Shape 59"/>
-          <p:cNvSpPr/>
-          <p:nvPr/>
-        </p:nvSpPr>
-        <p:spPr>
-          <a:xfrm>
-            <a:off x="6703799" y="4169664"/>
-            <a:ext cx="543652" cy="384048"/>
+          <p:cNvPr id="69" name="Shape 67"/>
+          <p:cNvSpPr/>
+          <p:nvPr/>
+        </p:nvSpPr>
+        <p:spPr>
+          <a:xfrm>
+            <a:off x="7396793" y="4169664"/>
+            <a:ext cx="493776" cy="384048"/>
           </a:xfrm>
           <a:prstGeom prst="rect">
             <a:avLst>
@@ -35815,14 +37003,14 @@
       </p:sp>
       <p:sp>
         <p:nvSpPr>
-          <p:cNvPr id="62" name="Text 60"/>
-          <p:cNvSpPr/>
-          <p:nvPr/>
-        </p:nvSpPr>
-        <p:spPr>
-          <a:xfrm>
-            <a:off x="6703799" y="4169664"/>
-            <a:ext cx="543652" cy="384048"/>
+          <p:cNvPr id="70" name="Text 68"/>
+          <p:cNvSpPr/>
+          <p:nvPr/>
+        </p:nvSpPr>
+        <p:spPr>
+          <a:xfrm>
+            <a:off x="7396793" y="4169664"/>
+            <a:ext cx="493776" cy="384048"/>
           </a:xfrm>
           <a:prstGeom prst="rect">
             <a:avLst/>
@@ -35846,7 +37034,7 @@
                 <a:ea typeface="Trebuchet MS" pitchFamily="34" charset="-122"/>
                 <a:cs typeface="Trebuchet MS" pitchFamily="34" charset="-120"/>
               </a:rPr>
-              <a:t>o</a:t>
+              <a:t>l</a:t>
             </a:r>
             <a:endParaRPr lang="en-US" sz="900" dirty="0"/>
           </a:p>
@@ -35854,14 +37042,14 @@
       </p:sp>
       <p:sp>
         <p:nvSpPr>
-          <p:cNvPr id="63" name="Shape 61"/>
-          <p:cNvSpPr/>
-          <p:nvPr/>
-        </p:nvSpPr>
-        <p:spPr>
-          <a:xfrm>
-            <a:off x="7297743" y="4169664"/>
-            <a:ext cx="543652" cy="384048"/>
+          <p:cNvPr id="71" name="Shape 69"/>
+          <p:cNvSpPr/>
+          <p:nvPr/>
+        </p:nvSpPr>
+        <p:spPr>
+          <a:xfrm>
+            <a:off x="7941212" y="4169664"/>
+            <a:ext cx="493776" cy="384048"/>
           </a:xfrm>
           <a:prstGeom prst="rect">
             <a:avLst>
@@ -35881,14 +37069,14 @@
       </p:sp>
       <p:sp>
         <p:nvSpPr>
-          <p:cNvPr id="64" name="Text 62"/>
-          <p:cNvSpPr/>
-          <p:nvPr/>
-        </p:nvSpPr>
-        <p:spPr>
-          <a:xfrm>
-            <a:off x="7297743" y="4169664"/>
-            <a:ext cx="543652" cy="384048"/>
+          <p:cNvPr id="72" name="Text 70"/>
+          <p:cNvSpPr/>
+          <p:nvPr/>
+        </p:nvSpPr>
+        <p:spPr>
+          <a:xfrm>
+            <a:off x="7941212" y="4169664"/>
+            <a:ext cx="493776" cy="384048"/>
           </a:xfrm>
           <a:prstGeom prst="rect">
             <a:avLst/>
@@ -35912,73 +37100,7 @@
                 <a:ea typeface="Trebuchet MS" pitchFamily="34" charset="-122"/>
                 <a:cs typeface="Trebuchet MS" pitchFamily="34" charset="-120"/>
               </a:rPr>
-              <a:t>n</a:t>
-            </a:r>
-            <a:endParaRPr lang="en-US" sz="900" dirty="0"/>
-          </a:p>
-        </p:txBody>
-      </p:sp>
-      <p:sp>
-        <p:nvSpPr>
-          <p:cNvPr id="65" name="Shape 63"/>
-          <p:cNvSpPr/>
-          <p:nvPr/>
-        </p:nvSpPr>
-        <p:spPr>
-          <a:xfrm>
-            <a:off x="7891688" y="4169664"/>
-            <a:ext cx="543652" cy="384048"/>
-          </a:xfrm>
-          <a:prstGeom prst="rect">
-            <a:avLst>
-              <a:gd name="adj" fmla="val 9524"/>
-            </a:avLst>
-          </a:prstGeom>
-          <a:solidFill>
-            <a:srgbClr val="FFFFFF"/>
-          </a:solidFill>
-          <a:ln w="12700">
-            <a:solidFill>
-              <a:srgbClr val="DB2777"/>
-            </a:solidFill>
-            <a:prstDash val="solid"/>
-          </a:ln>
-        </p:spPr>
-      </p:sp>
-      <p:sp>
-        <p:nvSpPr>
-          <p:cNvPr id="66" name="Text 64"/>
-          <p:cNvSpPr/>
-          <p:nvPr/>
-        </p:nvSpPr>
-        <p:spPr>
-          <a:xfrm>
-            <a:off x="7891688" y="4169664"/>
-            <a:ext cx="543652" cy="384048"/>
-          </a:xfrm>
-          <a:prstGeom prst="rect">
-            <a:avLst/>
-          </a:prstGeom>
-          <a:noFill/>
-          <a:ln/>
-        </p:spPr>
-        <p:txBody>
-          <a:bodyPr wrap="square" lIns="0" tIns="0" rIns="0" bIns="0" rtlCol="0" anchor="ctr"/>
-          <a:lstStyle/>
-          <a:p>
-            <a:pPr algn="ctr" indent="0" marL="0">
-              <a:buNone/>
-            </a:pPr>
-            <a:r>
-              <a:rPr lang="en-US" sz="900" b="1" dirty="0">
-                <a:solidFill>
-                  <a:srgbClr val="9D174D"/>
-                </a:solidFill>
-                <a:latin typeface="Trebuchet MS" pitchFamily="34" charset="0"/>
-                <a:ea typeface="Trebuchet MS" pitchFamily="34" charset="-122"/>
-                <a:cs typeface="Trebuchet MS" pitchFamily="34" charset="-120"/>
-              </a:rPr>
-              <a:t>s</a:t>
+              <a:t>y</a:t>
             </a:r>
             <a:endParaRPr lang="en-US" sz="900" dirty="0"/>
           </a:p>
@@ -38238,7 +39360,7 @@
                 <a:ea typeface="Trebuchet MS" pitchFamily="34" charset="-122"/>
                 <a:cs typeface="Trebuchet MS" pitchFamily="34" charset="-120"/>
               </a:rPr>
-              <a:t>over-</a:t>
+              <a:t>pre-</a:t>
             </a:r>
             <a:endParaRPr lang="en-US" sz="1300" dirty="0"/>
           </a:p>
@@ -38327,7 +39449,7 @@
                 <a:ea typeface="Trebuchet MS" pitchFamily="34" charset="-122"/>
                 <a:cs typeface="Trebuchet MS" pitchFamily="34" charset="-120"/>
               </a:rPr>
-              <a:t>-ant</a:t>
+              <a:t>-ancy</a:t>
             </a:r>
             <a:endParaRPr lang="en-US" sz="1300" dirty="0"/>
           </a:p>
@@ -38391,7 +39513,7 @@
                 <a:ea typeface="Trebuchet MS" pitchFamily="34" charset="-122"/>
                 <a:cs typeface="Trebuchet MS" pitchFamily="34" charset="-120"/>
               </a:rPr>
-              <a:t>self-</a:t>
+              <a:t>over-</a:t>
             </a:r>
             <a:endParaRPr lang="en-US" sz="1300" dirty="0"/>
           </a:p>
@@ -38480,7 +39602,7 @@
                 <a:ea typeface="Trebuchet MS" pitchFamily="34" charset="-122"/>
                 <a:cs typeface="Trebuchet MS" pitchFamily="34" charset="-120"/>
               </a:rPr>
-              <a:t>-ancy</a:t>
+              <a:t>-ant</a:t>
             </a:r>
             <a:endParaRPr lang="en-US" sz="1300" dirty="0"/>
           </a:p>
@@ -38783,7 +39905,7 @@
                 <a:ea typeface="Trebuchet MS" pitchFamily="34" charset="-122"/>
                 <a:cs typeface="Trebuchet MS" pitchFamily="34" charset="-120"/>
               </a:rPr>
-              <a:t>expectation</a:t>
+              <a:t>unexpected</a:t>
             </a:r>
             <a:endParaRPr lang="en-US" sz="1200" dirty="0"/>
           </a:p>
@@ -38849,7 +39971,7 @@
                 <a:ea typeface="Trebuchet MS" pitchFamily="34" charset="-122"/>
                 <a:cs typeface="Trebuchet MS" pitchFamily="34" charset="-120"/>
               </a:rPr>
-              <a:t>unexpected</a:t>
+              <a:t>expectation</a:t>
             </a:r>
             <a:endParaRPr lang="en-US" sz="1200" dirty="0"/>
           </a:p>
@@ -38915,7 +40037,7 @@
                 <a:ea typeface="Trebuchet MS" pitchFamily="34" charset="-122"/>
                 <a:cs typeface="Trebuchet MS" pitchFamily="34" charset="-120"/>
               </a:rPr>
-              <a:t>unexpectedly</a:t>
+              <a:t>expectancy</a:t>
             </a:r>
             <a:endParaRPr lang="en-US" sz="1200" dirty="0"/>
           </a:p>
@@ -38981,7 +40103,7 @@
                 <a:ea typeface="Trebuchet MS" pitchFamily="34" charset="-122"/>
                 <a:cs typeface="Trebuchet MS" pitchFamily="34" charset="-120"/>
               </a:rPr>
-              <a:t>expectant</a:t>
+              <a:t>unexpectedly</a:t>
             </a:r>
             <a:endParaRPr lang="en-US" sz="1200" dirty="0"/>
           </a:p>
@@ -39047,7 +40169,7 @@
                 <a:ea typeface="Trebuchet MS" pitchFamily="34" charset="-122"/>
                 <a:cs typeface="Trebuchet MS" pitchFamily="34" charset="-120"/>
               </a:rPr>
-              <a:t>expectancy</a:t>
+              <a:t>expectant</a:t>
             </a:r>
             <a:endParaRPr lang="en-US" sz="1200" dirty="0"/>
           </a:p>
@@ -40235,7 +41357,7 @@
                 <a:ea typeface="Calibri" pitchFamily="34" charset="-122"/>
                 <a:cs typeface="Calibri" pitchFamily="34" charset="-120"/>
               </a:rPr>
-              <a:t>1.  The root 'expect' comes from a Latin word meaning to look forward or await.</a:t>
+              <a:t>1.  Adding the suffix '-ation' to 'expect' makes the noun 'expectation'.</a:t>
             </a:r>
             <a:endParaRPr lang="en-US" sz="1300" dirty="0"/>
           </a:p>
@@ -40374,7 +41496,7 @@
                 <a:ea typeface="Calibri" pitchFamily="34" charset="-122"/>
                 <a:cs typeface="Calibri" pitchFamily="34" charset="-120"/>
               </a:rPr>
-              <a:t>2.  The word 'unexpected' means something that you planned for carefully.</a:t>
+              <a:t>2.  The root 'expect' comes from a Latin word meaning to look forward or await.</a:t>
             </a:r>
             <a:endParaRPr lang="en-US" sz="1300" dirty="0"/>
           </a:p>
@@ -40397,11 +41519,11 @@
             </a:avLst>
           </a:prstGeom>
           <a:solidFill>
-            <a:srgbClr val="FEE2E2"/>
-          </a:solidFill>
-          <a:ln w="12700">
-            <a:solidFill>
-              <a:srgbClr val="DC2626"/>
+            <a:srgbClr val="DCFCE7"/>
+          </a:solidFill>
+          <a:ln w="12700">
+            <a:solidFill>
+              <a:srgbClr val="16A34A"/>
             </a:solidFill>
             <a:prstDash val="solid"/>
           </a:ln>
@@ -40434,13 +41556,13 @@
             <a:r>
               <a:rPr lang="en-US" sz="1100" b="1" dirty="0">
                 <a:solidFill>
-                  <a:srgbClr val="DC2626"/>
+                  <a:srgbClr val="16A34A"/>
                 </a:solidFill>
                 <a:latin typeface="Trebuchet MS" pitchFamily="34" charset="0"/>
                 <a:ea typeface="Trebuchet MS" pitchFamily="34" charset="-122"/>
                 <a:cs typeface="Trebuchet MS" pitchFamily="34" charset="-120"/>
               </a:rPr>
-              <a:t>FALSE</a:t>
+              <a:t>TRUE</a:t>
             </a:r>
             <a:endParaRPr lang="en-US" sz="1100" dirty="0"/>
           </a:p>
@@ -40513,7 +41635,7 @@
                 <a:ea typeface="Calibri" pitchFamily="34" charset="-122"/>
                 <a:cs typeface="Calibri" pitchFamily="34" charset="-120"/>
               </a:rPr>
-              <a:t>3.  Adding the prefix 'un-' to 'expected' makes it mean the opposite — not expected.</a:t>
+              <a:t>3.  The prefix 'un-' in 'unexpected' means 'not'.</a:t>
             </a:r>
             <a:endParaRPr lang="en-US" sz="1300" dirty="0"/>
           </a:p>
@@ -40652,7 +41774,7 @@
                 <a:ea typeface="Calibri" pitchFamily="34" charset="-122"/>
                 <a:cs typeface="Calibri" pitchFamily="34" charset="-120"/>
               </a:rPr>
-              <a:t>4.  The suffix '-ation' can be added to 'expect' to make the noun 'expectation'.</a:t>
+              <a:t>4.  The word 'unexpected' means something you were fully prepared for.</a:t>
             </a:r>
             <a:endParaRPr lang="en-US" sz="1300" dirty="0"/>
           </a:p>
@@ -40675,11 +41797,11 @@
             </a:avLst>
           </a:prstGeom>
           <a:solidFill>
-            <a:srgbClr val="DCFCE7"/>
-          </a:solidFill>
-          <a:ln w="12700">
-            <a:solidFill>
-              <a:srgbClr val="16A34A"/>
+            <a:srgbClr val="FEE2E2"/>
+          </a:solidFill>
+          <a:ln w="12700">
+            <a:solidFill>
+              <a:srgbClr val="DC2626"/>
             </a:solidFill>
             <a:prstDash val="solid"/>
           </a:ln>
@@ -40712,13 +41834,13 @@
             <a:r>
               <a:rPr lang="en-US" sz="1100" b="1" dirty="0">
                 <a:solidFill>
-                  <a:srgbClr val="16A34A"/>
+                  <a:srgbClr val="DC2626"/>
                 </a:solidFill>
                 <a:latin typeface="Trebuchet MS" pitchFamily="34" charset="0"/>
                 <a:ea typeface="Trebuchet MS" pitchFamily="34" charset="-122"/>
                 <a:cs typeface="Trebuchet MS" pitchFamily="34" charset="-120"/>
               </a:rPr>
-              <a:t>TRUE</a:t>
+              <a:t>FALSE</a:t>
             </a:r>
             <a:endParaRPr lang="en-US" sz="1100" dirty="0"/>
           </a:p>
@@ -40791,7 +41913,7 @@
                 <a:ea typeface="Calibri" pitchFamily="34" charset="-122"/>
                 <a:cs typeface="Calibri" pitchFamily="34" charset="-120"/>
               </a:rPr>
-              <a:t>5.  The root 'expect' originally comes from the Greek language.</a:t>
+              <a:t>5.  The word 'expectant' is a verb describing an action.</a:t>
             </a:r>
             <a:endParaRPr lang="en-US" sz="1300" dirty="0"/>
           </a:p>
@@ -41628,7 +42750,7 @@
                 <a:ea typeface="Trebuchet MS" pitchFamily="34" charset="-122"/>
                 <a:cs typeface="Trebuchet MS" pitchFamily="34" charset="-120"/>
               </a:rPr>
-              <a:t>expectation</a:t>
+              <a:t>unexpected</a:t>
             </a:r>
             <a:endParaRPr lang="en-US" sz="1300" dirty="0"/>
           </a:p>
@@ -41694,7 +42816,7 @@
                 <a:ea typeface="Trebuchet MS" pitchFamily="34" charset="-122"/>
                 <a:cs typeface="Trebuchet MS" pitchFamily="34" charset="-120"/>
               </a:rPr>
-              <a:t>unexpected</a:t>
+              <a:t>expectation</a:t>
             </a:r>
             <a:endParaRPr lang="en-US" sz="1300" dirty="0"/>
           </a:p>
@@ -41760,7 +42882,7 @@
                 <a:ea typeface="Trebuchet MS" pitchFamily="34" charset="-122"/>
                 <a:cs typeface="Trebuchet MS" pitchFamily="34" charset="-120"/>
               </a:rPr>
-              <a:t>unexpectedly</a:t>
+              <a:t>expectancy</a:t>
             </a:r>
             <a:endParaRPr lang="en-US" sz="1300" dirty="0"/>
           </a:p>
@@ -41826,7 +42948,7 @@
                 <a:ea typeface="Trebuchet MS" pitchFamily="34" charset="-122"/>
                 <a:cs typeface="Trebuchet MS" pitchFamily="34" charset="-120"/>
               </a:rPr>
-              <a:t>expectant</a:t>
+              <a:t>unexpectedly</a:t>
             </a:r>
             <a:endParaRPr lang="en-US" sz="1300" dirty="0"/>
           </a:p>
@@ -42917,7 +44039,7 @@
                 <a:ea typeface="Trebuchet MS" pitchFamily="34" charset="-122"/>
                 <a:cs typeface="Trebuchet MS" pitchFamily="34" charset="-120"/>
               </a:rPr>
-              <a:t>over-</a:t>
+              <a:t>pre-</a:t>
             </a:r>
             <a:endParaRPr lang="en-US" sz="1300" dirty="0"/>
           </a:p>
@@ -43006,7 +44128,7 @@
                 <a:ea typeface="Trebuchet MS" pitchFamily="34" charset="-122"/>
                 <a:cs typeface="Trebuchet MS" pitchFamily="34" charset="-120"/>
               </a:rPr>
-              <a:t>-ant</a:t>
+              <a:t>-ancy</a:t>
             </a:r>
             <a:endParaRPr lang="en-US" sz="1300" dirty="0"/>
           </a:p>
@@ -43070,7 +44192,7 @@
                 <a:ea typeface="Trebuchet MS" pitchFamily="34" charset="-122"/>
                 <a:cs typeface="Trebuchet MS" pitchFamily="34" charset="-120"/>
               </a:rPr>
-              <a:t>self-</a:t>
+              <a:t>over-</a:t>
             </a:r>
             <a:endParaRPr lang="en-US" sz="1300" dirty="0"/>
           </a:p>
@@ -43159,7 +44281,7 @@
                 <a:ea typeface="Trebuchet MS" pitchFamily="34" charset="-122"/>
                 <a:cs typeface="Trebuchet MS" pitchFamily="34" charset="-120"/>
               </a:rPr>
-              <a:t>-ancy</a:t>
+              <a:t>-ant</a:t>
             </a:r>
             <a:endParaRPr lang="en-US" sz="1300" dirty="0"/>
           </a:p>
@@ -44070,7 +45192,7 @@
                 <a:ea typeface="Calibri" pitchFamily="34" charset="-122"/>
                 <a:cs typeface="Calibri" pitchFamily="34" charset="-120"/>
               </a:rPr>
-              <a:t>A strong belief that something will happen in a certain way.</a:t>
+              <a:t>Something that happened without any warning or without being thought about beforehand.</a:t>
             </a:r>
             <a:endParaRPr lang="en-US" sz="1200" dirty="0"/>
           </a:p>
@@ -44209,7 +45331,7 @@
                 <a:ea typeface="Calibri" pitchFamily="34" charset="-122"/>
                 <a:cs typeface="Calibri" pitchFamily="34" charset="-120"/>
               </a:rPr>
-              <a:t>To think something will happen or that someone will do something.</a:t>
+              <a:t>To think something will happen or that someone will arrive.</a:t>
             </a:r>
             <a:endParaRPr lang="en-US" sz="1200" dirty="0"/>
           </a:p>
@@ -44348,7 +45470,7 @@
                 <a:ea typeface="Calibri" pitchFamily="34" charset="-122"/>
                 <a:cs typeface="Calibri" pitchFamily="34" charset="-120"/>
               </a:rPr>
-              <a:t>Feeling excited and hopeful while waiting for something to happen.</a:t>
+              <a:t>In a way that was surprising because nobody thought it would happen.</a:t>
             </a:r>
             <a:endParaRPr lang="en-US" sz="1200" dirty="0"/>
           </a:p>
@@ -44421,7 +45543,7 @@
                 <a:ea typeface="Trebuchet MS" pitchFamily="34" charset="-122"/>
                 <a:cs typeface="Trebuchet MS" pitchFamily="34" charset="-120"/>
               </a:rPr>
-              <a:t>expectation</a:t>
+              <a:t>unexpected</a:t>
             </a:r>
             <a:endParaRPr lang="en-US" sz="1200" dirty="0"/>
           </a:p>
@@ -44487,7 +45609,7 @@
                 <a:ea typeface="Calibri" pitchFamily="34" charset="-122"/>
                 <a:cs typeface="Calibri" pitchFamily="34" charset="-120"/>
               </a:rPr>
-              <a:t>Waiting for something you believe will happen soon.</a:t>
+              <a:t>Currently waiting for something to happen or arrive.</a:t>
             </a:r>
             <a:endParaRPr lang="en-US" sz="1200" dirty="0"/>
           </a:p>
@@ -44560,7 +45682,7 @@
                 <a:ea typeface="Trebuchet MS" pitchFamily="34" charset="-122"/>
                 <a:cs typeface="Trebuchet MS" pitchFamily="34" charset="-120"/>
               </a:rPr>
-              <a:t>unexpected</a:t>
+              <a:t>expectation</a:t>
             </a:r>
             <a:endParaRPr lang="en-US" sz="1200" dirty="0"/>
           </a:p>
@@ -44626,7 +45748,7 @@
                 <a:ea typeface="Calibri" pitchFamily="34" charset="-122"/>
                 <a:cs typeface="Calibri" pitchFamily="34" charset="-120"/>
               </a:rPr>
-              <a:t>When something happens in a surprising way that nobody planned for.</a:t>
+              <a:t>The feeling of looking forward to something happening soon.</a:t>
             </a:r>
             <a:endParaRPr lang="en-US" sz="1200" dirty="0"/>
           </a:p>
@@ -44699,7 +45821,7 @@
                 <a:ea typeface="Trebuchet MS" pitchFamily="34" charset="-122"/>
                 <a:cs typeface="Trebuchet MS" pitchFamily="34" charset="-120"/>
               </a:rPr>
-              <a:t>unexpectedly</a:t>
+              <a:t>expectancy</a:t>
             </a:r>
             <a:endParaRPr lang="en-US" sz="1200" dirty="0"/>
           </a:p>
@@ -44765,7 +45887,7 @@
                 <a:ea typeface="Calibri" pitchFamily="34" charset="-122"/>
                 <a:cs typeface="Calibri" pitchFamily="34" charset="-120"/>
               </a:rPr>
-              <a:t>Something that happens without any warning and was not thought about beforehand.</a:t>
+              <a:t>A strong belief or feeling that something will happen in a certain way.</a:t>
             </a:r>
             <a:endParaRPr lang="en-US" sz="1200" dirty="0"/>
           </a:p>
@@ -44838,7 +45960,7 @@
                 <a:ea typeface="Trebuchet MS" pitchFamily="34" charset="-122"/>
                 <a:cs typeface="Trebuchet MS" pitchFamily="34" charset="-120"/>
               </a:rPr>
-              <a:t>expectant</a:t>
+              <a:t>unexpectedly</a:t>
             </a:r>
             <a:endParaRPr lang="en-US" sz="1200" dirty="0"/>
           </a:p>
@@ -45399,7 +46521,7 @@
                 <a:ea typeface="Calibri" pitchFamily="34" charset="-122"/>
                 <a:cs typeface="Calibri" pitchFamily="34" charset="-120"/>
               </a:rPr>
-              <a:t>The teacher told the class that she had high expectations for their science project.</a:t>
+              <a:t>We all had high expectations for the school play after seeing how hard the students had practised.</a:t>
             </a:r>
             <a:endParaRPr lang="en-US" sz="1500" dirty="0"/>
           </a:p>
@@ -45563,7 +46685,7 @@
                 <a:ea typeface="Calibri" pitchFamily="34" charset="-122"/>
                 <a:cs typeface="Calibri" pitchFamily="34" charset="-120"/>
               </a:rPr>
-              <a:t>Everyone was surprised by the unexpected rainstorm during the school sports carnival.</a:t>
+              <a:t>Nobody expected the storm to arrive so quickly, so many people were caught without an umbrella.</a:t>
             </a:r>
             <a:endParaRPr lang="en-US" sz="1500" dirty="0"/>
           </a:p>
@@ -45727,7 +46849,7 @@
                 <a:ea typeface="Calibri" pitchFamily="34" charset="-122"/>
                 <a:cs typeface="Calibri" pitchFamily="34" charset="-120"/>
               </a:rPr>
-              <a:t>The expectant crowd waited eagerly for the results of the singing competition to be announced.</a:t>
+              <a:t>The expectant crowd waited quietly for the principal to announce the winner of the award.</a:t>
             </a:r>
             <a:endParaRPr lang="en-US" sz="1500" dirty="0"/>
           </a:p>
